--- a/产品/多模态交互竞品发展脉络-v2.pptx
+++ b/产品/多模态交互竞品发展脉络-v2.pptx
@@ -3177,7 +3177,7 @@
           <p:spPr>
             <a:xfrm>
               <a:off x="564642" y="4184650"/>
-              <a:ext cx="539382" cy="264033"/>
+              <a:ext cx="523540" cy="264033"/>
             </a:xfrm>
             <a:prstGeom prst="rect">
               <a:avLst/>
@@ -3203,7 +3203,7 @@
                   <a:ea typeface="+mj-ea"/>
                   <a:cs typeface="+mj-cs"/>
                 </a:rPr>
-                <a:t>Bixby</a:t>
+                <a:t>Muse</a:t>
               </a:r>
             </a:p>
           </p:txBody>
@@ -3217,7 +3217,7 @@
           <p:spPr>
             <a:xfrm>
               <a:off x="2280666" y="4235450"/>
-              <a:ext cx="1374705" cy="205359"/>
+              <a:ext cx="1741018" cy="205359"/>
             </a:xfrm>
             <a:prstGeom prst="rect">
               <a:avLst/>
@@ -3243,7 +3243,7 @@
                   <a:ea typeface="+mn-ea"/>
                   <a:cs typeface="+mn-cs"/>
                 </a:rPr>
-                <a:t>相机/相册/文档/圈屏</a:t>
+                <a:t>语音＋App/网页，后续眼镜</a:t>
               </a:r>
             </a:p>
           </p:txBody>
@@ -3257,7 +3257,7 @@
           <p:spPr>
             <a:xfrm>
               <a:off x="4757166" y="4235450"/>
-              <a:ext cx="1706880" cy="205359"/>
+              <a:ext cx="1784623" cy="205359"/>
             </a:xfrm>
             <a:prstGeom prst="rect">
               <a:avLst/>
@@ -3283,7 +3283,7 @@
                   <a:ea typeface="+mn-ea"/>
                   <a:cs typeface="+mn-cs"/>
                 </a:rPr>
-                <a:t>靠近系统任务；多设备生态</a:t>
+                <a:t>后台多步；支付/邮件需确认</a:t>
               </a:r>
             </a:p>
           </p:txBody>
@@ -3297,7 +3297,7 @@
           <p:spPr>
             <a:xfrm>
               <a:off x="7805166" y="4235450"/>
-              <a:ext cx="858774" cy="205359"/>
+              <a:ext cx="1282827" cy="205359"/>
             </a:xfrm>
             <a:prstGeom prst="rect">
               <a:avLst/>
@@ -3323,7 +3323,7 @@
                   <a:ea typeface="+mn-ea"/>
                   <a:cs typeface="+mn-cs"/>
                 </a:rPr>
-                <a:t>手机内容理解</a:t>
+                <a:t>购物、生产力、日历</a:t>
               </a:r>
             </a:p>
           </p:txBody>
@@ -3337,7 +3337,7 @@
           <p:spPr>
             <a:xfrm>
               <a:off x="10091547" y="4248150"/>
-              <a:ext cx="1065327" cy="191643"/>
+              <a:ext cx="1487495" cy="191643"/>
             </a:xfrm>
             <a:prstGeom prst="rect">
               <a:avLst/>
@@ -3357,13 +3357,13 @@
               <a:r>
                 <a:rPr lang="zh-CN" sz="980" dirty="0">
                   <a:solidFill>
-                    <a:srgbClr val="6B6760"/>
-                  </a:solidFill>
-                  <a:latin typeface="+mn-lt"/>
-                  <a:ea typeface="+mn-ea"/>
-                  <a:cs typeface="+mn-cs"/>
-                </a:rPr>
-                <a:t>能力强弱依赖机型</a:t>
+                    <a:srgbClr val="1F5A49"/>
+                  </a:solidFill>
+                  <a:latin typeface="+mn-lt"/>
+                  <a:ea typeface="+mn-ea"/>
+                  <a:cs typeface="+mn-cs"/>
+                </a:rPr>
+                <a:t>1000万设置；待独立验证</a:t>
               </a:r>
             </a:p>
           </p:txBody>
@@ -3377,7 +3377,7 @@
           <p:spPr>
             <a:xfrm>
               <a:off x="564642" y="4622800"/>
-              <a:ext cx="781812" cy="264033"/>
+              <a:ext cx="1549284" cy="264033"/>
             </a:xfrm>
             <a:prstGeom prst="rect">
               <a:avLst/>
@@ -3403,7 +3403,7 @@
                   <a:ea typeface="+mj-ea"/>
                   <a:cs typeface="+mj-cs"/>
                 </a:rPr>
-                <a:t>超级小爱</a:t>
+                <a:t>Bixby / 超级小爱</a:t>
               </a:r>
             </a:p>
           </p:txBody>
@@ -3417,7 +3417,7 @@
           <p:spPr>
             <a:xfrm>
               <a:off x="2280666" y="4673600"/>
-              <a:ext cx="1735150" cy="205359"/>
+              <a:ext cx="1657407" cy="205359"/>
             </a:xfrm>
             <a:prstGeom prst="rect">
               <a:avLst/>
@@ -3443,7 +3443,7 @@
                   <a:ea typeface="+mn-ea"/>
                   <a:cs typeface="+mn-cs"/>
                 </a:rPr>
-                <a:t>文字/语音/图片/文档/屏幕</a:t>
+                <a:t>相机/文档/圈屏/设备入口</a:t>
               </a:r>
             </a:p>
           </p:txBody>
@@ -3457,7 +3457,7 @@
           <p:spPr>
             <a:xfrm>
               <a:off x="4757166" y="4673600"/>
-              <a:ext cx="1424178" cy="205359"/>
+              <a:ext cx="1706880" cy="205359"/>
             </a:xfrm>
             <a:prstGeom prst="rect">
               <a:avLst/>
@@ -3483,7 +3483,7 @@
                   <a:ea typeface="+mn-ea"/>
                   <a:cs typeface="+mn-cs"/>
                 </a:rPr>
-                <a:t>陪伴、帮看、设备生态</a:t>
+                <a:t>系统任务、陪伴与设备生态</a:t>
               </a:r>
             </a:p>
           </p:txBody>
@@ -3497,7 +3497,7 @@
           <p:spPr>
             <a:xfrm>
               <a:off x="7805166" y="4673600"/>
-              <a:ext cx="1000125" cy="205359"/>
+              <a:ext cx="717423" cy="205359"/>
             </a:xfrm>
             <a:prstGeom prst="rect">
               <a:avLst/>
@@ -3523,7 +3523,7 @@
                   <a:ea typeface="+mn-ea"/>
                   <a:cs typeface="+mn-cs"/>
                 </a:rPr>
-                <a:t>家庭与个人助手</a:t>
+                <a:t>手机与家庭</a:t>
               </a:r>
             </a:p>
           </p:txBody>
@@ -36373,26 +36373,26 @@
           </p:nvSpPr>
           <p:spPr>
             <a:xfrm>
-              <a:off x="565785" y="2279650"/>
-              <a:ext cx="1745635" cy="220028"/>
-            </a:xfrm>
-            <a:prstGeom prst="rect">
-              <a:avLst/>
-            </a:prstGeom>
-            <a:noFill/>
-            <a:ln>
-              <a:noFill/>
-            </a:ln>
-          </p:spPr>
-          <p:txBody>
-            <a:bodyPr wrap="none" lIns="0" tIns="0" rIns="0" bIns="0" anchor="t" anchorCtr="0">
-              <a:spAutoFit/>
-            </a:bodyPr>
-            <a:lstStyle/>
-            <a:p>
-              <a:pPr algn="l"/>
-              <a:r>
-                <a:rPr lang="en-US" sz="1120" dirty="0">
+              <a:off x="566166" y="2292350"/>
+              <a:ext cx="1636485" cy="205359"/>
+            </a:xfrm>
+            <a:prstGeom prst="rect">
+              <a:avLst/>
+            </a:prstGeom>
+            <a:noFill/>
+            <a:ln>
+              <a:noFill/>
+            </a:ln>
+          </p:spPr>
+          <p:txBody>
+            <a:bodyPr wrap="none" lIns="0" tIns="0" rIns="0" bIns="0" anchor="t" anchorCtr="0">
+              <a:spAutoFit/>
+            </a:bodyPr>
+            <a:lstStyle/>
+            <a:p>
+              <a:pPr algn="l"/>
+              <a:r>
+                <a:rPr lang="en-US" sz="1050" dirty="0">
                   <a:solidFill>
                     <a:srgbClr val="3F3B35"/>
                   </a:solidFill>
@@ -36413,26 +36413,26 @@
           </p:nvSpPr>
           <p:spPr>
             <a:xfrm>
-              <a:off x="565785" y="2508250"/>
-              <a:ext cx="1089467" cy="220028"/>
-            </a:xfrm>
-            <a:prstGeom prst="rect">
-              <a:avLst/>
-            </a:prstGeom>
-            <a:noFill/>
-            <a:ln>
-              <a:noFill/>
-            </a:ln>
-          </p:spPr>
-          <p:txBody>
-            <a:bodyPr wrap="none" lIns="0" tIns="0" rIns="0" bIns="0" anchor="t" anchorCtr="0">
-              <a:spAutoFit/>
-            </a:bodyPr>
-            <a:lstStyle/>
-            <a:p>
-              <a:pPr algn="l"/>
-              <a:r>
-                <a:rPr lang="zh-CN" sz="1120" dirty="0">
+              <a:off x="566166" y="2520950"/>
+              <a:ext cx="1530225" cy="205359"/>
+            </a:xfrm>
+            <a:prstGeom prst="rect">
+              <a:avLst/>
+            </a:prstGeom>
+            <a:noFill/>
+            <a:ln>
+              <a:noFill/>
+            </a:ln>
+          </p:spPr>
+          <p:txBody>
+            <a:bodyPr wrap="none" lIns="0" tIns="0" rIns="0" bIns="0" anchor="t" anchorCtr="0">
+              <a:spAutoFit/>
+            </a:bodyPr>
+            <a:lstStyle/>
+            <a:p>
+              <a:pPr algn="l"/>
+              <a:r>
+                <a:rPr lang="zh-CN" sz="1050" dirty="0">
                   <a:solidFill>
                     <a:srgbClr val="3F3B35"/>
                   </a:solidFill>
@@ -36440,7 +36440,7 @@
                   <a:ea typeface="+mn-ea"/>
                   <a:cs typeface="+mn-cs"/>
                 </a:rPr>
-                <a:t>小艺 / 超级小爱</a:t>
+                <a:t>Muse / 小艺 / 超级小爱</a:t>
               </a:r>
             </a:p>
           </p:txBody>

--- a/产品/多模态交互竞品发展脉络-v2.pptx
+++ b/产品/多模态交互竞品发展脉络-v2.pptx
@@ -26,6 +26,11 @@
     <p:sldId id="274" r:id="rId25"/>
     <p:sldId id="275" r:id="rId26"/>
     <p:sldId id="276" r:id="rId27"/>
+    <p:sldId id="277" r:id="rId28"/>
+    <p:sldId id="278" r:id="rId29"/>
+    <p:sldId id="279" r:id="rId30"/>
+    <p:sldId id="280" r:id="rId31"/>
+    <p:sldId id="281" r:id="rId32"/>
   </p:sldIdLst>
   <p:sldSz cx="12192000" cy="6858000" type="screen16x9"/>
   <p:notesSz cx="6858000" cy="9144000"/>
@@ -26337,6 +26342,9462 @@
 </p:sld>
 </file>
 
+<file path=ppt/slides/slide22.xml><?xml version="1.0" encoding="utf-8"?>
+<p:sld xmlns:a="http://schemas.openxmlformats.org/drawingml/2006/main" xmlns:r="http://schemas.openxmlformats.org/officeDocument/2006/relationships" xmlns:p="http://schemas.openxmlformats.org/presentationml/2006/main">
+  <p:cSld>
+    <p:bg>
+      <p:bgPr>
+        <a:solidFill>
+          <a:srgbClr val="F4F0E7"/>
+        </a:solidFill>
+        <a:effectLst/>
+      </p:bgPr>
+    </p:bg>
+    <p:spTree>
+      <p:nvGrpSpPr>
+        <p:cNvPr id="1" name=""/>
+        <p:cNvGrpSpPr/>
+        <p:nvPr/>
+      </p:nvGrpSpPr>
+      <p:grpSpPr>
+        <a:xfrm>
+          <a:off x="0" y="0"/>
+          <a:ext cx="0" cy="0"/>
+          <a:chOff x="0" y="0"/>
+          <a:chExt cx="0" cy="0"/>
+        </a:xfrm>
+      </p:grpSpPr>
+      <p:grpSp>
+        <p:nvGrpSpPr>
+          <p:cNvPr id="4" name="page-title"/>
+          <p:cNvGrpSpPr/>
+          <p:nvPr/>
+        </p:nvGrpSpPr>
+        <p:grpSpPr>
+          <a:xfrm>
+            <a:off x="559308" y="273050"/>
+            <a:ext cx="7025152" cy="659892"/>
+            <a:chOff x="559308" y="273050"/>
+            <a:chExt cx="7025152" cy="659892"/>
+          </a:xfrm>
+        </p:grpSpPr>
+        <p:sp>
+          <p:nvSpPr>
+            <p:cNvPr id="2" name="TextBox 2"/>
+            <p:cNvSpPr txBox="1"/>
+            <p:nvPr/>
+          </p:nvSpPr>
+          <p:spPr>
+            <a:xfrm>
+              <a:off x="566166" y="273050"/>
+              <a:ext cx="1457078" cy="205359"/>
+            </a:xfrm>
+            <a:prstGeom prst="rect">
+              <a:avLst/>
+            </a:prstGeom>
+            <a:noFill/>
+            <a:ln>
+              <a:noFill/>
+            </a:ln>
+          </p:spPr>
+          <p:txBody>
+            <a:bodyPr wrap="none" lIns="0" tIns="0" rIns="0" bIns="0" anchor="t" anchorCtr="0">
+              <a:spAutoFit/>
+            </a:bodyPr>
+            <a:lstStyle/>
+            <a:p>
+              <a:pPr algn="l"/>
+              <a:r>
+                <a:rPr lang="zh-CN" sz="1050" b="1" spc="150" dirty="0">
+                  <a:solidFill>
+                    <a:srgbClr val="C14E2C"/>
+                  </a:solidFill>
+                  <a:latin typeface="+mn-lt"/>
+                  <a:ea typeface="+mn-ea"/>
+                  <a:cs typeface="+mn-cs"/>
+                </a:rPr>
+                <a:t>补页 01 · 时间串联</a:t>
+              </a:r>
+            </a:p>
+          </p:txBody>
+        </p:sp>
+        <p:sp>
+          <p:nvSpPr>
+            <p:cNvPr id="3" name="TextBox 3"/>
+            <p:cNvSpPr txBox="1"/>
+            <p:nvPr/>
+          </p:nvSpPr>
+          <p:spPr>
+            <a:xfrm>
+              <a:off x="559308" y="463550"/>
+              <a:ext cx="7025152" cy="469392"/>
+            </a:xfrm>
+            <a:prstGeom prst="rect">
+              <a:avLst/>
+            </a:prstGeom>
+            <a:noFill/>
+            <a:ln>
+              <a:noFill/>
+            </a:ln>
+          </p:spPr>
+          <p:txBody>
+            <a:bodyPr wrap="none" lIns="0" tIns="0" rIns="0" bIns="0" anchor="t" anchorCtr="0">
+              <a:spAutoFit/>
+            </a:bodyPr>
+            <a:lstStyle/>
+            <a:p>
+              <a:pPr algn="l"/>
+              <a:r>
+                <a:rPr lang="zh-CN" sz="2400" b="1" dirty="0">
+                  <a:solidFill>
+                    <a:srgbClr val="1D1C19"/>
+                  </a:solidFill>
+                  <a:latin typeface="+mj-lt"/>
+                  <a:ea typeface="+mj-ea"/>
+                  <a:cs typeface="+mj-cs"/>
+                </a:rPr>
+                <a:t>2011–2026：从“帮我查”走到“看着我一起做”</a:t>
+              </a:r>
+            </a:p>
+          </p:txBody>
+        </p:sp>
+      </p:grpSp>
+      <p:grpSp>
+        <p:nvGrpSpPr>
+          <p:cNvPr id="59" name="complete-timeline"/>
+          <p:cNvGrpSpPr/>
+          <p:nvPr/>
+        </p:nvGrpSpPr>
+        <p:grpSpPr>
+          <a:xfrm>
+            <a:off x="563499" y="1270000"/>
+            <a:ext cx="11105508" cy="4550791"/>
+            <a:chOff x="563499" y="1270000"/>
+            <a:chExt cx="11105508" cy="4550791"/>
+          </a:xfrm>
+        </p:grpSpPr>
+        <p:sp>
+          <p:nvSpPr>
+            <p:cNvPr id="5" name="TextBox 5"/>
+            <p:cNvSpPr txBox="1"/>
+            <p:nvPr/>
+          </p:nvSpPr>
+          <p:spPr>
+            <a:xfrm>
+              <a:off x="565785" y="1270000"/>
+              <a:ext cx="5590083" cy="220028"/>
+            </a:xfrm>
+            <a:prstGeom prst="rect">
+              <a:avLst/>
+            </a:prstGeom>
+            <a:noFill/>
+            <a:ln>
+              <a:noFill/>
+            </a:ln>
+          </p:spPr>
+          <p:txBody>
+            <a:bodyPr wrap="none" lIns="0" tIns="0" rIns="0" bIns="0" anchor="t" anchorCtr="0">
+              <a:spAutoFit/>
+            </a:bodyPr>
+            <a:lstStyle/>
+            <a:p>
+              <a:pPr algn="l"/>
+              <a:r>
+                <a:rPr lang="zh-CN" sz="1120" dirty="0">
+                  <a:solidFill>
+                    <a:srgbClr val="4D4942"/>
+                  </a:solidFill>
+                  <a:latin typeface="+mn-lt"/>
+                  <a:ea typeface="+mn-ea"/>
+                  <a:cs typeface="+mn-cs"/>
+                </a:rPr>
+                <a:t>底部四个阶段依次回答：能问什么、能看懂什么、能持续做什么、能替我完成什么。</a:t>
+              </a:r>
+            </a:p>
+          </p:txBody>
+        </p:sp>
+        <p:sp>
+          <p:nvSpPr>
+            <p:cNvPr id="6" name="Line 6"/>
+            <p:cNvSpPr/>
+            <p:nvPr/>
+          </p:nvSpPr>
+          <p:spPr>
+            <a:xfrm>
+              <a:off x="666750" y="1828800"/>
+              <a:ext cx="10858500" cy="9525"/>
+            </a:xfrm>
+            <a:custGeom>
+              <a:avLst/>
+              <a:gdLst/>
+              <a:ahLst/>
+              <a:cxnLst/>
+              <a:rect l="l" t="t" r="r" b="b"/>
+              <a:pathLst>
+                <a:path w="10858500" h="9525">
+                  <a:moveTo>
+                    <a:pt x="0" y="0"/>
+                  </a:moveTo>
+                  <a:lnTo>
+                    <a:pt x="10858500" y="0"/>
+                  </a:lnTo>
+                </a:path>
+              </a:pathLst>
+            </a:custGeom>
+            <a:noFill/>
+            <a:ln w="19050">
+              <a:solidFill>
+                <a:srgbClr val="B6AEA1"/>
+              </a:solidFill>
+            </a:ln>
+          </p:spPr>
+        </p:sp>
+        <p:sp>
+          <p:nvSpPr>
+            <p:cNvPr id="7" name="Ellipse 7"/>
+            <p:cNvSpPr/>
+            <p:nvPr/>
+          </p:nvSpPr>
+          <p:spPr>
+            <a:xfrm>
+              <a:off x="1724025" y="1743075"/>
+              <a:ext cx="171450" cy="171450"/>
+            </a:xfrm>
+            <a:prstGeom prst="ellipse">
+              <a:avLst/>
+            </a:prstGeom>
+            <a:solidFill>
+              <a:srgbClr val="1D1C19"/>
+            </a:solidFill>
+            <a:ln>
+              <a:noFill/>
+            </a:ln>
+          </p:spPr>
+        </p:sp>
+        <p:sp>
+          <p:nvSpPr>
+            <p:cNvPr id="8" name="Ellipse 8"/>
+            <p:cNvSpPr/>
+            <p:nvPr/>
+          </p:nvSpPr>
+          <p:spPr>
+            <a:xfrm>
+              <a:off x="4676775" y="1743075"/>
+              <a:ext cx="171450" cy="171450"/>
+            </a:xfrm>
+            <a:prstGeom prst="ellipse">
+              <a:avLst/>
+            </a:prstGeom>
+            <a:solidFill>
+              <a:srgbClr val="1D1C19"/>
+            </a:solidFill>
+            <a:ln>
+              <a:noFill/>
+            </a:ln>
+          </p:spPr>
+        </p:sp>
+        <p:sp>
+          <p:nvSpPr>
+            <p:cNvPr id="9" name="Ellipse 9"/>
+            <p:cNvSpPr/>
+            <p:nvPr/>
+          </p:nvSpPr>
+          <p:spPr>
+            <a:xfrm>
+              <a:off x="7629525" y="1743075"/>
+              <a:ext cx="171450" cy="171450"/>
+            </a:xfrm>
+            <a:prstGeom prst="ellipse">
+              <a:avLst/>
+            </a:prstGeom>
+            <a:solidFill>
+              <a:srgbClr val="1D1C19"/>
+            </a:solidFill>
+            <a:ln>
+              <a:noFill/>
+            </a:ln>
+          </p:spPr>
+        </p:sp>
+        <p:sp>
+          <p:nvSpPr>
+            <p:cNvPr id="10" name="Ellipse 10"/>
+            <p:cNvSpPr/>
+            <p:nvPr/>
+          </p:nvSpPr>
+          <p:spPr>
+            <a:xfrm>
+              <a:off x="10563225" y="1724025"/>
+              <a:ext cx="209550" cy="209550"/>
+            </a:xfrm>
+            <a:prstGeom prst="ellipse">
+              <a:avLst/>
+            </a:prstGeom>
+            <a:solidFill>
+              <a:srgbClr val="C14E2C"/>
+            </a:solidFill>
+            <a:ln>
+              <a:noFill/>
+            </a:ln>
+          </p:spPr>
+        </p:sp>
+        <p:sp>
+          <p:nvSpPr>
+            <p:cNvPr id="11" name="TextBox 11"/>
+            <p:cNvSpPr txBox="1"/>
+            <p:nvPr/>
+          </p:nvSpPr>
+          <p:spPr>
+            <a:xfrm>
+              <a:off x="1461950" y="1524000"/>
+              <a:ext cx="695600" cy="191643"/>
+            </a:xfrm>
+            <a:prstGeom prst="rect">
+              <a:avLst/>
+            </a:prstGeom>
+            <a:noFill/>
+            <a:ln>
+              <a:noFill/>
+            </a:ln>
+          </p:spPr>
+          <p:txBody>
+            <a:bodyPr wrap="none" lIns="0" tIns="0" rIns="0" bIns="0" anchor="t" anchorCtr="0">
+              <a:spAutoFit/>
+            </a:bodyPr>
+            <a:lstStyle/>
+            <a:p>
+              <a:pPr algn="ctr"/>
+              <a:r>
+                <a:rPr lang="zh-CN" sz="980" b="1" dirty="0">
+                  <a:solidFill>
+                    <a:srgbClr val="6B6760"/>
+                  </a:solidFill>
+                  <a:latin typeface="+mn-lt"/>
+                  <a:ea typeface="+mn-ea"/>
+                  <a:cs typeface="+mn-cs"/>
+                </a:rPr>
+                <a:t>2011–2017</a:t>
+              </a:r>
+            </a:p>
+          </p:txBody>
+        </p:sp>
+        <p:sp>
+          <p:nvSpPr>
+            <p:cNvPr id="12" name="TextBox 12"/>
+            <p:cNvSpPr txBox="1"/>
+            <p:nvPr/>
+          </p:nvSpPr>
+          <p:spPr>
+            <a:xfrm>
+              <a:off x="1331976" y="1898650"/>
+              <a:ext cx="955548" cy="322707"/>
+            </a:xfrm>
+            <a:prstGeom prst="rect">
+              <a:avLst/>
+            </a:prstGeom>
+            <a:noFill/>
+            <a:ln>
+              <a:noFill/>
+            </a:ln>
+          </p:spPr>
+          <p:txBody>
+            <a:bodyPr wrap="none" lIns="0" tIns="0" rIns="0" bIns="0" anchor="t" anchorCtr="0">
+              <a:spAutoFit/>
+            </a:bodyPr>
+            <a:lstStyle/>
+            <a:p>
+              <a:pPr algn="ctr"/>
+              <a:r>
+                <a:rPr lang="zh-CN" sz="1650" b="1" dirty="0">
+                  <a:solidFill>
+                    <a:srgbClr val="1D1C19"/>
+                  </a:solidFill>
+                  <a:latin typeface="+mj-lt"/>
+                  <a:ea typeface="+mj-ea"/>
+                  <a:cs typeface="+mj-cs"/>
+                </a:rPr>
+                <a:t>入口出现</a:t>
+              </a:r>
+            </a:p>
+          </p:txBody>
+        </p:sp>
+        <p:sp>
+          <p:nvSpPr>
+            <p:cNvPr id="13" name="TextBox 13"/>
+            <p:cNvSpPr txBox="1"/>
+            <p:nvPr/>
+          </p:nvSpPr>
+          <p:spPr>
+            <a:xfrm>
+              <a:off x="1270490" y="2228850"/>
+              <a:ext cx="1078520" cy="191643"/>
+            </a:xfrm>
+            <a:prstGeom prst="rect">
+              <a:avLst/>
+            </a:prstGeom>
+            <a:noFill/>
+            <a:ln>
+              <a:noFill/>
+            </a:ln>
+          </p:spPr>
+          <p:txBody>
+            <a:bodyPr wrap="none" lIns="0" tIns="0" rIns="0" bIns="0" anchor="t" anchorCtr="0">
+              <a:spAutoFit/>
+            </a:bodyPr>
+            <a:lstStyle/>
+            <a:p>
+              <a:pPr algn="ctr"/>
+              <a:r>
+                <a:rPr lang="zh-CN" sz="980" dirty="0">
+                  <a:solidFill>
+                    <a:srgbClr val="3F3B35"/>
+                  </a:solidFill>
+                  <a:latin typeface="+mn-lt"/>
+                  <a:ea typeface="+mn-ea"/>
+                  <a:cs typeface="+mn-cs"/>
+                </a:rPr>
+                <a:t>“这是什么东西？”</a:t>
+              </a:r>
+            </a:p>
+          </p:txBody>
+        </p:sp>
+        <p:sp>
+          <p:nvSpPr>
+            <p:cNvPr id="14" name="TextBox 14"/>
+            <p:cNvSpPr txBox="1"/>
+            <p:nvPr/>
+          </p:nvSpPr>
+          <p:spPr>
+            <a:xfrm>
+              <a:off x="612110" y="2552700"/>
+              <a:ext cx="2395280" cy="191643"/>
+            </a:xfrm>
+            <a:prstGeom prst="rect">
+              <a:avLst/>
+            </a:prstGeom>
+            <a:noFill/>
+            <a:ln>
+              <a:noFill/>
+            </a:ln>
+          </p:spPr>
+          <p:txBody>
+            <a:bodyPr wrap="none" lIns="0" tIns="0" rIns="0" bIns="0" anchor="t" anchorCtr="0">
+              <a:spAutoFit/>
+            </a:bodyPr>
+            <a:lstStyle/>
+            <a:p>
+              <a:pPr algn="ctr"/>
+              <a:r>
+                <a:rPr lang="en-US" sz="980" dirty="0">
+                  <a:solidFill>
+                    <a:srgbClr val="3F3B35"/>
+                  </a:solidFill>
+                  <a:latin typeface="+mn-lt"/>
+                  <a:ea typeface="+mn-ea"/>
+                  <a:cs typeface="+mn-cs"/>
+                </a:rPr>
+                <a:t>Siri · Echo · Google Assistant · Bixby</a:t>
+              </a:r>
+            </a:p>
+          </p:txBody>
+        </p:sp>
+        <p:sp>
+          <p:nvSpPr>
+            <p:cNvPr id="15" name="TextBox 15"/>
+            <p:cNvSpPr txBox="1"/>
+            <p:nvPr/>
+          </p:nvSpPr>
+          <p:spPr>
+            <a:xfrm>
+              <a:off x="1297374" y="2781300"/>
+              <a:ext cx="1024753" cy="191643"/>
+            </a:xfrm>
+            <a:prstGeom prst="rect">
+              <a:avLst/>
+            </a:prstGeom>
+            <a:noFill/>
+            <a:ln>
+              <a:noFill/>
+            </a:ln>
+          </p:spPr>
+          <p:txBody>
+            <a:bodyPr wrap="none" lIns="0" tIns="0" rIns="0" bIns="0" anchor="t" anchorCtr="0">
+              <a:spAutoFit/>
+            </a:bodyPr>
+            <a:lstStyle/>
+            <a:p>
+              <a:pPr algn="ctr"/>
+              <a:r>
+                <a:rPr lang="en-US" sz="980" dirty="0">
+                  <a:solidFill>
+                    <a:srgbClr val="3F3B35"/>
+                  </a:solidFill>
+                  <a:latin typeface="+mn-lt"/>
+                  <a:ea typeface="+mn-ea"/>
+                  <a:cs typeface="+mn-cs"/>
+                </a:rPr>
+                <a:t>Lens · Seeing AI</a:t>
+              </a:r>
+            </a:p>
+          </p:txBody>
+        </p:sp>
+        <p:sp>
+          <p:nvSpPr>
+            <p:cNvPr id="16" name="TextBox 16"/>
+            <p:cNvSpPr txBox="1"/>
+            <p:nvPr/>
+          </p:nvSpPr>
+          <p:spPr>
+            <a:xfrm>
+              <a:off x="1259776" y="3009900"/>
+              <a:ext cx="1099947" cy="176212"/>
+            </a:xfrm>
+            <a:prstGeom prst="rect">
+              <a:avLst/>
+            </a:prstGeom>
+            <a:noFill/>
+            <a:ln>
+              <a:noFill/>
+            </a:ln>
+          </p:spPr>
+          <p:txBody>
+            <a:bodyPr wrap="none" lIns="0" tIns="0" rIns="0" bIns="0" anchor="t" anchorCtr="0">
+              <a:spAutoFit/>
+            </a:bodyPr>
+            <a:lstStyle/>
+            <a:p>
+              <a:pPr algn="ctr"/>
+              <a:r>
+                <a:rPr lang="zh-CN" sz="900" dirty="0">
+                  <a:solidFill>
+                    <a:srgbClr val="6B6760"/>
+                  </a:solidFill>
+                  <a:latin typeface="+mn-lt"/>
+                  <a:ea typeface="+mn-ea"/>
+                  <a:cs typeface="+mn-cs"/>
+                </a:rPr>
+                <a:t>语音、识图分头发展</a:t>
+              </a:r>
+            </a:p>
+          </p:txBody>
+        </p:sp>
+        <p:sp>
+          <p:nvSpPr>
+            <p:cNvPr id="17" name="TextBox 17"/>
+            <p:cNvSpPr txBox="1"/>
+            <p:nvPr/>
+          </p:nvSpPr>
+          <p:spPr>
+            <a:xfrm>
+              <a:off x="4414700" y="1524000"/>
+              <a:ext cx="695600" cy="191643"/>
+            </a:xfrm>
+            <a:prstGeom prst="rect">
+              <a:avLst/>
+            </a:prstGeom>
+            <a:noFill/>
+            <a:ln>
+              <a:noFill/>
+            </a:ln>
+          </p:spPr>
+          <p:txBody>
+            <a:bodyPr wrap="none" lIns="0" tIns="0" rIns="0" bIns="0" anchor="t" anchorCtr="0">
+              <a:spAutoFit/>
+            </a:bodyPr>
+            <a:lstStyle/>
+            <a:p>
+              <a:pPr algn="ctr"/>
+              <a:r>
+                <a:rPr lang="zh-CN" sz="980" b="1" dirty="0">
+                  <a:solidFill>
+                    <a:srgbClr val="6B6760"/>
+                  </a:solidFill>
+                  <a:latin typeface="+mn-lt"/>
+                  <a:ea typeface="+mn-ea"/>
+                  <a:cs typeface="+mn-cs"/>
+                </a:rPr>
+                <a:t>2018–2021</a:t>
+              </a:r>
+            </a:p>
+          </p:txBody>
+        </p:sp>
+        <p:sp>
+          <p:nvSpPr>
+            <p:cNvPr id="18" name="TextBox 18"/>
+            <p:cNvSpPr txBox="1"/>
+            <p:nvPr/>
+          </p:nvSpPr>
+          <p:spPr>
+            <a:xfrm>
+              <a:off x="4284726" y="1898650"/>
+              <a:ext cx="955548" cy="322707"/>
+            </a:xfrm>
+            <a:prstGeom prst="rect">
+              <a:avLst/>
+            </a:prstGeom>
+            <a:noFill/>
+            <a:ln>
+              <a:noFill/>
+            </a:ln>
+          </p:spPr>
+          <p:txBody>
+            <a:bodyPr wrap="none" lIns="0" tIns="0" rIns="0" bIns="0" anchor="t" anchorCtr="0">
+              <a:spAutoFit/>
+            </a:bodyPr>
+            <a:lstStyle/>
+            <a:p>
+              <a:pPr algn="ctr"/>
+              <a:r>
+                <a:rPr lang="zh-CN" sz="1650" b="1" dirty="0">
+                  <a:solidFill>
+                    <a:srgbClr val="1D1C19"/>
+                  </a:solidFill>
+                  <a:latin typeface="+mj-lt"/>
+                  <a:ea typeface="+mj-ea"/>
+                  <a:cs typeface="+mj-cs"/>
+                </a:rPr>
+                <a:t>边看边问</a:t>
+              </a:r>
+            </a:p>
+          </p:txBody>
+        </p:sp>
+        <p:sp>
+          <p:nvSpPr>
+            <p:cNvPr id="19" name="TextBox 19"/>
+            <p:cNvSpPr txBox="1"/>
+            <p:nvPr/>
+          </p:nvSpPr>
+          <p:spPr>
+            <a:xfrm>
+              <a:off x="3959385" y="2228850"/>
+              <a:ext cx="1606230" cy="191643"/>
+            </a:xfrm>
+            <a:prstGeom prst="rect">
+              <a:avLst/>
+            </a:prstGeom>
+            <a:noFill/>
+            <a:ln>
+              <a:noFill/>
+            </a:ln>
+          </p:spPr>
+          <p:txBody>
+            <a:bodyPr wrap="none" lIns="0" tIns="0" rIns="0" bIns="0" anchor="t" anchorCtr="0">
+              <a:spAutoFit/>
+            </a:bodyPr>
+            <a:lstStyle/>
+            <a:p>
+              <a:pPr algn="ctr"/>
+              <a:r>
+                <a:rPr lang="zh-CN" sz="980" dirty="0">
+                  <a:solidFill>
+                    <a:srgbClr val="3F3B35"/>
+                  </a:solidFill>
+                  <a:latin typeface="+mn-lt"/>
+                  <a:ea typeface="+mn-ea"/>
+                  <a:cs typeface="+mn-cs"/>
+                </a:rPr>
+                <a:t>“镜头对着它，下一步呢？”</a:t>
+              </a:r>
+            </a:p>
+          </p:txBody>
+        </p:sp>
+        <p:sp>
+          <p:nvSpPr>
+            <p:cNvPr id="20" name="TextBox 20"/>
+            <p:cNvSpPr txBox="1"/>
+            <p:nvPr/>
+          </p:nvSpPr>
+          <p:spPr>
+            <a:xfrm>
+              <a:off x="3642199" y="2552700"/>
+              <a:ext cx="2240603" cy="191643"/>
+            </a:xfrm>
+            <a:prstGeom prst="rect">
+              <a:avLst/>
+            </a:prstGeom>
+            <a:noFill/>
+            <a:ln>
+              <a:noFill/>
+            </a:ln>
+          </p:spPr>
+          <p:txBody>
+            <a:bodyPr wrap="none" lIns="0" tIns="0" rIns="0" bIns="0" anchor="t" anchorCtr="0">
+              <a:spAutoFit/>
+            </a:bodyPr>
+            <a:lstStyle/>
+            <a:p>
+              <a:pPr algn="ctr"/>
+              <a:r>
+                <a:rPr lang="zh-CN" sz="980" dirty="0">
+                  <a:solidFill>
+                    <a:srgbClr val="3F3B35"/>
+                  </a:solidFill>
+                  <a:latin typeface="+mn-lt"/>
+                  <a:ea typeface="+mn-ea"/>
+                  <a:cs typeface="+mn-cs"/>
+                </a:rPr>
+                <a:t>Lens 实时取景/翻译 · Smart Display</a:t>
+              </a:r>
+            </a:p>
+          </p:txBody>
+        </p:sp>
+        <p:sp>
+          <p:nvSpPr>
+            <p:cNvPr id="21" name="TextBox 21"/>
+            <p:cNvSpPr txBox="1"/>
+            <p:nvPr/>
+          </p:nvSpPr>
+          <p:spPr>
+            <a:xfrm>
+              <a:off x="3955916" y="2781300"/>
+              <a:ext cx="1613169" cy="191643"/>
+            </a:xfrm>
+            <a:prstGeom prst="rect">
+              <a:avLst/>
+            </a:prstGeom>
+            <a:noFill/>
+            <a:ln>
+              <a:noFill/>
+            </a:ln>
+          </p:spPr>
+          <p:txBody>
+            <a:bodyPr wrap="none" lIns="0" tIns="0" rIns="0" bIns="0" anchor="t" anchorCtr="0">
+              <a:spAutoFit/>
+            </a:bodyPr>
+            <a:lstStyle/>
+            <a:p>
+              <a:pPr algn="ctr"/>
+              <a:r>
+                <a:rPr lang="en-US" sz="980" dirty="0">
+                  <a:solidFill>
+                    <a:srgbClr val="3F3B35"/>
+                  </a:solidFill>
+                  <a:latin typeface="+mn-lt"/>
+                  <a:ea typeface="+mn-ea"/>
+                  <a:cs typeface="+mn-cs"/>
+                </a:rPr>
+                <a:t>Alexa APL · Echo Show 10</a:t>
+              </a:r>
+            </a:p>
+          </p:txBody>
+        </p:sp>
+        <p:sp>
+          <p:nvSpPr>
+            <p:cNvPr id="22" name="TextBox 22"/>
+            <p:cNvSpPr txBox="1"/>
+            <p:nvPr/>
+          </p:nvSpPr>
+          <p:spPr>
+            <a:xfrm>
+              <a:off x="4007929" y="3009900"/>
+              <a:ext cx="1509141" cy="176212"/>
+            </a:xfrm>
+            <a:prstGeom prst="rect">
+              <a:avLst/>
+            </a:prstGeom>
+            <a:noFill/>
+            <a:ln>
+              <a:noFill/>
+            </a:ln>
+          </p:spPr>
+          <p:txBody>
+            <a:bodyPr wrap="none" lIns="0" tIns="0" rIns="0" bIns="0" anchor="t" anchorCtr="0">
+              <a:spAutoFit/>
+            </a:bodyPr>
+            <a:lstStyle/>
+            <a:p>
+              <a:pPr algn="ctr"/>
+              <a:r>
+                <a:rPr lang="zh-CN" sz="900" dirty="0">
+                  <a:solidFill>
+                    <a:srgbClr val="6B6760"/>
+                  </a:solidFill>
+                  <a:latin typeface="+mn-lt"/>
+                  <a:ea typeface="+mn-ea"/>
+                  <a:cs typeface="+mn-cs"/>
+                </a:rPr>
+                <a:t>语音与屏幕组合；CLIP 打底</a:t>
+              </a:r>
+            </a:p>
+          </p:txBody>
+        </p:sp>
+        <p:sp>
+          <p:nvSpPr>
+            <p:cNvPr id="23" name="TextBox 23"/>
+            <p:cNvSpPr txBox="1"/>
+            <p:nvPr/>
+          </p:nvSpPr>
+          <p:spPr>
+            <a:xfrm>
+              <a:off x="7367450" y="1524000"/>
+              <a:ext cx="695600" cy="191643"/>
+            </a:xfrm>
+            <a:prstGeom prst="rect">
+              <a:avLst/>
+            </a:prstGeom>
+            <a:noFill/>
+            <a:ln>
+              <a:noFill/>
+            </a:ln>
+          </p:spPr>
+          <p:txBody>
+            <a:bodyPr wrap="none" lIns="0" tIns="0" rIns="0" bIns="0" anchor="t" anchorCtr="0">
+              <a:spAutoFit/>
+            </a:bodyPr>
+            <a:lstStyle/>
+            <a:p>
+              <a:pPr algn="ctr"/>
+              <a:r>
+                <a:rPr lang="zh-CN" sz="980" b="1" dirty="0">
+                  <a:solidFill>
+                    <a:srgbClr val="6B6760"/>
+                  </a:solidFill>
+                  <a:latin typeface="+mn-lt"/>
+                  <a:ea typeface="+mn-ea"/>
+                  <a:cs typeface="+mn-cs"/>
+                </a:rPr>
+                <a:t>2022–2023</a:t>
+              </a:r>
+            </a:p>
+          </p:txBody>
+        </p:sp>
+        <p:sp>
+          <p:nvSpPr>
+            <p:cNvPr id="24" name="TextBox 24"/>
+            <p:cNvSpPr txBox="1"/>
+            <p:nvPr/>
+          </p:nvSpPr>
+          <p:spPr>
+            <a:xfrm>
+              <a:off x="7120128" y="1898650"/>
+              <a:ext cx="1190244" cy="322707"/>
+            </a:xfrm>
+            <a:prstGeom prst="rect">
+              <a:avLst/>
+            </a:prstGeom>
+            <a:noFill/>
+            <a:ln>
+              <a:noFill/>
+            </a:ln>
+          </p:spPr>
+          <p:txBody>
+            <a:bodyPr wrap="none" lIns="0" tIns="0" rIns="0" bIns="0" anchor="t" anchorCtr="0">
+              <a:spAutoFit/>
+            </a:bodyPr>
+            <a:lstStyle/>
+            <a:p>
+              <a:pPr algn="ctr"/>
+              <a:r>
+                <a:rPr lang="zh-CN" sz="1650" b="1" dirty="0">
+                  <a:solidFill>
+                    <a:srgbClr val="1D1C19"/>
+                  </a:solidFill>
+                  <a:latin typeface="+mj-lt"/>
+                  <a:ea typeface="+mj-ea"/>
+                  <a:cs typeface="+mj-cs"/>
+                </a:rPr>
+                <a:t>理解与对话</a:t>
+              </a:r>
+            </a:p>
+          </p:txBody>
+        </p:sp>
+        <p:sp>
+          <p:nvSpPr>
+            <p:cNvPr id="25" name="TextBox 25"/>
+            <p:cNvSpPr txBox="1"/>
+            <p:nvPr/>
+          </p:nvSpPr>
+          <p:spPr>
+            <a:xfrm>
+              <a:off x="6714244" y="2228850"/>
+              <a:ext cx="2002013" cy="191643"/>
+            </a:xfrm>
+            <a:prstGeom prst="rect">
+              <a:avLst/>
+            </a:prstGeom>
+            <a:noFill/>
+            <a:ln>
+              <a:noFill/>
+            </a:ln>
+          </p:spPr>
+          <p:txBody>
+            <a:bodyPr wrap="none" lIns="0" tIns="0" rIns="0" bIns="0" anchor="t" anchorCtr="0">
+              <a:spAutoFit/>
+            </a:bodyPr>
+            <a:lstStyle/>
+            <a:p>
+              <a:pPr algn="ctr"/>
+              <a:r>
+                <a:rPr lang="zh-CN" sz="980" dirty="0">
+                  <a:solidFill>
+                    <a:srgbClr val="3F3B35"/>
+                  </a:solidFill>
+                  <a:latin typeface="+mn-lt"/>
+                  <a:ea typeface="+mn-ea"/>
+                  <a:cs typeface="+mn-cs"/>
+                </a:rPr>
+                <a:t>“你能帮我读懂、一起想办法吗？”</a:t>
+              </a:r>
+            </a:p>
+          </p:txBody>
+        </p:sp>
+        <p:sp>
+          <p:nvSpPr>
+            <p:cNvPr id="26" name="TextBox 26"/>
+            <p:cNvSpPr txBox="1"/>
+            <p:nvPr/>
+          </p:nvSpPr>
+          <p:spPr>
+            <a:xfrm>
+              <a:off x="6856750" y="2552700"/>
+              <a:ext cx="1716999" cy="191643"/>
+            </a:xfrm>
+            <a:prstGeom prst="rect">
+              <a:avLst/>
+            </a:prstGeom>
+            <a:noFill/>
+            <a:ln>
+              <a:noFill/>
+            </a:ln>
+          </p:spPr>
+          <p:txBody>
+            <a:bodyPr wrap="none" lIns="0" tIns="0" rIns="0" bIns="0" anchor="t" anchorCtr="0">
+              <a:spAutoFit/>
+            </a:bodyPr>
+            <a:lstStyle/>
+            <a:p>
+              <a:pPr algn="ctr"/>
+              <a:r>
+                <a:rPr lang="en-US" sz="980" dirty="0">
+                  <a:solidFill>
+                    <a:srgbClr val="3F3B35"/>
+                  </a:solidFill>
+                  <a:latin typeface="+mn-lt"/>
+                  <a:ea typeface="+mn-ea"/>
+                  <a:cs typeface="+mn-cs"/>
+                </a:rPr>
+                <a:t>Flamingo · GPT-4V · Gemini</a:t>
+              </a:r>
+            </a:p>
+          </p:txBody>
+        </p:sp>
+        <p:sp>
+          <p:nvSpPr>
+            <p:cNvPr id="27" name="TextBox 27"/>
+            <p:cNvSpPr txBox="1"/>
+            <p:nvPr/>
+          </p:nvSpPr>
+          <p:spPr>
+            <a:xfrm>
+              <a:off x="6929548" y="2781300"/>
+              <a:ext cx="1571404" cy="191643"/>
+            </a:xfrm>
+            <a:prstGeom prst="rect">
+              <a:avLst/>
+            </a:prstGeom>
+            <a:noFill/>
+            <a:ln>
+              <a:noFill/>
+            </a:ln>
+          </p:spPr>
+          <p:txBody>
+            <a:bodyPr wrap="none" lIns="0" tIns="0" rIns="0" bIns="0" anchor="t" anchorCtr="0">
+              <a:spAutoFit/>
+            </a:bodyPr>
+            <a:lstStyle/>
+            <a:p>
+              <a:pPr algn="ctr"/>
+              <a:r>
+                <a:rPr lang="en-US" sz="980" dirty="0">
+                  <a:solidFill>
+                    <a:srgbClr val="3F3B35"/>
+                  </a:solidFill>
+                  <a:latin typeface="+mn-lt"/>
+                  <a:ea typeface="+mn-ea"/>
+                  <a:cs typeface="+mn-cs"/>
+                </a:rPr>
+                <a:t>Be My AI · Ray-Ban Meta</a:t>
+              </a:r>
+            </a:p>
+          </p:txBody>
+        </p:sp>
+        <p:sp>
+          <p:nvSpPr>
+            <p:cNvPr id="28" name="TextBox 28"/>
+            <p:cNvSpPr txBox="1"/>
+            <p:nvPr/>
+          </p:nvSpPr>
+          <p:spPr>
+            <a:xfrm>
+              <a:off x="6922960" y="3009900"/>
+              <a:ext cx="1584579" cy="176212"/>
+            </a:xfrm>
+            <a:prstGeom prst="rect">
+              <a:avLst/>
+            </a:prstGeom>
+            <a:noFill/>
+            <a:ln>
+              <a:noFill/>
+            </a:ln>
+          </p:spPr>
+          <p:txBody>
+            <a:bodyPr wrap="none" lIns="0" tIns="0" rIns="0" bIns="0" anchor="t" anchorCtr="0">
+              <a:spAutoFit/>
+            </a:bodyPr>
+            <a:lstStyle/>
+            <a:p>
+              <a:pPr algn="ctr"/>
+              <a:r>
+                <a:rPr lang="zh-CN" sz="900" dirty="0">
+                  <a:solidFill>
+                    <a:srgbClr val="6B6760"/>
+                  </a:solidFill>
+                  <a:latin typeface="+mn-lt"/>
+                  <a:ea typeface="+mn-ea"/>
+                  <a:cs typeface="+mn-cs"/>
+                </a:rPr>
+                <a:t>多轮解释、即时翻译、无障碍</a:t>
+              </a:r>
+            </a:p>
+          </p:txBody>
+        </p:sp>
+        <p:sp>
+          <p:nvSpPr>
+            <p:cNvPr id="29" name="TextBox 29"/>
+            <p:cNvSpPr txBox="1"/>
+            <p:nvPr/>
+          </p:nvSpPr>
+          <p:spPr>
+            <a:xfrm>
+              <a:off x="10320200" y="1524000"/>
+              <a:ext cx="695600" cy="191643"/>
+            </a:xfrm>
+            <a:prstGeom prst="rect">
+              <a:avLst/>
+            </a:prstGeom>
+            <a:noFill/>
+            <a:ln>
+              <a:noFill/>
+            </a:ln>
+          </p:spPr>
+          <p:txBody>
+            <a:bodyPr wrap="none" lIns="0" tIns="0" rIns="0" bIns="0" anchor="t" anchorCtr="0">
+              <a:spAutoFit/>
+            </a:bodyPr>
+            <a:lstStyle/>
+            <a:p>
+              <a:pPr algn="ctr"/>
+              <a:r>
+                <a:rPr lang="zh-CN" sz="980" b="1" dirty="0">
+                  <a:solidFill>
+                    <a:srgbClr val="C14E2C"/>
+                  </a:solidFill>
+                  <a:latin typeface="+mn-lt"/>
+                  <a:ea typeface="+mn-ea"/>
+                  <a:cs typeface="+mn-cs"/>
+                </a:rPr>
+                <a:t>2024–2026</a:t>
+              </a:r>
+            </a:p>
+          </p:txBody>
+        </p:sp>
+        <p:sp>
+          <p:nvSpPr>
+            <p:cNvPr id="30" name="TextBox 30"/>
+            <p:cNvSpPr txBox="1"/>
+            <p:nvPr/>
+          </p:nvSpPr>
+          <p:spPr>
+            <a:xfrm>
+              <a:off x="10190226" y="1898650"/>
+              <a:ext cx="955548" cy="322707"/>
+            </a:xfrm>
+            <a:prstGeom prst="rect">
+              <a:avLst/>
+            </a:prstGeom>
+            <a:noFill/>
+            <a:ln>
+              <a:noFill/>
+            </a:ln>
+          </p:spPr>
+          <p:txBody>
+            <a:bodyPr wrap="none" lIns="0" tIns="0" rIns="0" bIns="0" anchor="t" anchorCtr="0">
+              <a:spAutoFit/>
+            </a:bodyPr>
+            <a:lstStyle/>
+            <a:p>
+              <a:pPr algn="ctr"/>
+              <a:r>
+                <a:rPr lang="zh-CN" sz="1650" b="1" dirty="0">
+                  <a:solidFill>
+                    <a:srgbClr val="C14E2C"/>
+                  </a:solidFill>
+                  <a:latin typeface="+mj-lt"/>
+                  <a:ea typeface="+mj-ea"/>
+                  <a:cs typeface="+mj-cs"/>
+                </a:rPr>
+                <a:t>实时协作</a:t>
+              </a:r>
+            </a:p>
+          </p:txBody>
+        </p:sp>
+        <p:sp>
+          <p:nvSpPr>
+            <p:cNvPr id="31" name="TextBox 31"/>
+            <p:cNvSpPr txBox="1"/>
+            <p:nvPr/>
+          </p:nvSpPr>
+          <p:spPr>
+            <a:xfrm>
+              <a:off x="9666994" y="2228850"/>
+              <a:ext cx="2002013" cy="191643"/>
+            </a:xfrm>
+            <a:prstGeom prst="rect">
+              <a:avLst/>
+            </a:prstGeom>
+            <a:noFill/>
+            <a:ln>
+              <a:noFill/>
+            </a:ln>
+          </p:spPr>
+          <p:txBody>
+            <a:bodyPr wrap="none" lIns="0" tIns="0" rIns="0" bIns="0" anchor="t" anchorCtr="0">
+              <a:spAutoFit/>
+            </a:bodyPr>
+            <a:lstStyle/>
+            <a:p>
+              <a:pPr algn="ctr"/>
+              <a:r>
+                <a:rPr lang="zh-CN" sz="980" dirty="0">
+                  <a:solidFill>
+                    <a:srgbClr val="3F3B35"/>
+                  </a:solidFill>
+                  <a:latin typeface="+mn-lt"/>
+                  <a:ea typeface="+mn-ea"/>
+                  <a:cs typeface="+mn-cs"/>
+                </a:rPr>
+                <a:t>“看着我一起做，能帮我做完吗？”</a:t>
+              </a:r>
+            </a:p>
+          </p:txBody>
+        </p:sp>
+        <p:sp>
+          <p:nvSpPr>
+            <p:cNvPr id="32" name="TextBox 32"/>
+            <p:cNvSpPr txBox="1"/>
+            <p:nvPr/>
+          </p:nvSpPr>
+          <p:spPr>
+            <a:xfrm>
+              <a:off x="10063742" y="2552700"/>
+              <a:ext cx="1208516" cy="176212"/>
+            </a:xfrm>
+            <a:prstGeom prst="rect">
+              <a:avLst/>
+            </a:prstGeom>
+            <a:noFill/>
+            <a:ln>
+              <a:noFill/>
+            </a:ln>
+          </p:spPr>
+          <p:txBody>
+            <a:bodyPr wrap="none" lIns="0" tIns="0" rIns="0" bIns="0" anchor="t" anchorCtr="0">
+              <a:spAutoFit/>
+            </a:bodyPr>
+            <a:lstStyle/>
+            <a:p>
+              <a:pPr algn="ctr"/>
+              <a:r>
+                <a:rPr lang="en-US" sz="900" dirty="0">
+                  <a:solidFill>
+                    <a:srgbClr val="3F3B35"/>
+                  </a:solidFill>
+                  <a:latin typeface="+mn-lt"/>
+                  <a:ea typeface="+mn-ea"/>
+                  <a:cs typeface="+mn-cs"/>
+                </a:rPr>
+                <a:t>GPT-4o · Gemini Live</a:t>
+              </a:r>
+            </a:p>
+          </p:txBody>
+        </p:sp>
+        <p:sp>
+          <p:nvSpPr>
+            <p:cNvPr id="33" name="TextBox 33"/>
+            <p:cNvSpPr txBox="1"/>
+            <p:nvPr/>
+          </p:nvSpPr>
+          <p:spPr>
+            <a:xfrm>
+              <a:off x="10060201" y="2762250"/>
+              <a:ext cx="1215597" cy="176212"/>
+            </a:xfrm>
+            <a:prstGeom prst="rect">
+              <a:avLst/>
+            </a:prstGeom>
+            <a:noFill/>
+            <a:ln>
+              <a:noFill/>
+            </a:ln>
+          </p:spPr>
+          <p:txBody>
+            <a:bodyPr wrap="none" lIns="0" tIns="0" rIns="0" bIns="0" anchor="t" anchorCtr="0">
+              <a:spAutoFit/>
+            </a:bodyPr>
+            <a:lstStyle/>
+            <a:p>
+              <a:pPr algn="ctr"/>
+              <a:r>
+                <a:rPr lang="en-US" sz="900" dirty="0">
+                  <a:solidFill>
+                    <a:srgbClr val="3F3B35"/>
+                  </a:solidFill>
+                  <a:latin typeface="+mn-lt"/>
+                  <a:ea typeface="+mn-ea"/>
+                  <a:cs typeface="+mn-cs"/>
+                </a:rPr>
+                <a:t>SeedRealtime · Muse</a:t>
+              </a:r>
+            </a:p>
+          </p:txBody>
+        </p:sp>
+        <p:sp>
+          <p:nvSpPr>
+            <p:cNvPr id="34" name="TextBox 34"/>
+            <p:cNvSpPr txBox="1"/>
+            <p:nvPr/>
+          </p:nvSpPr>
+          <p:spPr>
+            <a:xfrm>
+              <a:off x="9913944" y="2971800"/>
+              <a:ext cx="1508112" cy="176212"/>
+            </a:xfrm>
+            <a:prstGeom prst="rect">
+              <a:avLst/>
+            </a:prstGeom>
+            <a:noFill/>
+            <a:ln>
+              <a:noFill/>
+            </a:ln>
+          </p:spPr>
+          <p:txBody>
+            <a:bodyPr wrap="none" lIns="0" tIns="0" rIns="0" bIns="0" anchor="t" anchorCtr="0">
+              <a:spAutoFit/>
+            </a:bodyPr>
+            <a:lstStyle/>
+            <a:p>
+              <a:pPr algn="ctr"/>
+              <a:r>
+                <a:rPr lang="zh-CN" sz="900" dirty="0">
+                  <a:solidFill>
+                    <a:srgbClr val="3F3B35"/>
+                  </a:solidFill>
+                  <a:latin typeface="+mn-lt"/>
+                  <a:ea typeface="+mn-ea"/>
+                  <a:cs typeface="+mn-cs"/>
+                </a:rPr>
+                <a:t>Guided Vision · 多品牌眼镜</a:t>
+              </a:r>
+            </a:p>
+          </p:txBody>
+        </p:sp>
+        <p:sp>
+          <p:nvSpPr>
+            <p:cNvPr id="35" name="TextBox 35"/>
+            <p:cNvSpPr txBox="1"/>
+            <p:nvPr/>
+          </p:nvSpPr>
+          <p:spPr>
+            <a:xfrm>
+              <a:off x="9890519" y="3194050"/>
+              <a:ext cx="1554963" cy="161925"/>
+            </a:xfrm>
+            <a:prstGeom prst="rect">
+              <a:avLst/>
+            </a:prstGeom>
+            <a:noFill/>
+            <a:ln>
+              <a:noFill/>
+            </a:ln>
+          </p:spPr>
+          <p:txBody>
+            <a:bodyPr wrap="none" lIns="0" tIns="0" rIns="0" bIns="0" anchor="t" anchorCtr="0">
+              <a:spAutoFit/>
+            </a:bodyPr>
+            <a:lstStyle/>
+            <a:p>
+              <a:pPr algn="ctr"/>
+              <a:r>
+                <a:rPr lang="zh-CN" sz="820" dirty="0">
+                  <a:solidFill>
+                    <a:srgbClr val="6B6760"/>
+                  </a:solidFill>
+                  <a:latin typeface="+mn-lt"/>
+                  <a:ea typeface="+mn-ea"/>
+                  <a:cs typeface="+mn-cs"/>
+                </a:rPr>
+                <a:t>持续视频、主动纠错、后台执行</a:t>
+              </a:r>
+            </a:p>
+          </p:txBody>
+        </p:sp>
+        <p:sp>
+          <p:nvSpPr>
+            <p:cNvPr id="36" name="Rectangle 36"/>
+            <p:cNvSpPr/>
+            <p:nvPr/>
+          </p:nvSpPr>
+          <p:spPr>
+            <a:xfrm>
+              <a:off x="571500" y="3486150"/>
+              <a:ext cx="2686050" cy="1714500"/>
+            </a:xfrm>
+            <a:prstGeom prst="rect">
+              <a:avLst/>
+            </a:prstGeom>
+            <a:solidFill>
+              <a:srgbClr val="E9E1D4"/>
+            </a:solidFill>
+            <a:ln>
+              <a:noFill/>
+            </a:ln>
+          </p:spPr>
+        </p:sp>
+        <p:sp>
+          <p:nvSpPr>
+            <p:cNvPr id="37" name="TextBox 37"/>
+            <p:cNvSpPr txBox="1"/>
+            <p:nvPr/>
+          </p:nvSpPr>
+          <p:spPr>
+            <a:xfrm>
+              <a:off x="737616" y="3644900"/>
+              <a:ext cx="1296962" cy="205359"/>
+            </a:xfrm>
+            <a:prstGeom prst="rect">
+              <a:avLst/>
+            </a:prstGeom>
+            <a:noFill/>
+            <a:ln>
+              <a:noFill/>
+            </a:ln>
+          </p:spPr>
+          <p:txBody>
+            <a:bodyPr wrap="none" lIns="0" tIns="0" rIns="0" bIns="0" anchor="t" anchorCtr="0">
+              <a:spAutoFit/>
+            </a:bodyPr>
+            <a:lstStyle/>
+            <a:p>
+              <a:pPr algn="l"/>
+              <a:r>
+                <a:rPr lang="zh-CN" sz="1050" b="1" dirty="0">
+                  <a:solidFill>
+                    <a:srgbClr val="6B6760"/>
+                  </a:solidFill>
+                  <a:latin typeface="+mn-lt"/>
+                  <a:ea typeface="+mn-ea"/>
+                  <a:cs typeface="+mn-cs"/>
+                </a:rPr>
+                <a:t>阶段 1 · 单模态入口</a:t>
+              </a:r>
+            </a:p>
+          </p:txBody>
+        </p:sp>
+        <p:sp>
+          <p:nvSpPr>
+            <p:cNvPr id="38" name="TextBox 38"/>
+            <p:cNvSpPr txBox="1"/>
+            <p:nvPr/>
+          </p:nvSpPr>
+          <p:spPr>
+            <a:xfrm>
+              <a:off x="737616" y="3911600"/>
+              <a:ext cx="1848231" cy="205359"/>
+            </a:xfrm>
+            <a:prstGeom prst="rect">
+              <a:avLst/>
+            </a:prstGeom>
+            <a:noFill/>
+            <a:ln>
+              <a:noFill/>
+            </a:ln>
+          </p:spPr>
+          <p:txBody>
+            <a:bodyPr wrap="none" lIns="0" tIns="0" rIns="0" bIns="0" anchor="t" anchorCtr="0">
+              <a:spAutoFit/>
+            </a:bodyPr>
+            <a:lstStyle/>
+            <a:p>
+              <a:pPr algn="l"/>
+              <a:r>
+                <a:rPr lang="zh-CN" sz="1050" dirty="0">
+                  <a:solidFill>
+                    <a:srgbClr val="3F3B35"/>
+                  </a:solidFill>
+                  <a:latin typeface="+mn-lt"/>
+                  <a:ea typeface="+mn-ea"/>
+                  <a:cs typeface="+mn-cs"/>
+                </a:rPr>
+                <a:t>语音帮我查，摄像头帮我搜；</a:t>
+              </a:r>
+            </a:p>
+          </p:txBody>
+        </p:sp>
+        <p:sp>
+          <p:nvSpPr>
+            <p:cNvPr id="39" name="TextBox 39"/>
+            <p:cNvSpPr txBox="1"/>
+            <p:nvPr/>
+          </p:nvSpPr>
+          <p:spPr>
+            <a:xfrm>
+              <a:off x="737616" y="4159250"/>
+              <a:ext cx="1848231" cy="205359"/>
+            </a:xfrm>
+            <a:prstGeom prst="rect">
+              <a:avLst/>
+            </a:prstGeom>
+            <a:noFill/>
+            <a:ln>
+              <a:noFill/>
+            </a:ln>
+          </p:spPr>
+          <p:txBody>
+            <a:bodyPr wrap="none" lIns="0" tIns="0" rIns="0" bIns="0" anchor="t" anchorCtr="0">
+              <a:spAutoFit/>
+            </a:bodyPr>
+            <a:lstStyle/>
+            <a:p>
+              <a:pPr algn="l"/>
+              <a:r>
+                <a:rPr lang="zh-CN" sz="1050" dirty="0">
+                  <a:solidFill>
+                    <a:srgbClr val="3F3B35"/>
+                  </a:solidFill>
+                  <a:latin typeface="+mn-lt"/>
+                  <a:ea typeface="+mn-ea"/>
+                  <a:cs typeface="+mn-cs"/>
+                </a:rPr>
+                <a:t>用户还要自己完成中间步骤。</a:t>
+              </a:r>
+            </a:p>
+          </p:txBody>
+        </p:sp>
+        <p:sp>
+          <p:nvSpPr>
+            <p:cNvPr id="40" name="TextBox 40"/>
+            <p:cNvSpPr txBox="1"/>
+            <p:nvPr/>
+          </p:nvSpPr>
+          <p:spPr>
+            <a:xfrm>
+              <a:off x="737616" y="4540250"/>
+              <a:ext cx="2696337" cy="205359"/>
+            </a:xfrm>
+            <a:prstGeom prst="rect">
+              <a:avLst/>
+            </a:prstGeom>
+            <a:noFill/>
+            <a:ln>
+              <a:noFill/>
+            </a:ln>
+          </p:spPr>
+          <p:txBody>
+            <a:bodyPr wrap="none" lIns="0" tIns="0" rIns="0" bIns="0" anchor="t" anchorCtr="0">
+              <a:spAutoFit/>
+            </a:bodyPr>
+            <a:lstStyle/>
+            <a:p>
+              <a:pPr algn="l"/>
+              <a:r>
+                <a:rPr lang="zh-CN" sz="1050" b="1" dirty="0">
+                  <a:solidFill>
+                    <a:srgbClr val="A33B27"/>
+                  </a:solidFill>
+                  <a:latin typeface="+mn-lt"/>
+                  <a:ea typeface="+mn-ea"/>
+                  <a:cs typeface="+mn-cs"/>
+                </a:rPr>
+                <a:t>问题：不会追问、不会纠错、换场景就断。</a:t>
+              </a:r>
+            </a:p>
+          </p:txBody>
+        </p:sp>
+        <p:sp>
+          <p:nvSpPr>
+            <p:cNvPr id="41" name="Rectangle 41"/>
+            <p:cNvSpPr/>
+            <p:nvPr/>
+          </p:nvSpPr>
+          <p:spPr>
+            <a:xfrm>
+              <a:off x="3352800" y="3486150"/>
+              <a:ext cx="2686050" cy="1714500"/>
+            </a:xfrm>
+            <a:prstGeom prst="rect">
+              <a:avLst/>
+            </a:prstGeom>
+            <a:solidFill>
+              <a:srgbClr val="EEE7DC"/>
+            </a:solidFill>
+            <a:ln>
+              <a:noFill/>
+            </a:ln>
+          </p:spPr>
+        </p:sp>
+        <p:sp>
+          <p:nvSpPr>
+            <p:cNvPr id="42" name="TextBox 42"/>
+            <p:cNvSpPr txBox="1"/>
+            <p:nvPr/>
+          </p:nvSpPr>
+          <p:spPr>
+            <a:xfrm>
+              <a:off x="3518916" y="3644900"/>
+              <a:ext cx="1438313" cy="205359"/>
+            </a:xfrm>
+            <a:prstGeom prst="rect">
+              <a:avLst/>
+            </a:prstGeom>
+            <a:noFill/>
+            <a:ln>
+              <a:noFill/>
+            </a:ln>
+          </p:spPr>
+          <p:txBody>
+            <a:bodyPr wrap="none" lIns="0" tIns="0" rIns="0" bIns="0" anchor="t" anchorCtr="0">
+              <a:spAutoFit/>
+            </a:bodyPr>
+            <a:lstStyle/>
+            <a:p>
+              <a:pPr algn="l"/>
+              <a:r>
+                <a:rPr lang="zh-CN" sz="1050" b="1" dirty="0">
+                  <a:solidFill>
+                    <a:srgbClr val="6B6760"/>
+                  </a:solidFill>
+                  <a:latin typeface="+mn-lt"/>
+                  <a:ea typeface="+mn-ea"/>
+                  <a:cs typeface="+mn-cs"/>
+                </a:rPr>
+                <a:t>阶段 2 · 视听屏幕融合</a:t>
+              </a:r>
+            </a:p>
+          </p:txBody>
+        </p:sp>
+        <p:sp>
+          <p:nvSpPr>
+            <p:cNvPr id="43" name="TextBox 43"/>
+            <p:cNvSpPr txBox="1"/>
+            <p:nvPr/>
+          </p:nvSpPr>
+          <p:spPr>
+            <a:xfrm>
+              <a:off x="3518916" y="3911600"/>
+              <a:ext cx="2272284" cy="205359"/>
+            </a:xfrm>
+            <a:prstGeom prst="rect">
+              <a:avLst/>
+            </a:prstGeom>
+            <a:noFill/>
+            <a:ln>
+              <a:noFill/>
+            </a:ln>
+          </p:spPr>
+          <p:txBody>
+            <a:bodyPr wrap="none" lIns="0" tIns="0" rIns="0" bIns="0" anchor="t" anchorCtr="0">
+              <a:spAutoFit/>
+            </a:bodyPr>
+            <a:lstStyle/>
+            <a:p>
+              <a:pPr algn="l"/>
+              <a:r>
+                <a:rPr lang="zh-CN" sz="1050" dirty="0">
+                  <a:solidFill>
+                    <a:srgbClr val="3F3B35"/>
+                  </a:solidFill>
+                  <a:latin typeface="+mn-lt"/>
+                  <a:ea typeface="+mn-ea"/>
+                  <a:cs typeface="+mn-cs"/>
+                </a:rPr>
+                <a:t>用户看到的结果可以在屏幕上叠加；</a:t>
+              </a:r>
+            </a:p>
+          </p:txBody>
+        </p:sp>
+        <p:sp>
+          <p:nvSpPr>
+            <p:cNvPr id="44" name="TextBox 44"/>
+            <p:cNvSpPr txBox="1"/>
+            <p:nvPr/>
+          </p:nvSpPr>
+          <p:spPr>
+            <a:xfrm>
+              <a:off x="3518916" y="4159250"/>
+              <a:ext cx="2413635" cy="205359"/>
+            </a:xfrm>
+            <a:prstGeom prst="rect">
+              <a:avLst/>
+            </a:prstGeom>
+            <a:noFill/>
+            <a:ln>
+              <a:noFill/>
+            </a:ln>
+          </p:spPr>
+          <p:txBody>
+            <a:bodyPr wrap="none" lIns="0" tIns="0" rIns="0" bIns="0" anchor="t" anchorCtr="0">
+              <a:spAutoFit/>
+            </a:bodyPr>
+            <a:lstStyle/>
+            <a:p>
+              <a:pPr algn="l"/>
+              <a:r>
+                <a:rPr lang="zh-CN" sz="1050" dirty="0">
+                  <a:solidFill>
+                    <a:srgbClr val="3F3B35"/>
+                  </a:solidFill>
+                  <a:latin typeface="+mn-lt"/>
+                  <a:ea typeface="+mn-ea"/>
+                  <a:cs typeface="+mn-cs"/>
+                </a:rPr>
+                <a:t>语音可以指方向，但任务仍常靠人做。</a:t>
+              </a:r>
+            </a:p>
+          </p:txBody>
+        </p:sp>
+        <p:sp>
+          <p:nvSpPr>
+            <p:cNvPr id="45" name="TextBox 45"/>
+            <p:cNvSpPr txBox="1"/>
+            <p:nvPr/>
+          </p:nvSpPr>
+          <p:spPr>
+            <a:xfrm>
+              <a:off x="3518916" y="4540250"/>
+              <a:ext cx="2753878" cy="205359"/>
+            </a:xfrm>
+            <a:prstGeom prst="rect">
+              <a:avLst/>
+            </a:prstGeom>
+            <a:noFill/>
+            <a:ln>
+              <a:noFill/>
+            </a:ln>
+          </p:spPr>
+          <p:txBody>
+            <a:bodyPr wrap="none" lIns="0" tIns="0" rIns="0" bIns="0" anchor="t" anchorCtr="0">
+              <a:spAutoFit/>
+            </a:bodyPr>
+            <a:lstStyle/>
+            <a:p>
+              <a:pPr algn="l"/>
+              <a:r>
+                <a:rPr lang="zh-CN" sz="1050" b="1" dirty="0">
+                  <a:solidFill>
+                    <a:srgbClr val="A33B27"/>
+                  </a:solidFill>
+                  <a:latin typeface="+mn-lt"/>
+                  <a:ea typeface="+mn-ea"/>
+                  <a:cs typeface="+mn-cs"/>
+                </a:rPr>
+                <a:t>问题：跨 App 权限、记忆和真实动作缺失。</a:t>
+              </a:r>
+            </a:p>
+          </p:txBody>
+        </p:sp>
+        <p:sp>
+          <p:nvSpPr>
+            <p:cNvPr id="46" name="Rectangle 46"/>
+            <p:cNvSpPr/>
+            <p:nvPr/>
+          </p:nvSpPr>
+          <p:spPr>
+            <a:xfrm>
+              <a:off x="6134100" y="3486150"/>
+              <a:ext cx="2686050" cy="1714500"/>
+            </a:xfrm>
+            <a:prstGeom prst="rect">
+              <a:avLst/>
+            </a:prstGeom>
+            <a:solidFill>
+              <a:srgbClr val="E9E1D4"/>
+            </a:solidFill>
+            <a:ln>
+              <a:noFill/>
+            </a:ln>
+          </p:spPr>
+        </p:sp>
+        <p:sp>
+          <p:nvSpPr>
+            <p:cNvPr id="47" name="TextBox 47"/>
+            <p:cNvSpPr txBox="1"/>
+            <p:nvPr/>
+          </p:nvSpPr>
+          <p:spPr>
+            <a:xfrm>
+              <a:off x="6300216" y="3644900"/>
+              <a:ext cx="1155611" cy="205359"/>
+            </a:xfrm>
+            <a:prstGeom prst="rect">
+              <a:avLst/>
+            </a:prstGeom>
+            <a:noFill/>
+            <a:ln>
+              <a:noFill/>
+            </a:ln>
+          </p:spPr>
+          <p:txBody>
+            <a:bodyPr wrap="none" lIns="0" tIns="0" rIns="0" bIns="0" anchor="t" anchorCtr="0">
+              <a:spAutoFit/>
+            </a:bodyPr>
+            <a:lstStyle/>
+            <a:p>
+              <a:pPr algn="l"/>
+              <a:r>
+                <a:rPr lang="zh-CN" sz="1050" b="1" dirty="0">
+                  <a:solidFill>
+                    <a:srgbClr val="6B6760"/>
+                  </a:solidFill>
+                  <a:latin typeface="+mn-lt"/>
+                  <a:ea typeface="+mn-ea"/>
+                  <a:cs typeface="+mn-cs"/>
+                </a:rPr>
+                <a:t>阶段 3 · 多轮理解</a:t>
+              </a:r>
+            </a:p>
+          </p:txBody>
+        </p:sp>
+        <p:sp>
+          <p:nvSpPr>
+            <p:cNvPr id="48" name="TextBox 48"/>
+            <p:cNvSpPr txBox="1"/>
+            <p:nvPr/>
+          </p:nvSpPr>
+          <p:spPr>
+            <a:xfrm>
+              <a:off x="6300216" y="3911600"/>
+              <a:ext cx="2413635" cy="205359"/>
+            </a:xfrm>
+            <a:prstGeom prst="rect">
+              <a:avLst/>
+            </a:prstGeom>
+            <a:noFill/>
+            <a:ln>
+              <a:noFill/>
+            </a:ln>
+          </p:spPr>
+          <p:txBody>
+            <a:bodyPr wrap="none" lIns="0" tIns="0" rIns="0" bIns="0" anchor="t" anchorCtr="0">
+              <a:spAutoFit/>
+            </a:bodyPr>
+            <a:lstStyle/>
+            <a:p>
+              <a:pPr algn="l"/>
+              <a:r>
+                <a:rPr lang="zh-CN" sz="1050" dirty="0">
+                  <a:solidFill>
+                    <a:srgbClr val="3F3B35"/>
+                  </a:solidFill>
+                  <a:latin typeface="+mn-lt"/>
+                  <a:ea typeface="+mn-ea"/>
+                  <a:cs typeface="+mn-cs"/>
+                </a:rPr>
+                <a:t>用户能连续追问，系统能解释、比较；</a:t>
+              </a:r>
+            </a:p>
+          </p:txBody>
+        </p:sp>
+        <p:sp>
+          <p:nvSpPr>
+            <p:cNvPr id="49" name="TextBox 49"/>
+            <p:cNvSpPr txBox="1"/>
+            <p:nvPr/>
+          </p:nvSpPr>
+          <p:spPr>
+            <a:xfrm>
+              <a:off x="6300216" y="4159250"/>
+              <a:ext cx="2130933" cy="205359"/>
+            </a:xfrm>
+            <a:prstGeom prst="rect">
+              <a:avLst/>
+            </a:prstGeom>
+            <a:noFill/>
+            <a:ln>
+              <a:noFill/>
+            </a:ln>
+          </p:spPr>
+          <p:txBody>
+            <a:bodyPr wrap="none" lIns="0" tIns="0" rIns="0" bIns="0" anchor="t" anchorCtr="0">
+              <a:spAutoFit/>
+            </a:bodyPr>
+            <a:lstStyle/>
+            <a:p>
+              <a:pPr algn="l"/>
+              <a:r>
+                <a:rPr lang="zh-CN" sz="1050" dirty="0">
+                  <a:solidFill>
+                    <a:srgbClr val="3F3B35"/>
+                  </a:solidFill>
+                  <a:latin typeface="+mn-lt"/>
+                  <a:ea typeface="+mn-ea"/>
+                  <a:cs typeface="+mn-cs"/>
+                </a:rPr>
+                <a:t>无障碍场景第一次出现明确价值。</a:t>
+              </a:r>
+            </a:p>
+          </p:txBody>
+        </p:sp>
+        <p:sp>
+          <p:nvSpPr>
+            <p:cNvPr id="50" name="TextBox 50"/>
+            <p:cNvSpPr txBox="1"/>
+            <p:nvPr/>
+          </p:nvSpPr>
+          <p:spPr>
+            <a:xfrm>
+              <a:off x="6300216" y="4540250"/>
+              <a:ext cx="2740156" cy="205359"/>
+            </a:xfrm>
+            <a:prstGeom prst="rect">
+              <a:avLst/>
+            </a:prstGeom>
+            <a:noFill/>
+            <a:ln>
+              <a:noFill/>
+            </a:ln>
+          </p:spPr>
+          <p:txBody>
+            <a:bodyPr wrap="none" lIns="0" tIns="0" rIns="0" bIns="0" anchor="t" anchorCtr="0">
+              <a:spAutoFit/>
+            </a:bodyPr>
+            <a:lstStyle/>
+            <a:p>
+              <a:pPr algn="l"/>
+              <a:r>
+                <a:rPr lang="zh-CN" sz="1050" b="1" dirty="0">
+                  <a:solidFill>
+                    <a:srgbClr val="A33B27"/>
+                  </a:solidFill>
+                  <a:latin typeface="+mn-lt"/>
+                  <a:ea typeface="+mn-ea"/>
+                  <a:cs typeface="+mn-cs"/>
+                </a:rPr>
+                <a:t>问题：仍是“说给你听”，不是“帮你做完”。</a:t>
+              </a:r>
+            </a:p>
+          </p:txBody>
+        </p:sp>
+        <p:sp>
+          <p:nvSpPr>
+            <p:cNvPr id="51" name="Rectangle 51"/>
+            <p:cNvSpPr/>
+            <p:nvPr/>
+          </p:nvSpPr>
+          <p:spPr>
+            <a:xfrm>
+              <a:off x="8915400" y="3486150"/>
+              <a:ext cx="2705100" cy="1714500"/>
+            </a:xfrm>
+            <a:prstGeom prst="rect">
+              <a:avLst/>
+            </a:prstGeom>
+            <a:solidFill>
+              <a:srgbClr val="C14E2C">
+                <a:alpha val="9000"/>
+              </a:srgbClr>
+            </a:solidFill>
+            <a:ln>
+              <a:noFill/>
+            </a:ln>
+          </p:spPr>
+        </p:sp>
+        <p:sp>
+          <p:nvSpPr>
+            <p:cNvPr id="52" name="TextBox 52"/>
+            <p:cNvSpPr txBox="1"/>
+            <p:nvPr/>
+          </p:nvSpPr>
+          <p:spPr>
+            <a:xfrm>
+              <a:off x="9081516" y="3644900"/>
+              <a:ext cx="1155611" cy="205359"/>
+            </a:xfrm>
+            <a:prstGeom prst="rect">
+              <a:avLst/>
+            </a:prstGeom>
+            <a:noFill/>
+            <a:ln>
+              <a:noFill/>
+            </a:ln>
+          </p:spPr>
+          <p:txBody>
+            <a:bodyPr wrap="none" lIns="0" tIns="0" rIns="0" bIns="0" anchor="t" anchorCtr="0">
+              <a:spAutoFit/>
+            </a:bodyPr>
+            <a:lstStyle/>
+            <a:p>
+              <a:pPr algn="l"/>
+              <a:r>
+                <a:rPr lang="zh-CN" sz="1050" b="1" dirty="0">
+                  <a:solidFill>
+                    <a:srgbClr val="C14E2C"/>
+                  </a:solidFill>
+                  <a:latin typeface="+mn-lt"/>
+                  <a:ea typeface="+mn-ea"/>
+                  <a:cs typeface="+mn-cs"/>
+                </a:rPr>
+                <a:t>阶段 4 · 实时代理</a:t>
+              </a:r>
+            </a:p>
+          </p:txBody>
+        </p:sp>
+        <p:sp>
+          <p:nvSpPr>
+            <p:cNvPr id="53" name="TextBox 53"/>
+            <p:cNvSpPr txBox="1"/>
+            <p:nvPr/>
+          </p:nvSpPr>
+          <p:spPr>
+            <a:xfrm>
+              <a:off x="9081516" y="3911600"/>
+              <a:ext cx="2554986" cy="205359"/>
+            </a:xfrm>
+            <a:prstGeom prst="rect">
+              <a:avLst/>
+            </a:prstGeom>
+            <a:noFill/>
+            <a:ln>
+              <a:noFill/>
+            </a:ln>
+          </p:spPr>
+          <p:txBody>
+            <a:bodyPr wrap="none" lIns="0" tIns="0" rIns="0" bIns="0" anchor="t" anchorCtr="0">
+              <a:spAutoFit/>
+            </a:bodyPr>
+            <a:lstStyle/>
+            <a:p>
+              <a:pPr algn="l"/>
+              <a:r>
+                <a:rPr lang="zh-CN" sz="1050" dirty="0">
+                  <a:solidFill>
+                    <a:srgbClr val="3F3B35"/>
+                  </a:solidFill>
+                  <a:latin typeface="+mn-lt"/>
+                  <a:ea typeface="+mn-ea"/>
+                  <a:cs typeface="+mn-cs"/>
+                </a:rPr>
+                <a:t>用户共享现场，系统持续看、听、指导；</a:t>
+              </a:r>
+            </a:p>
+          </p:txBody>
+        </p:sp>
+        <p:sp>
+          <p:nvSpPr>
+            <p:cNvPr id="54" name="TextBox 54"/>
+            <p:cNvSpPr txBox="1"/>
+            <p:nvPr/>
+          </p:nvSpPr>
+          <p:spPr>
+            <a:xfrm>
+              <a:off x="9081516" y="4159250"/>
+              <a:ext cx="2517981" cy="205359"/>
+            </a:xfrm>
+            <a:prstGeom prst="rect">
+              <a:avLst/>
+            </a:prstGeom>
+            <a:noFill/>
+            <a:ln>
+              <a:noFill/>
+            </a:ln>
+          </p:spPr>
+          <p:txBody>
+            <a:bodyPr wrap="none" lIns="0" tIns="0" rIns="0" bIns="0" anchor="t" anchorCtr="0">
+              <a:spAutoFit/>
+            </a:bodyPr>
+            <a:lstStyle/>
+            <a:p>
+              <a:pPr algn="l"/>
+              <a:r>
+                <a:rPr lang="zh-CN" sz="1050" dirty="0">
+                  <a:solidFill>
+                    <a:srgbClr val="3F3B35"/>
+                  </a:solidFill>
+                  <a:latin typeface="+mn-lt"/>
+                  <a:ea typeface="+mn-ea"/>
+                  <a:cs typeface="+mn-cs"/>
+                </a:rPr>
+                <a:t>Muse 开始后台执行、付款并请求确认。</a:t>
+              </a:r>
+            </a:p>
+          </p:txBody>
+        </p:sp>
+        <p:sp>
+          <p:nvSpPr>
+            <p:cNvPr id="55" name="TextBox 55"/>
+            <p:cNvSpPr txBox="1"/>
+            <p:nvPr/>
+          </p:nvSpPr>
+          <p:spPr>
+            <a:xfrm>
+              <a:off x="9081897" y="4533900"/>
+              <a:ext cx="1724965" cy="191643"/>
+            </a:xfrm>
+            <a:prstGeom prst="rect">
+              <a:avLst/>
+            </a:prstGeom>
+            <a:noFill/>
+            <a:ln>
+              <a:noFill/>
+            </a:ln>
+          </p:spPr>
+          <p:txBody>
+            <a:bodyPr wrap="none" lIns="0" tIns="0" rIns="0" bIns="0" anchor="t" anchorCtr="0">
+              <a:spAutoFit/>
+            </a:bodyPr>
+            <a:lstStyle/>
+            <a:p>
+              <a:pPr algn="l"/>
+              <a:r>
+                <a:rPr lang="zh-CN" sz="980" b="1" dirty="0">
+                  <a:solidFill>
+                    <a:srgbClr val="A33B27"/>
+                  </a:solidFill>
+                  <a:latin typeface="+mn-lt"/>
+                  <a:ea typeface="+mn-ea"/>
+                  <a:cs typeface="+mn-cs"/>
+                </a:rPr>
+                <a:t>新问题：何时开口、谁负责、</a:t>
+              </a:r>
+            </a:p>
+          </p:txBody>
+        </p:sp>
+        <p:sp>
+          <p:nvSpPr>
+            <p:cNvPr id="56" name="TextBox 56"/>
+            <p:cNvSpPr txBox="1"/>
+            <p:nvPr/>
+          </p:nvSpPr>
+          <p:spPr>
+            <a:xfrm>
+              <a:off x="9081897" y="4743450"/>
+              <a:ext cx="933399" cy="191643"/>
+            </a:xfrm>
+            <a:prstGeom prst="rect">
+              <a:avLst/>
+            </a:prstGeom>
+            <a:noFill/>
+            <a:ln>
+              <a:noFill/>
+            </a:ln>
+          </p:spPr>
+          <p:txBody>
+            <a:bodyPr wrap="none" lIns="0" tIns="0" rIns="0" bIns="0" anchor="t" anchorCtr="0">
+              <a:spAutoFit/>
+            </a:bodyPr>
+            <a:lstStyle/>
+            <a:p>
+              <a:pPr algn="l"/>
+              <a:r>
+                <a:rPr lang="zh-CN" sz="980" b="1" dirty="0">
+                  <a:solidFill>
+                    <a:srgbClr val="A33B27"/>
+                  </a:solidFill>
+                  <a:latin typeface="+mn-lt"/>
+                  <a:ea typeface="+mn-ea"/>
+                  <a:cs typeface="+mn-cs"/>
+                </a:rPr>
+                <a:t>出错怎么接管。</a:t>
+              </a:r>
+            </a:p>
+          </p:txBody>
+        </p:sp>
+        <p:sp>
+          <p:nvSpPr>
+            <p:cNvPr id="57" name="Line 57"/>
+            <p:cNvSpPr/>
+            <p:nvPr/>
+          </p:nvSpPr>
+          <p:spPr>
+            <a:xfrm>
+              <a:off x="571500" y="5410200"/>
+              <a:ext cx="11049000" cy="9525"/>
+            </a:xfrm>
+            <a:custGeom>
+              <a:avLst/>
+              <a:gdLst/>
+              <a:ahLst/>
+              <a:cxnLst/>
+              <a:rect l="l" t="t" r="r" b="b"/>
+              <a:pathLst>
+                <a:path w="11049000" h="9525">
+                  <a:moveTo>
+                    <a:pt x="0" y="0"/>
+                  </a:moveTo>
+                  <a:lnTo>
+                    <a:pt x="11049000" y="0"/>
+                  </a:lnTo>
+                </a:path>
+              </a:pathLst>
+            </a:custGeom>
+            <a:noFill/>
+            <a:ln w="9525">
+              <a:solidFill>
+                <a:srgbClr val="C9C1B4"/>
+              </a:solidFill>
+            </a:ln>
+          </p:spPr>
+        </p:sp>
+        <p:sp>
+          <p:nvSpPr>
+            <p:cNvPr id="58" name="TextBox 58"/>
+            <p:cNvSpPr txBox="1"/>
+            <p:nvPr/>
+          </p:nvSpPr>
+          <p:spPr>
+            <a:xfrm>
+              <a:off x="563499" y="5511800"/>
+              <a:ext cx="7432396" cy="308991"/>
+            </a:xfrm>
+            <a:prstGeom prst="rect">
+              <a:avLst/>
+            </a:prstGeom>
+            <a:noFill/>
+            <a:ln>
+              <a:noFill/>
+            </a:ln>
+          </p:spPr>
+          <p:txBody>
+            <a:bodyPr wrap="none" lIns="0" tIns="0" rIns="0" bIns="0" anchor="t" anchorCtr="0">
+              <a:spAutoFit/>
+            </a:bodyPr>
+            <a:lstStyle/>
+            <a:p>
+              <a:pPr algn="l"/>
+              <a:r>
+                <a:rPr lang="zh-CN" sz="1580" b="1" dirty="0">
+                  <a:solidFill>
+                    <a:srgbClr val="1D1C19"/>
+                  </a:solidFill>
+                  <a:latin typeface="+mj-lt"/>
+                  <a:ea typeface="+mj-ea"/>
+                  <a:cs typeface="+mj-cs"/>
+                </a:rPr>
+                <a:t>分：每跨一个阶段，用户少做一步，但系统要承担更多理解、纠正和责任。</a:t>
+              </a:r>
+            </a:p>
+          </p:txBody>
+        </p:sp>
+      </p:grpSp>
+      <p:grpSp>
+        <p:nvGrpSpPr>
+          <p:cNvPr id="62" name="page-footer"/>
+          <p:cNvGrpSpPr/>
+          <p:nvPr/>
+        </p:nvGrpSpPr>
+        <p:grpSpPr>
+          <a:xfrm>
+            <a:off x="566738" y="6286500"/>
+            <a:ext cx="11058525" cy="176212"/>
+            <a:chOff x="566738" y="6286500"/>
+            <a:chExt cx="11058525" cy="176212"/>
+          </a:xfrm>
+        </p:grpSpPr>
+        <p:sp>
+          <p:nvSpPr>
+            <p:cNvPr id="60" name="TextBox 60"/>
+            <p:cNvSpPr txBox="1"/>
+            <p:nvPr/>
+          </p:nvSpPr>
+          <p:spPr>
+            <a:xfrm>
+              <a:off x="566738" y="6286500"/>
+              <a:ext cx="3868407" cy="176212"/>
+            </a:xfrm>
+            <a:prstGeom prst="rect">
+              <a:avLst/>
+            </a:prstGeom>
+            <a:noFill/>
+            <a:ln>
+              <a:noFill/>
+            </a:ln>
+          </p:spPr>
+          <p:txBody>
+            <a:bodyPr wrap="none" lIns="0" tIns="0" rIns="0" bIns="0" anchor="t" anchorCtr="0">
+              <a:spAutoFit/>
+            </a:bodyPr>
+            <a:lstStyle/>
+            <a:p>
+              <a:pPr algn="l"/>
+              <a:r>
+                <a:rPr lang="zh-CN" sz="900" dirty="0">
+                  <a:solidFill>
+                    <a:srgbClr val="7A756D"/>
+                  </a:solidFill>
+                  <a:latin typeface="+mn-lt"/>
+                  <a:ea typeface="+mn-ea"/>
+                  <a:cs typeface="+mn-cs"/>
+                </a:rPr>
+                <a:t>补页 01 / 05 · 时间线覆盖 2011–2026；具体日期与证据见第 20、21 页</a:t>
+              </a:r>
+            </a:p>
+          </p:txBody>
+        </p:sp>
+        <p:sp>
+          <p:nvSpPr>
+            <p:cNvPr id="61" name="TextBox 61"/>
+            <p:cNvSpPr txBox="1"/>
+            <p:nvPr/>
+          </p:nvSpPr>
+          <p:spPr>
+            <a:xfrm>
+              <a:off x="11225289" y="6286500"/>
+              <a:ext cx="399974" cy="176212"/>
+            </a:xfrm>
+            <a:prstGeom prst="rect">
+              <a:avLst/>
+            </a:prstGeom>
+            <a:noFill/>
+            <a:ln>
+              <a:noFill/>
+            </a:ln>
+          </p:spPr>
+          <p:txBody>
+            <a:bodyPr wrap="none" lIns="0" tIns="0" rIns="0" bIns="0" anchor="t" anchorCtr="0">
+              <a:spAutoFit/>
+            </a:bodyPr>
+            <a:lstStyle/>
+            <a:p>
+              <a:pPr algn="r"/>
+              <a:r>
+                <a:rPr lang="en-US" sz="900" dirty="0">
+                  <a:solidFill>
+                    <a:srgbClr val="7A756D"/>
+                  </a:solidFill>
+                  <a:latin typeface="+mn-lt"/>
+                  <a:ea typeface="+mn-ea"/>
+                  <a:cs typeface="+mn-cs"/>
+                </a:rPr>
+                <a:t>EXT 01</a:t>
+              </a:r>
+            </a:p>
+          </p:txBody>
+        </p:sp>
+      </p:grpSp>
+    </p:spTree>
+  </p:cSld>
+  <p:clrMapOvr>
+    <a:masterClrMapping/>
+  </p:clrMapOvr>
+  <p:transition xmlns:p14="http://schemas.microsoft.com/office/powerpoint/2010/main" p14:dur="400">
+    <p:fade/>
+  </p:transition>
+</p:sld>
+</file>
+
+<file path=ppt/slides/slide23.xml><?xml version="1.0" encoding="utf-8"?>
+<p:sld xmlns:a="http://schemas.openxmlformats.org/drawingml/2006/main" xmlns:r="http://schemas.openxmlformats.org/officeDocument/2006/relationships" xmlns:p="http://schemas.openxmlformats.org/presentationml/2006/main">
+  <p:cSld>
+    <p:bg>
+      <p:bgPr>
+        <a:solidFill>
+          <a:srgbClr val="F4F0E7"/>
+        </a:solidFill>
+        <a:effectLst/>
+      </p:bgPr>
+    </p:bg>
+    <p:spTree>
+      <p:nvGrpSpPr>
+        <p:cNvPr id="1" name=""/>
+        <p:cNvGrpSpPr/>
+        <p:nvPr/>
+      </p:nvGrpSpPr>
+      <p:grpSpPr>
+        <a:xfrm>
+          <a:off x="0" y="0"/>
+          <a:ext cx="0" cy="0"/>
+          <a:chOff x="0" y="0"/>
+          <a:chExt cx="0" cy="0"/>
+        </a:xfrm>
+      </p:grpSpPr>
+      <p:grpSp>
+        <p:nvGrpSpPr>
+          <p:cNvPr id="4" name="page-title"/>
+          <p:cNvGrpSpPr/>
+          <p:nvPr/>
+        </p:nvGrpSpPr>
+        <p:grpSpPr>
+          <a:xfrm>
+            <a:off x="559308" y="273050"/>
+            <a:ext cx="4120896" cy="659892"/>
+            <a:chOff x="559308" y="273050"/>
+            <a:chExt cx="4120896" cy="659892"/>
+          </a:xfrm>
+        </p:grpSpPr>
+        <p:sp>
+          <p:nvSpPr>
+            <p:cNvPr id="2" name="TextBox 2"/>
+            <p:cNvSpPr txBox="1"/>
+            <p:nvPr/>
+          </p:nvSpPr>
+          <p:spPr>
+            <a:xfrm>
+              <a:off x="566166" y="273050"/>
+              <a:ext cx="1457078" cy="205359"/>
+            </a:xfrm>
+            <a:prstGeom prst="rect">
+              <a:avLst/>
+            </a:prstGeom>
+            <a:noFill/>
+            <a:ln>
+              <a:noFill/>
+            </a:ln>
+          </p:spPr>
+          <p:txBody>
+            <a:bodyPr wrap="none" lIns="0" tIns="0" rIns="0" bIns="0" anchor="t" anchorCtr="0">
+              <a:spAutoFit/>
+            </a:bodyPr>
+            <a:lstStyle/>
+            <a:p>
+              <a:pPr algn="l"/>
+              <a:r>
+                <a:rPr lang="zh-CN" sz="1050" b="1" spc="150" dirty="0">
+                  <a:solidFill>
+                    <a:srgbClr val="C14E2C"/>
+                  </a:solidFill>
+                  <a:latin typeface="+mn-lt"/>
+                  <a:ea typeface="+mn-ea"/>
+                  <a:cs typeface="+mn-cs"/>
+                </a:rPr>
+                <a:t>补页 02 · 产品体验</a:t>
+              </a:r>
+            </a:p>
+          </p:txBody>
+        </p:sp>
+        <p:sp>
+          <p:nvSpPr>
+            <p:cNvPr id="3" name="TextBox 3"/>
+            <p:cNvSpPr txBox="1"/>
+            <p:nvPr/>
+          </p:nvSpPr>
+          <p:spPr>
+            <a:xfrm>
+              <a:off x="559308" y="463550"/>
+              <a:ext cx="4120896" cy="469392"/>
+            </a:xfrm>
+            <a:prstGeom prst="rect">
+              <a:avLst/>
+            </a:prstGeom>
+            <a:noFill/>
+            <a:ln>
+              <a:noFill/>
+            </a:ln>
+          </p:spPr>
+          <p:txBody>
+            <a:bodyPr wrap="none" lIns="0" tIns="0" rIns="0" bIns="0" anchor="t" anchorCtr="0">
+              <a:spAutoFit/>
+            </a:bodyPr>
+            <a:lstStyle/>
+            <a:p>
+              <a:pPr algn="l"/>
+              <a:r>
+                <a:rPr lang="zh-CN" sz="2400" b="1" dirty="0">
+                  <a:solidFill>
+                    <a:srgbClr val="1D1C19"/>
+                  </a:solidFill>
+                  <a:latin typeface="+mj-lt"/>
+                  <a:ea typeface="+mj-ea"/>
+                  <a:cs typeface="+mj-cs"/>
+                </a:rPr>
+                <a:t>每个产品到底能帮人干什么</a:t>
+              </a:r>
+            </a:p>
+          </p:txBody>
+        </p:sp>
+      </p:grpSp>
+      <p:grpSp>
+        <p:nvGrpSpPr>
+          <p:cNvPr id="45" name="experience-roster"/>
+          <p:cNvGrpSpPr/>
+          <p:nvPr/>
+        </p:nvGrpSpPr>
+        <p:grpSpPr>
+          <a:xfrm>
+            <a:off x="563499" y="1282700"/>
+            <a:ext cx="11089120" cy="4671441"/>
+            <a:chOff x="563499" y="1282700"/>
+            <a:chExt cx="11089120" cy="4671441"/>
+          </a:xfrm>
+        </p:grpSpPr>
+        <p:sp>
+          <p:nvSpPr>
+            <p:cNvPr id="5" name="TextBox 5"/>
+            <p:cNvSpPr txBox="1"/>
+            <p:nvPr/>
+          </p:nvSpPr>
+          <p:spPr>
+            <a:xfrm>
+              <a:off x="566166" y="1282700"/>
+              <a:ext cx="5537492" cy="205359"/>
+            </a:xfrm>
+            <a:prstGeom prst="rect">
+              <a:avLst/>
+            </a:prstGeom>
+            <a:noFill/>
+            <a:ln>
+              <a:noFill/>
+            </a:ln>
+          </p:spPr>
+          <p:txBody>
+            <a:bodyPr wrap="none" lIns="0" tIns="0" rIns="0" bIns="0" anchor="t" anchorCtr="0">
+              <a:spAutoFit/>
+            </a:bodyPr>
+            <a:lstStyle/>
+            <a:p>
+              <a:pPr algn="l"/>
+              <a:r>
+                <a:rPr lang="zh-CN" sz="1050" dirty="0">
+                  <a:solidFill>
+                    <a:srgbClr val="4D4942"/>
+                  </a:solidFill>
+                  <a:latin typeface="+mn-lt"/>
+                  <a:ea typeface="+mn-ea"/>
+                  <a:cs typeface="+mn-cs"/>
+                </a:rPr>
+                <a:t>“这是什么？” · “下一步怎么做？” · “能帮我订吗？” · “陪我一起做” · “记住并提醒我”</a:t>
+              </a:r>
+            </a:p>
+          </p:txBody>
+        </p:sp>
+        <p:sp>
+          <p:nvSpPr>
+            <p:cNvPr id="6" name="Line 6"/>
+            <p:cNvSpPr/>
+            <p:nvPr/>
+          </p:nvSpPr>
+          <p:spPr>
+            <a:xfrm>
+              <a:off x="571500" y="1562100"/>
+              <a:ext cx="11049000" cy="9525"/>
+            </a:xfrm>
+            <a:custGeom>
+              <a:avLst/>
+              <a:gdLst/>
+              <a:ahLst/>
+              <a:cxnLst/>
+              <a:rect l="l" t="t" r="r" b="b"/>
+              <a:pathLst>
+                <a:path w="11049000" h="9525">
+                  <a:moveTo>
+                    <a:pt x="0" y="0"/>
+                  </a:moveTo>
+                  <a:lnTo>
+                    <a:pt x="11049000" y="0"/>
+                  </a:lnTo>
+                </a:path>
+              </a:pathLst>
+            </a:custGeom>
+            <a:noFill/>
+            <a:ln w="9525">
+              <a:solidFill>
+                <a:srgbClr val="C9C1B4"/>
+              </a:solidFill>
+            </a:ln>
+          </p:spPr>
+        </p:sp>
+        <p:sp>
+          <p:nvSpPr>
+            <p:cNvPr id="7" name="Line 7"/>
+            <p:cNvSpPr/>
+            <p:nvPr/>
+          </p:nvSpPr>
+          <p:spPr>
+            <a:xfrm>
+              <a:off x="4000500" y="1676400"/>
+              <a:ext cx="9525" cy="4133850"/>
+            </a:xfrm>
+            <a:custGeom>
+              <a:avLst/>
+              <a:gdLst/>
+              <a:ahLst/>
+              <a:cxnLst/>
+              <a:rect l="l" t="t" r="r" b="b"/>
+              <a:pathLst>
+                <a:path w="9525" h="4133850">
+                  <a:moveTo>
+                    <a:pt x="0" y="0"/>
+                  </a:moveTo>
+                  <a:lnTo>
+                    <a:pt x="0" y="4133850"/>
+                  </a:lnTo>
+                </a:path>
+              </a:pathLst>
+            </a:custGeom>
+            <a:noFill/>
+            <a:ln w="9525">
+              <a:solidFill>
+                <a:srgbClr val="D6CFC3"/>
+              </a:solidFill>
+            </a:ln>
+          </p:spPr>
+        </p:sp>
+        <p:sp>
+          <p:nvSpPr>
+            <p:cNvPr id="8" name="Line 8"/>
+            <p:cNvSpPr/>
+            <p:nvPr/>
+          </p:nvSpPr>
+          <p:spPr>
+            <a:xfrm>
+              <a:off x="7810500" y="1676400"/>
+              <a:ext cx="9525" cy="4133850"/>
+            </a:xfrm>
+            <a:custGeom>
+              <a:avLst/>
+              <a:gdLst/>
+              <a:ahLst/>
+              <a:cxnLst/>
+              <a:rect l="l" t="t" r="r" b="b"/>
+              <a:pathLst>
+                <a:path w="9525" h="4133850">
+                  <a:moveTo>
+                    <a:pt x="0" y="0"/>
+                  </a:moveTo>
+                  <a:lnTo>
+                    <a:pt x="0" y="4133850"/>
+                  </a:lnTo>
+                </a:path>
+              </a:pathLst>
+            </a:custGeom>
+            <a:noFill/>
+            <a:ln w="9525">
+              <a:solidFill>
+                <a:srgbClr val="D6CFC3"/>
+              </a:solidFill>
+            </a:ln>
+          </p:spPr>
+        </p:sp>
+        <p:sp>
+          <p:nvSpPr>
+            <p:cNvPr id="9" name="TextBox 9"/>
+            <p:cNvSpPr txBox="1"/>
+            <p:nvPr/>
+          </p:nvSpPr>
+          <p:spPr>
+            <a:xfrm>
+              <a:off x="566547" y="1733550"/>
+              <a:ext cx="1177073" cy="191643"/>
+            </a:xfrm>
+            <a:prstGeom prst="rect">
+              <a:avLst/>
+            </a:prstGeom>
+            <a:noFill/>
+            <a:ln>
+              <a:noFill/>
+            </a:ln>
+          </p:spPr>
+          <p:txBody>
+            <a:bodyPr wrap="none" lIns="0" tIns="0" rIns="0" bIns="0" anchor="t" anchorCtr="0">
+              <a:spAutoFit/>
+            </a:bodyPr>
+            <a:lstStyle/>
+            <a:p>
+              <a:pPr algn="l"/>
+              <a:r>
+                <a:rPr lang="zh-CN" sz="980" b="1" spc="150" dirty="0">
+                  <a:solidFill>
+                    <a:srgbClr val="1F5A49"/>
+                  </a:solidFill>
+                  <a:latin typeface="+mn-lt"/>
+                  <a:ea typeface="+mn-ea"/>
+                  <a:cs typeface="+mn-cs"/>
+                </a:rPr>
+                <a:t>系统 / App 助手</a:t>
+              </a:r>
+            </a:p>
+          </p:txBody>
+        </p:sp>
+        <p:sp>
+          <p:nvSpPr>
+            <p:cNvPr id="10" name="TextBox 10"/>
+            <p:cNvSpPr txBox="1"/>
+            <p:nvPr/>
+          </p:nvSpPr>
+          <p:spPr>
+            <a:xfrm>
+              <a:off x="566738" y="2019300"/>
+              <a:ext cx="2190369" cy="176212"/>
+            </a:xfrm>
+            <a:prstGeom prst="rect">
+              <a:avLst/>
+            </a:prstGeom>
+            <a:noFill/>
+            <a:ln>
+              <a:noFill/>
+            </a:ln>
+          </p:spPr>
+          <p:txBody>
+            <a:bodyPr wrap="none" lIns="0" tIns="0" rIns="0" bIns="0" anchor="t" anchorCtr="0">
+              <a:spAutoFit/>
+            </a:bodyPr>
+            <a:lstStyle/>
+            <a:p>
+              <a:pPr algn="l"/>
+              <a:r>
+                <a:rPr lang="zh-CN" sz="900" b="1" dirty="0">
+                  <a:solidFill>
+                    <a:srgbClr val="1D1C19"/>
+                  </a:solidFill>
+                  <a:latin typeface="+mn-lt"/>
+                  <a:ea typeface="+mn-ea"/>
+                  <a:cs typeface="+mn-cs"/>
+                </a:rPr>
+                <a:t>小艺</a:t>
+              </a:r>
+              <a:r>
+                <a:rPr lang="zh-CN" sz="900" dirty="0">
+                  <a:solidFill>
+                    <a:srgbClr val="3F3B35"/>
+                  </a:solidFill>
+                  <a:latin typeface="+mn-lt"/>
+                  <a:ea typeface="+mn-ea"/>
+                  <a:cs typeface="+mn-cs"/>
+                </a:rPr>
+                <a:t>：看画面后直接问，也能调系统服务</a:t>
+              </a:r>
+            </a:p>
+          </p:txBody>
+        </p:sp>
+        <p:sp>
+          <p:nvSpPr>
+            <p:cNvPr id="11" name="TextBox 11"/>
+            <p:cNvSpPr txBox="1"/>
+            <p:nvPr/>
+          </p:nvSpPr>
+          <p:spPr>
+            <a:xfrm>
+              <a:off x="566738" y="2305050"/>
+              <a:ext cx="2568976" cy="176212"/>
+            </a:xfrm>
+            <a:prstGeom prst="rect">
+              <a:avLst/>
+            </a:prstGeom>
+            <a:noFill/>
+            <a:ln>
+              <a:noFill/>
+            </a:ln>
+          </p:spPr>
+          <p:txBody>
+            <a:bodyPr wrap="none" lIns="0" tIns="0" rIns="0" bIns="0" anchor="t" anchorCtr="0">
+              <a:spAutoFit/>
+            </a:bodyPr>
+            <a:lstStyle/>
+            <a:p>
+              <a:pPr algn="l"/>
+              <a:r>
+                <a:rPr lang="en-US" sz="900" b="1" dirty="0">
+                  <a:solidFill>
+                    <a:srgbClr val="1D1C19"/>
+                  </a:solidFill>
+                  <a:latin typeface="+mn-lt"/>
+                  <a:ea typeface="+mn-ea"/>
+                  <a:cs typeface="+mn-cs"/>
+                </a:rPr>
+                <a:t>Gemini Live</a:t>
+              </a:r>
+              <a:r>
+                <a:rPr lang="zh-CN" sz="900" dirty="0">
+                  <a:solidFill>
+                    <a:srgbClr val="3F3B35"/>
+                  </a:solidFill>
+                  <a:latin typeface="+mn-lt"/>
+                  <a:ea typeface="+mn-ea"/>
+                  <a:cs typeface="+mn-cs"/>
+                </a:rPr>
+                <a:t>：共享镜头/屏幕，实时解释并纠错</a:t>
+              </a:r>
+            </a:p>
+          </p:txBody>
+        </p:sp>
+        <p:sp>
+          <p:nvSpPr>
+            <p:cNvPr id="12" name="TextBox 12"/>
+            <p:cNvSpPr txBox="1"/>
+            <p:nvPr/>
+          </p:nvSpPr>
+          <p:spPr>
+            <a:xfrm>
+              <a:off x="566738" y="2590800"/>
+              <a:ext cx="1847886" cy="176212"/>
+            </a:xfrm>
+            <a:prstGeom prst="rect">
+              <a:avLst/>
+            </a:prstGeom>
+            <a:noFill/>
+            <a:ln>
+              <a:noFill/>
+            </a:ln>
+          </p:spPr>
+          <p:txBody>
+            <a:bodyPr wrap="none" lIns="0" tIns="0" rIns="0" bIns="0" anchor="t" anchorCtr="0">
+              <a:spAutoFit/>
+            </a:bodyPr>
+            <a:lstStyle/>
+            <a:p>
+              <a:pPr algn="l"/>
+              <a:r>
+                <a:rPr lang="en-US" sz="900" b="1" dirty="0">
+                  <a:solidFill>
+                    <a:srgbClr val="1D1C19"/>
+                  </a:solidFill>
+                  <a:latin typeface="+mn-lt"/>
+                  <a:ea typeface="+mn-ea"/>
+                  <a:cs typeface="+mn-cs"/>
+                </a:rPr>
+                <a:t>ChatGPT</a:t>
+              </a:r>
+              <a:r>
+                <a:rPr lang="zh-CN" sz="900" dirty="0">
+                  <a:solidFill>
+                    <a:srgbClr val="3F3B35"/>
+                  </a:solidFill>
+                  <a:latin typeface="+mn-lt"/>
+                  <a:ea typeface="+mn-ea"/>
+                  <a:cs typeface="+mn-cs"/>
+                </a:rPr>
+                <a:t>：指着现场问，连续追问</a:t>
+              </a:r>
+            </a:p>
+          </p:txBody>
+        </p:sp>
+        <p:sp>
+          <p:nvSpPr>
+            <p:cNvPr id="13" name="TextBox 13"/>
+            <p:cNvSpPr txBox="1"/>
+            <p:nvPr/>
+          </p:nvSpPr>
+          <p:spPr>
+            <a:xfrm>
+              <a:off x="566738" y="2876550"/>
+              <a:ext cx="3070479" cy="176212"/>
+            </a:xfrm>
+            <a:prstGeom prst="rect">
+              <a:avLst/>
+            </a:prstGeom>
+            <a:noFill/>
+            <a:ln>
+              <a:noFill/>
+            </a:ln>
+          </p:spPr>
+          <p:txBody>
+            <a:bodyPr wrap="none" lIns="0" tIns="0" rIns="0" bIns="0" anchor="t" anchorCtr="0">
+              <a:spAutoFit/>
+            </a:bodyPr>
+            <a:lstStyle/>
+            <a:p>
+              <a:pPr algn="l"/>
+              <a:r>
+                <a:rPr lang="en-US" sz="900" b="1" dirty="0">
+                  <a:solidFill>
+                    <a:srgbClr val="1D1C19"/>
+                  </a:solidFill>
+                  <a:latin typeface="+mn-lt"/>
+                  <a:ea typeface="+mn-ea"/>
+                  <a:cs typeface="+mn-cs"/>
+                </a:rPr>
+                <a:t>Apple Visual Intelligence</a:t>
+              </a:r>
+              <a:r>
+                <a:rPr lang="zh-CN" sz="900" dirty="0">
+                  <a:solidFill>
+                    <a:srgbClr val="3F3B35"/>
+                  </a:solidFill>
+                  <a:latin typeface="+mn-lt"/>
+                  <a:ea typeface="+mn-ea"/>
+                  <a:cs typeface="+mn-cs"/>
+                </a:rPr>
+                <a:t>：对准物体识物/翻译/查地点</a:t>
+              </a:r>
+            </a:p>
+          </p:txBody>
+        </p:sp>
+        <p:sp>
+          <p:nvSpPr>
+            <p:cNvPr id="14" name="TextBox 14"/>
+            <p:cNvSpPr txBox="1"/>
+            <p:nvPr/>
+          </p:nvSpPr>
+          <p:spPr>
+            <a:xfrm>
+              <a:off x="566738" y="3162300"/>
+              <a:ext cx="2533425" cy="176212"/>
+            </a:xfrm>
+            <a:prstGeom prst="rect">
+              <a:avLst/>
+            </a:prstGeom>
+            <a:noFill/>
+            <a:ln>
+              <a:noFill/>
+            </a:ln>
+          </p:spPr>
+          <p:txBody>
+            <a:bodyPr wrap="none" lIns="0" tIns="0" rIns="0" bIns="0" anchor="t" anchorCtr="0">
+              <a:spAutoFit/>
+            </a:bodyPr>
+            <a:lstStyle/>
+            <a:p>
+              <a:pPr algn="l"/>
+              <a:r>
+                <a:rPr lang="en-US" sz="900" b="1" dirty="0">
+                  <a:solidFill>
+                    <a:srgbClr val="1D1C19"/>
+                  </a:solidFill>
+                  <a:latin typeface="+mn-lt"/>
+                  <a:ea typeface="+mn-ea"/>
+                  <a:cs typeface="+mn-cs"/>
+                </a:rPr>
+                <a:t>Copilot Vision</a:t>
+              </a:r>
+              <a:r>
+                <a:rPr lang="zh-CN" sz="900" dirty="0">
+                  <a:solidFill>
+                    <a:srgbClr val="3F3B35"/>
+                  </a:solidFill>
+                  <a:latin typeface="+mn-lt"/>
+                  <a:ea typeface="+mn-ea"/>
+                  <a:cs typeface="+mn-cs"/>
+                </a:rPr>
+                <a:t>：看工作画面，总结并高亮重点</a:t>
+              </a:r>
+            </a:p>
+          </p:txBody>
+        </p:sp>
+        <p:sp>
+          <p:nvSpPr>
+            <p:cNvPr id="15" name="TextBox 15"/>
+            <p:cNvSpPr txBox="1"/>
+            <p:nvPr/>
+          </p:nvSpPr>
+          <p:spPr>
+            <a:xfrm>
+              <a:off x="566738" y="3448050"/>
+              <a:ext cx="2781122" cy="176212"/>
+            </a:xfrm>
+            <a:prstGeom prst="rect">
+              <a:avLst/>
+            </a:prstGeom>
+            <a:noFill/>
+            <a:ln>
+              <a:noFill/>
+            </a:ln>
+          </p:spPr>
+          <p:txBody>
+            <a:bodyPr wrap="none" lIns="0" tIns="0" rIns="0" bIns="0" anchor="t" anchorCtr="0">
+              <a:spAutoFit/>
+            </a:bodyPr>
+            <a:lstStyle/>
+            <a:p>
+              <a:pPr algn="l"/>
+              <a:r>
+                <a:rPr lang="zh-CN" sz="900" b="1" dirty="0">
+                  <a:solidFill>
+                    <a:srgbClr val="1D1C19"/>
+                  </a:solidFill>
+                  <a:latin typeface="+mn-lt"/>
+                  <a:ea typeface="+mn-ea"/>
+                  <a:cs typeface="+mn-cs"/>
+                </a:rPr>
+                <a:t>Bixby / 超级小爱</a:t>
+              </a:r>
+              <a:r>
+                <a:rPr lang="zh-CN" sz="900" dirty="0">
+                  <a:solidFill>
+                    <a:srgbClr val="3F3B35"/>
+                  </a:solidFill>
+                  <a:latin typeface="+mn-lt"/>
+                  <a:ea typeface="+mn-ea"/>
+                  <a:cs typeface="+mn-cs"/>
+                </a:rPr>
+                <a:t>：语音找内容、控设备、圈屏提问</a:t>
+              </a:r>
+            </a:p>
+          </p:txBody>
+        </p:sp>
+        <p:sp>
+          <p:nvSpPr>
+            <p:cNvPr id="16" name="TextBox 16"/>
+            <p:cNvSpPr txBox="1"/>
+            <p:nvPr/>
+          </p:nvSpPr>
+          <p:spPr>
+            <a:xfrm>
+              <a:off x="566738" y="3733800"/>
+              <a:ext cx="2293125" cy="176212"/>
+            </a:xfrm>
+            <a:prstGeom prst="rect">
+              <a:avLst/>
+            </a:prstGeom>
+            <a:noFill/>
+            <a:ln>
+              <a:noFill/>
+            </a:ln>
+          </p:spPr>
+          <p:txBody>
+            <a:bodyPr wrap="none" lIns="0" tIns="0" rIns="0" bIns="0" anchor="t" anchorCtr="0">
+              <a:spAutoFit/>
+            </a:bodyPr>
+            <a:lstStyle/>
+            <a:p>
+              <a:pPr algn="l"/>
+              <a:r>
+                <a:rPr lang="en-US" sz="900" b="1" dirty="0">
+                  <a:solidFill>
+                    <a:srgbClr val="C14E2C"/>
+                  </a:solidFill>
+                  <a:latin typeface="+mn-lt"/>
+                  <a:ea typeface="+mn-ea"/>
+                  <a:cs typeface="+mn-cs"/>
+                </a:rPr>
+                <a:t>Muse</a:t>
+              </a:r>
+              <a:r>
+                <a:rPr lang="zh-CN" sz="900" dirty="0">
+                  <a:solidFill>
+                    <a:srgbClr val="3F3B35"/>
+                  </a:solidFill>
+                  <a:latin typeface="+mn-lt"/>
+                  <a:ea typeface="+mn-ea"/>
+                  <a:cs typeface="+mn-cs"/>
+                </a:rPr>
+                <a:t>：说出目标，后台跨 App 执行并确认</a:t>
+              </a:r>
+            </a:p>
+          </p:txBody>
+        </p:sp>
+        <p:sp>
+          <p:nvSpPr>
+            <p:cNvPr id="17" name="TextBox 17"/>
+            <p:cNvSpPr txBox="1"/>
+            <p:nvPr/>
+          </p:nvSpPr>
+          <p:spPr>
+            <a:xfrm>
+              <a:off x="566738" y="4019550"/>
+              <a:ext cx="2514758" cy="176212"/>
+            </a:xfrm>
+            <a:prstGeom prst="rect">
+              <a:avLst/>
+            </a:prstGeom>
+            <a:noFill/>
+            <a:ln>
+              <a:noFill/>
+            </a:ln>
+          </p:spPr>
+          <p:txBody>
+            <a:bodyPr wrap="none" lIns="0" tIns="0" rIns="0" bIns="0" anchor="t" anchorCtr="0">
+              <a:spAutoFit/>
+            </a:bodyPr>
+            <a:lstStyle/>
+            <a:p>
+              <a:pPr algn="l"/>
+              <a:r>
+                <a:rPr lang="en-US" sz="900" b="1" dirty="0">
+                  <a:solidFill>
+                    <a:srgbClr val="C14E2C"/>
+                  </a:solidFill>
+                  <a:latin typeface="+mn-lt"/>
+                  <a:ea typeface="+mn-ea"/>
+                  <a:cs typeface="+mn-cs"/>
+                </a:rPr>
+                <a:t>SeedRealtime</a:t>
+              </a:r>
+              <a:r>
+                <a:rPr lang="zh-CN" sz="900" dirty="0">
+                  <a:solidFill>
+                    <a:srgbClr val="3F3B35"/>
+                  </a:solidFill>
+                  <a:latin typeface="+mn-lt"/>
+                  <a:ea typeface="+mn-ea"/>
+                  <a:cs typeface="+mn-cs"/>
+                </a:rPr>
+                <a:t>：边看、边听、边说，持续协作</a:t>
+              </a:r>
+            </a:p>
+          </p:txBody>
+        </p:sp>
+        <p:sp>
+          <p:nvSpPr>
+            <p:cNvPr id="18" name="TextBox 18"/>
+            <p:cNvSpPr txBox="1"/>
+            <p:nvPr/>
+          </p:nvSpPr>
+          <p:spPr>
+            <a:xfrm>
+              <a:off x="566738" y="4438650"/>
+              <a:ext cx="3036875" cy="176212"/>
+            </a:xfrm>
+            <a:prstGeom prst="rect">
+              <a:avLst/>
+            </a:prstGeom>
+            <a:noFill/>
+            <a:ln>
+              <a:noFill/>
+            </a:ln>
+          </p:spPr>
+          <p:txBody>
+            <a:bodyPr wrap="none" lIns="0" tIns="0" rIns="0" bIns="0" anchor="t" anchorCtr="0">
+              <a:spAutoFit/>
+            </a:bodyPr>
+            <a:lstStyle/>
+            <a:p>
+              <a:pPr algn="l"/>
+              <a:r>
+                <a:rPr lang="zh-CN" sz="900" dirty="0">
+                  <a:solidFill>
+                    <a:srgbClr val="6B6760"/>
+                  </a:solidFill>
+                  <a:latin typeface="+mn-lt"/>
+                  <a:ea typeface="+mn-ea"/>
+                  <a:cs typeface="+mn-cs"/>
+                </a:rPr>
+                <a:t>共同体验：少打字、少切 App，让系统接住现场上下文。</a:t>
+              </a:r>
+            </a:p>
+          </p:txBody>
+        </p:sp>
+        <p:sp>
+          <p:nvSpPr>
+            <p:cNvPr id="19" name="TextBox 19"/>
+            <p:cNvSpPr txBox="1"/>
+            <p:nvPr/>
+          </p:nvSpPr>
+          <p:spPr>
+            <a:xfrm>
+              <a:off x="4186047" y="1733550"/>
+              <a:ext cx="1663040" cy="191643"/>
+            </a:xfrm>
+            <a:prstGeom prst="rect">
+              <a:avLst/>
+            </a:prstGeom>
+            <a:noFill/>
+            <a:ln>
+              <a:noFill/>
+            </a:ln>
+          </p:spPr>
+          <p:txBody>
+            <a:bodyPr wrap="none" lIns="0" tIns="0" rIns="0" bIns="0" anchor="t" anchorCtr="0">
+              <a:spAutoFit/>
+            </a:bodyPr>
+            <a:lstStyle/>
+            <a:p>
+              <a:pPr algn="l"/>
+              <a:r>
+                <a:rPr lang="zh-CN" sz="980" b="1" spc="150" dirty="0">
+                  <a:solidFill>
+                    <a:srgbClr val="C14E2C"/>
+                  </a:solidFill>
+                  <a:latin typeface="+mn-lt"/>
+                  <a:ea typeface="+mn-ea"/>
+                  <a:cs typeface="+mn-cs"/>
+                </a:rPr>
+                <a:t>眼镜、屏幕、家庭与汽车</a:t>
+              </a:r>
+            </a:p>
+          </p:txBody>
+        </p:sp>
+        <p:sp>
+          <p:nvSpPr>
+            <p:cNvPr id="20" name="TextBox 20"/>
+            <p:cNvSpPr txBox="1"/>
+            <p:nvPr/>
+          </p:nvSpPr>
+          <p:spPr>
+            <a:xfrm>
+              <a:off x="4186238" y="2019300"/>
+              <a:ext cx="2310835" cy="176212"/>
+            </a:xfrm>
+            <a:prstGeom prst="rect">
+              <a:avLst/>
+            </a:prstGeom>
+            <a:noFill/>
+            <a:ln>
+              <a:noFill/>
+            </a:ln>
+          </p:spPr>
+          <p:txBody>
+            <a:bodyPr wrap="none" lIns="0" tIns="0" rIns="0" bIns="0" anchor="t" anchorCtr="0">
+              <a:spAutoFit/>
+            </a:bodyPr>
+            <a:lstStyle/>
+            <a:p>
+              <a:pPr algn="l"/>
+              <a:r>
+                <a:rPr lang="en-US" sz="900" b="1" dirty="0">
+                  <a:solidFill>
+                    <a:srgbClr val="1D1C19"/>
+                  </a:solidFill>
+                  <a:latin typeface="+mn-lt"/>
+                  <a:ea typeface="+mn-ea"/>
+                  <a:cs typeface="+mn-cs"/>
+                </a:rPr>
+                <a:t>Ray-Ban Meta</a:t>
+              </a:r>
+              <a:r>
+                <a:rPr lang="zh-CN" sz="900" dirty="0">
+                  <a:solidFill>
+                    <a:srgbClr val="3F3B35"/>
+                  </a:solidFill>
+                  <a:latin typeface="+mn-lt"/>
+                  <a:ea typeface="+mn-ea"/>
+                  <a:cs typeface="+mn-cs"/>
+                </a:rPr>
+                <a:t>：免手持看、问、拍、翻译</a:t>
+              </a:r>
+            </a:p>
+          </p:txBody>
+        </p:sp>
+        <p:sp>
+          <p:nvSpPr>
+            <p:cNvPr id="21" name="TextBox 21"/>
+            <p:cNvSpPr txBox="1"/>
+            <p:nvPr/>
+          </p:nvSpPr>
+          <p:spPr>
+            <a:xfrm>
+              <a:off x="4186238" y="2305050"/>
+              <a:ext cx="2362156" cy="176212"/>
+            </a:xfrm>
+            <a:prstGeom prst="rect">
+              <a:avLst/>
+            </a:prstGeom>
+            <a:noFill/>
+            <a:ln>
+              <a:noFill/>
+            </a:ln>
+          </p:spPr>
+          <p:txBody>
+            <a:bodyPr wrap="none" lIns="0" tIns="0" rIns="0" bIns="0" anchor="t" anchorCtr="0">
+              <a:spAutoFit/>
+            </a:bodyPr>
+            <a:lstStyle/>
+            <a:p>
+              <a:pPr algn="l"/>
+              <a:r>
+                <a:rPr lang="en-US" sz="900" b="1" dirty="0">
+                  <a:solidFill>
+                    <a:srgbClr val="1D1C19"/>
+                  </a:solidFill>
+                  <a:latin typeface="+mn-lt"/>
+                  <a:ea typeface="+mn-ea"/>
+                  <a:cs typeface="+mn-cs"/>
+                </a:rPr>
+                <a:t>Meta Display</a:t>
+              </a:r>
+              <a:r>
+                <a:rPr lang="zh-CN" sz="900" dirty="0">
+                  <a:solidFill>
+                    <a:srgbClr val="3F3B35"/>
+                  </a:solidFill>
+                  <a:latin typeface="+mn-lt"/>
+                  <a:ea typeface="+mn-ea"/>
+                  <a:cs typeface="+mn-cs"/>
+                </a:rPr>
+                <a:t>：镜片里看导航、字幕和提醒</a:t>
+              </a:r>
+            </a:p>
+          </p:txBody>
+        </p:sp>
+        <p:sp>
+          <p:nvSpPr>
+            <p:cNvPr id="22" name="TextBox 22"/>
+            <p:cNvSpPr txBox="1"/>
+            <p:nvPr/>
+          </p:nvSpPr>
+          <p:spPr>
+            <a:xfrm>
+              <a:off x="4186238" y="2590800"/>
+              <a:ext cx="2254423" cy="176212"/>
+            </a:xfrm>
+            <a:prstGeom prst="rect">
+              <a:avLst/>
+            </a:prstGeom>
+            <a:noFill/>
+            <a:ln>
+              <a:noFill/>
+            </a:ln>
+          </p:spPr>
+          <p:txBody>
+            <a:bodyPr wrap="none" lIns="0" tIns="0" rIns="0" bIns="0" anchor="t" anchorCtr="0">
+              <a:spAutoFit/>
+            </a:bodyPr>
+            <a:lstStyle/>
+            <a:p>
+              <a:pPr algn="l"/>
+              <a:r>
+                <a:rPr lang="en-US" sz="900" b="1" dirty="0">
+                  <a:solidFill>
+                    <a:srgbClr val="1D1C19"/>
+                  </a:solidFill>
+                  <a:latin typeface="+mn-lt"/>
+                  <a:ea typeface="+mn-ea"/>
+                  <a:cs typeface="+mn-cs"/>
+                </a:rPr>
+                <a:t>Meta Audio</a:t>
+              </a:r>
+              <a:r>
+                <a:rPr lang="zh-CN" sz="900" dirty="0">
+                  <a:solidFill>
+                    <a:srgbClr val="3F3B35"/>
+                  </a:solidFill>
+                  <a:latin typeface="+mn-lt"/>
+                  <a:ea typeface="+mn-ea"/>
+                  <a:cs typeface="+mn-cs"/>
+                </a:rPr>
+                <a:t>：不拍画面，只用声音和助手</a:t>
+              </a:r>
+            </a:p>
+          </p:txBody>
+        </p:sp>
+        <p:sp>
+          <p:nvSpPr>
+            <p:cNvPr id="23" name="TextBox 23"/>
+            <p:cNvSpPr txBox="1"/>
+            <p:nvPr/>
+          </p:nvSpPr>
+          <p:spPr>
+            <a:xfrm>
+              <a:off x="4186238" y="2876550"/>
+              <a:ext cx="2544175" cy="176212"/>
+            </a:xfrm>
+            <a:prstGeom prst="rect">
+              <a:avLst/>
+            </a:prstGeom>
+            <a:noFill/>
+            <a:ln>
+              <a:noFill/>
+            </a:ln>
+          </p:spPr>
+          <p:txBody>
+            <a:bodyPr wrap="none" lIns="0" tIns="0" rIns="0" bIns="0" anchor="t" anchorCtr="0">
+              <a:spAutoFit/>
+            </a:bodyPr>
+            <a:lstStyle/>
+            <a:p>
+              <a:pPr algn="l"/>
+              <a:r>
+                <a:rPr lang="en-US" sz="900" b="1" dirty="0">
+                  <a:solidFill>
+                    <a:srgbClr val="1D1C19"/>
+                  </a:solidFill>
+                  <a:latin typeface="+mn-lt"/>
+                  <a:ea typeface="+mn-ea"/>
+                  <a:cs typeface="+mn-cs"/>
+                </a:rPr>
+                <a:t>Android XR / Snap</a:t>
+              </a:r>
+              <a:r>
+                <a:rPr lang="zh-CN" sz="900" dirty="0">
+                  <a:solidFill>
+                    <a:srgbClr val="3F3B35"/>
+                  </a:solidFill>
+                  <a:latin typeface="+mn-lt"/>
+                  <a:ea typeface="+mn-ea"/>
+                  <a:cs typeface="+mn-cs"/>
+                </a:rPr>
+                <a:t>：第一视角共享与主动提醒</a:t>
+              </a:r>
+            </a:p>
+          </p:txBody>
+        </p:sp>
+        <p:sp>
+          <p:nvSpPr>
+            <p:cNvPr id="24" name="TextBox 24"/>
+            <p:cNvSpPr txBox="1"/>
+            <p:nvPr/>
+          </p:nvSpPr>
+          <p:spPr>
+            <a:xfrm>
+              <a:off x="4186238" y="3162300"/>
+              <a:ext cx="2330306" cy="176212"/>
+            </a:xfrm>
+            <a:prstGeom prst="rect">
+              <a:avLst/>
+            </a:prstGeom>
+            <a:noFill/>
+            <a:ln>
+              <a:noFill/>
+            </a:ln>
+          </p:spPr>
+          <p:txBody>
+            <a:bodyPr wrap="none" lIns="0" tIns="0" rIns="0" bIns="0" anchor="t" anchorCtr="0">
+              <a:spAutoFit/>
+            </a:bodyPr>
+            <a:lstStyle/>
+            <a:p>
+              <a:pPr algn="l"/>
+              <a:r>
+                <a:rPr lang="zh-CN" sz="900" b="1" dirty="0">
+                  <a:solidFill>
+                    <a:srgbClr val="1D1C19"/>
+                  </a:solidFill>
+                  <a:latin typeface="+mn-lt"/>
+                  <a:ea typeface="+mn-ea"/>
+                  <a:cs typeface="+mn-cs"/>
+                </a:rPr>
+                <a:t>华为/小米/夸克</a:t>
+              </a:r>
+              <a:r>
+                <a:rPr lang="zh-CN" sz="900" dirty="0">
+                  <a:solidFill>
+                    <a:srgbClr val="3F3B35"/>
+                  </a:solidFill>
+                  <a:latin typeface="+mn-lt"/>
+                  <a:ea typeface="+mn-ea"/>
+                  <a:cs typeface="+mn-cs"/>
+                </a:rPr>
+                <a:t>：拍录、识别、导航、支付</a:t>
+              </a:r>
+            </a:p>
+          </p:txBody>
+        </p:sp>
+        <p:sp>
+          <p:nvSpPr>
+            <p:cNvPr id="25" name="TextBox 25"/>
+            <p:cNvSpPr txBox="1"/>
+            <p:nvPr/>
+          </p:nvSpPr>
+          <p:spPr>
+            <a:xfrm>
+              <a:off x="4186238" y="3448050"/>
+              <a:ext cx="2891982" cy="176212"/>
+            </a:xfrm>
+            <a:prstGeom prst="rect">
+              <a:avLst/>
+            </a:prstGeom>
+            <a:noFill/>
+            <a:ln>
+              <a:noFill/>
+            </a:ln>
+          </p:spPr>
+          <p:txBody>
+            <a:bodyPr wrap="none" lIns="0" tIns="0" rIns="0" bIns="0" anchor="t" anchorCtr="0">
+              <a:spAutoFit/>
+            </a:bodyPr>
+            <a:lstStyle/>
+            <a:p>
+              <a:pPr algn="l"/>
+              <a:r>
+                <a:rPr lang="zh-CN" sz="900" b="1" dirty="0">
+                  <a:solidFill>
+                    <a:srgbClr val="1D1C19"/>
+                  </a:solidFill>
+                  <a:latin typeface="+mn-lt"/>
+                  <a:ea typeface="+mn-ea"/>
+                  <a:cs typeface="+mn-cs"/>
+                </a:rPr>
+                <a:t>Samsung Vision / 海信</a:t>
+              </a:r>
+              <a:r>
+                <a:rPr lang="zh-CN" sz="900" dirty="0">
+                  <a:solidFill>
+                    <a:srgbClr val="3F3B35"/>
+                  </a:solidFill>
+                  <a:latin typeface="+mn-lt"/>
+                  <a:ea typeface="+mn-ea"/>
+                  <a:cs typeface="+mn-cs"/>
+                </a:rPr>
+                <a:t>：电视内容问答、看护、画质</a:t>
+              </a:r>
+            </a:p>
+          </p:txBody>
+        </p:sp>
+        <p:sp>
+          <p:nvSpPr>
+            <p:cNvPr id="26" name="TextBox 26"/>
+            <p:cNvSpPr txBox="1"/>
+            <p:nvPr/>
+          </p:nvSpPr>
+          <p:spPr>
+            <a:xfrm>
+              <a:off x="4186238" y="3733800"/>
+              <a:ext cx="1826895" cy="176212"/>
+            </a:xfrm>
+            <a:prstGeom prst="rect">
+              <a:avLst/>
+            </a:prstGeom>
+            <a:noFill/>
+            <a:ln>
+              <a:noFill/>
+            </a:ln>
+          </p:spPr>
+          <p:txBody>
+            <a:bodyPr wrap="none" lIns="0" tIns="0" rIns="0" bIns="0" anchor="t" anchorCtr="0">
+              <a:spAutoFit/>
+            </a:bodyPr>
+            <a:lstStyle/>
+            <a:p>
+              <a:pPr algn="l"/>
+              <a:r>
+                <a:rPr lang="zh-CN" sz="900" b="1" dirty="0">
+                  <a:solidFill>
+                    <a:srgbClr val="1D1C19"/>
+                  </a:solidFill>
+                  <a:latin typeface="+mn-lt"/>
+                  <a:ea typeface="+mn-ea"/>
+                  <a:cs typeface="+mn-cs"/>
+                </a:rPr>
+                <a:t>小度</a:t>
+              </a:r>
+              <a:r>
+                <a:rPr lang="zh-CN" sz="900" dirty="0">
+                  <a:solidFill>
+                    <a:srgbClr val="3F3B35"/>
+                  </a:solidFill>
+                  <a:latin typeface="+mn-lt"/>
+                  <a:ea typeface="+mn-ea"/>
+                  <a:cs typeface="+mn-cs"/>
+                </a:rPr>
+                <a:t>：家庭看护、陪伴与设备控制</a:t>
+              </a:r>
+            </a:p>
+          </p:txBody>
+        </p:sp>
+        <p:sp>
+          <p:nvSpPr>
+            <p:cNvPr id="27" name="TextBox 27"/>
+            <p:cNvSpPr txBox="1"/>
+            <p:nvPr/>
+          </p:nvSpPr>
+          <p:spPr>
+            <a:xfrm>
+              <a:off x="4186238" y="4019550"/>
+              <a:ext cx="2418512" cy="176212"/>
+            </a:xfrm>
+            <a:prstGeom prst="rect">
+              <a:avLst/>
+            </a:prstGeom>
+            <a:noFill/>
+            <a:ln>
+              <a:noFill/>
+            </a:ln>
+          </p:spPr>
+          <p:txBody>
+            <a:bodyPr wrap="none" lIns="0" tIns="0" rIns="0" bIns="0" anchor="t" anchorCtr="0">
+              <a:spAutoFit/>
+            </a:bodyPr>
+            <a:lstStyle/>
+            <a:p>
+              <a:pPr algn="l"/>
+              <a:r>
+                <a:rPr lang="zh-CN" sz="900" b="1" dirty="0">
+                  <a:solidFill>
+                    <a:srgbClr val="1D1C19"/>
+                  </a:solidFill>
+                  <a:latin typeface="+mn-lt"/>
+                  <a:ea typeface="+mn-ea"/>
+                  <a:cs typeface="+mn-cs"/>
+                </a:rPr>
+                <a:t>理想 / NOMI</a:t>
+              </a:r>
+              <a:r>
+                <a:rPr lang="zh-CN" sz="900" dirty="0">
+                  <a:solidFill>
+                    <a:srgbClr val="3F3B35"/>
+                  </a:solidFill>
+                  <a:latin typeface="+mn-lt"/>
+                  <a:ea typeface="+mn-ea"/>
+                  <a:cs typeface="+mn-cs"/>
+                </a:rPr>
+                <a:t>：分辨谁、坐哪、指向哪并服务</a:t>
+              </a:r>
+            </a:p>
+          </p:txBody>
+        </p:sp>
+        <p:sp>
+          <p:nvSpPr>
+            <p:cNvPr id="28" name="TextBox 28"/>
+            <p:cNvSpPr txBox="1"/>
+            <p:nvPr/>
+          </p:nvSpPr>
+          <p:spPr>
+            <a:xfrm>
+              <a:off x="4186238" y="4400550"/>
+              <a:ext cx="2636753" cy="176212"/>
+            </a:xfrm>
+            <a:prstGeom prst="rect">
+              <a:avLst/>
+            </a:prstGeom>
+            <a:noFill/>
+            <a:ln>
+              <a:noFill/>
+            </a:ln>
+          </p:spPr>
+          <p:txBody>
+            <a:bodyPr wrap="none" lIns="0" tIns="0" rIns="0" bIns="0" anchor="t" anchorCtr="0">
+              <a:spAutoFit/>
+            </a:bodyPr>
+            <a:lstStyle/>
+            <a:p>
+              <a:pPr algn="l"/>
+              <a:r>
+                <a:rPr lang="en-US" sz="900" b="1" dirty="0">
+                  <a:solidFill>
+                    <a:srgbClr val="A33B27"/>
+                  </a:solidFill>
+                  <a:latin typeface="+mn-lt"/>
+                  <a:ea typeface="+mn-ea"/>
+                  <a:cs typeface="+mn-cs"/>
+                </a:rPr>
+                <a:t>Glass / Stories</a:t>
+              </a:r>
+              <a:r>
+                <a:rPr lang="zh-CN" sz="900" dirty="0">
+                  <a:solidFill>
+                    <a:srgbClr val="3F3B35"/>
+                  </a:solidFill>
+                  <a:latin typeface="+mn-lt"/>
+                  <a:ea typeface="+mn-ea"/>
+                  <a:cs typeface="+mn-cs"/>
+                </a:rPr>
+                <a:t>：早期穿戴入口，日常价值不足</a:t>
+              </a:r>
+            </a:p>
+          </p:txBody>
+        </p:sp>
+        <p:sp>
+          <p:nvSpPr>
+            <p:cNvPr id="29" name="TextBox 29"/>
+            <p:cNvSpPr txBox="1"/>
+            <p:nvPr/>
+          </p:nvSpPr>
+          <p:spPr>
+            <a:xfrm>
+              <a:off x="4186238" y="4686300"/>
+              <a:ext cx="2573383" cy="176212"/>
+            </a:xfrm>
+            <a:prstGeom prst="rect">
+              <a:avLst/>
+            </a:prstGeom>
+            <a:noFill/>
+            <a:ln>
+              <a:noFill/>
+            </a:ln>
+          </p:spPr>
+          <p:txBody>
+            <a:bodyPr wrap="none" lIns="0" tIns="0" rIns="0" bIns="0" anchor="t" anchorCtr="0">
+              <a:spAutoFit/>
+            </a:bodyPr>
+            <a:lstStyle/>
+            <a:p>
+              <a:pPr algn="l"/>
+              <a:r>
+                <a:rPr lang="en-US" sz="900" b="1" dirty="0">
+                  <a:solidFill>
+                    <a:srgbClr val="A33B27"/>
+                  </a:solidFill>
+                  <a:latin typeface="+mn-lt"/>
+                  <a:ea typeface="+mn-ea"/>
+                  <a:cs typeface="+mn-cs"/>
+                </a:rPr>
+                <a:t>Humane / Rabbit</a:t>
+              </a:r>
+              <a:r>
+                <a:rPr lang="zh-CN" sz="900" dirty="0">
+                  <a:solidFill>
+                    <a:srgbClr val="3F3B35"/>
+                  </a:solidFill>
+                  <a:latin typeface="+mn-lt"/>
+                  <a:ea typeface="+mn-ea"/>
+                  <a:cs typeface="+mn-cs"/>
+                </a:rPr>
+                <a:t>：想替代手机，真实执行不稳</a:t>
+              </a:r>
+            </a:p>
+          </p:txBody>
+        </p:sp>
+        <p:sp>
+          <p:nvSpPr>
+            <p:cNvPr id="30" name="TextBox 30"/>
+            <p:cNvSpPr txBox="1"/>
+            <p:nvPr/>
+          </p:nvSpPr>
+          <p:spPr>
+            <a:xfrm>
+              <a:off x="7996047" y="1733550"/>
+              <a:ext cx="1510919" cy="191643"/>
+            </a:xfrm>
+            <a:prstGeom prst="rect">
+              <a:avLst/>
+            </a:prstGeom>
+            <a:noFill/>
+            <a:ln>
+              <a:noFill/>
+            </a:ln>
+          </p:spPr>
+          <p:txBody>
+            <a:bodyPr wrap="none" lIns="0" tIns="0" rIns="0" bIns="0" anchor="t" anchorCtr="0">
+              <a:spAutoFit/>
+            </a:bodyPr>
+            <a:lstStyle/>
+            <a:p>
+              <a:pPr algn="l"/>
+              <a:r>
+                <a:rPr lang="zh-CN" sz="980" b="1" spc="150" dirty="0">
+                  <a:solidFill>
+                    <a:srgbClr val="1F5A49"/>
+                  </a:solidFill>
+                  <a:latin typeface="+mn-lt"/>
+                  <a:ea typeface="+mn-ea"/>
+                  <a:cs typeface="+mn-cs"/>
+                </a:rPr>
+                <a:t>无障碍与能力基础设施</a:t>
+              </a:r>
+            </a:p>
+          </p:txBody>
+        </p:sp>
+        <p:sp>
+          <p:nvSpPr>
+            <p:cNvPr id="31" name="TextBox 31"/>
+            <p:cNvSpPr txBox="1"/>
+            <p:nvPr/>
+          </p:nvSpPr>
+          <p:spPr>
+            <a:xfrm>
+              <a:off x="7996238" y="2019300"/>
+              <a:ext cx="2130227" cy="176212"/>
+            </a:xfrm>
+            <a:prstGeom prst="rect">
+              <a:avLst/>
+            </a:prstGeom>
+            <a:noFill/>
+            <a:ln>
+              <a:noFill/>
+            </a:ln>
+          </p:spPr>
+          <p:txBody>
+            <a:bodyPr wrap="none" lIns="0" tIns="0" rIns="0" bIns="0" anchor="t" anchorCtr="0">
+              <a:spAutoFit/>
+            </a:bodyPr>
+            <a:lstStyle/>
+            <a:p>
+              <a:pPr algn="l"/>
+              <a:r>
+                <a:rPr lang="en-US" sz="900" b="1" dirty="0">
+                  <a:solidFill>
+                    <a:srgbClr val="1D1C19"/>
+                  </a:solidFill>
+                  <a:latin typeface="+mn-lt"/>
+                  <a:ea typeface="+mn-ea"/>
+                  <a:cs typeface="+mn-cs"/>
+                </a:rPr>
+                <a:t>Seeing AI</a:t>
+              </a:r>
+              <a:r>
+                <a:rPr lang="zh-CN" sz="900" dirty="0">
+                  <a:solidFill>
+                    <a:srgbClr val="3F3B35"/>
+                  </a:solidFill>
+                  <a:latin typeface="+mn-lt"/>
+                  <a:ea typeface="+mn-ea"/>
+                  <a:cs typeface="+mn-cs"/>
+                </a:rPr>
+                <a:t>：读文字、认物件、描述场景</a:t>
+              </a:r>
+            </a:p>
+          </p:txBody>
+        </p:sp>
+        <p:sp>
+          <p:nvSpPr>
+            <p:cNvPr id="32" name="TextBox 32"/>
+            <p:cNvSpPr txBox="1"/>
+            <p:nvPr/>
+          </p:nvSpPr>
+          <p:spPr>
+            <a:xfrm>
+              <a:off x="7996238" y="2305050"/>
+              <a:ext cx="1729369" cy="176212"/>
+            </a:xfrm>
+            <a:prstGeom prst="rect">
+              <a:avLst/>
+            </a:prstGeom>
+            <a:noFill/>
+            <a:ln>
+              <a:noFill/>
+            </a:ln>
+          </p:spPr>
+          <p:txBody>
+            <a:bodyPr wrap="none" lIns="0" tIns="0" rIns="0" bIns="0" anchor="t" anchorCtr="0">
+              <a:spAutoFit/>
+            </a:bodyPr>
+            <a:lstStyle/>
+            <a:p>
+              <a:pPr algn="l"/>
+              <a:r>
+                <a:rPr lang="en-US" sz="900" b="1" dirty="0">
+                  <a:solidFill>
+                    <a:srgbClr val="1D1C19"/>
+                  </a:solidFill>
+                  <a:latin typeface="+mn-lt"/>
+                  <a:ea typeface="+mn-ea"/>
+                  <a:cs typeface="+mn-cs"/>
+                </a:rPr>
+                <a:t>Be My AI</a:t>
+              </a:r>
+              <a:r>
+                <a:rPr lang="zh-CN" sz="900" dirty="0">
+                  <a:solidFill>
+                    <a:srgbClr val="3F3B35"/>
+                  </a:solidFill>
+                  <a:latin typeface="+mn-lt"/>
+                  <a:ea typeface="+mn-ea"/>
+                  <a:cs typeface="+mn-cs"/>
+                </a:rPr>
+                <a:t>：解释图片并继续追问</a:t>
+              </a:r>
+            </a:p>
+          </p:txBody>
+        </p:sp>
+        <p:sp>
+          <p:nvSpPr>
+            <p:cNvPr id="33" name="TextBox 33"/>
+            <p:cNvSpPr txBox="1"/>
+            <p:nvPr/>
+          </p:nvSpPr>
+          <p:spPr>
+            <a:xfrm>
+              <a:off x="7996238" y="2590800"/>
+              <a:ext cx="1991973" cy="176212"/>
+            </a:xfrm>
+            <a:prstGeom prst="rect">
+              <a:avLst/>
+            </a:prstGeom>
+            <a:noFill/>
+            <a:ln>
+              <a:noFill/>
+            </a:ln>
+          </p:spPr>
+          <p:txBody>
+            <a:bodyPr wrap="none" lIns="0" tIns="0" rIns="0" bIns="0" anchor="t" anchorCtr="0">
+              <a:spAutoFit/>
+            </a:bodyPr>
+            <a:lstStyle/>
+            <a:p>
+              <a:pPr algn="l"/>
+              <a:r>
+                <a:rPr lang="zh-CN" sz="900" b="1" dirty="0">
+                  <a:solidFill>
+                    <a:srgbClr val="1D1C19"/>
+                  </a:solidFill>
+                  <a:latin typeface="+mn-lt"/>
+                  <a:ea typeface="+mn-ea"/>
+                  <a:cs typeface="+mn-cs"/>
+                </a:rPr>
+                <a:t>vivo 看见</a:t>
+              </a:r>
+              <a:r>
+                <a:rPr lang="zh-CN" sz="900" dirty="0">
+                  <a:solidFill>
+                    <a:srgbClr val="3F3B35"/>
+                  </a:solidFill>
+                  <a:latin typeface="+mn-lt"/>
+                  <a:ea typeface="+mn-ea"/>
+                  <a:cs typeface="+mn-cs"/>
+                </a:rPr>
+                <a:t>：实时描述环境和寻找物品</a:t>
+              </a:r>
+            </a:p>
+          </p:txBody>
+        </p:sp>
+        <p:sp>
+          <p:nvSpPr>
+            <p:cNvPr id="34" name="TextBox 34"/>
+            <p:cNvSpPr txBox="1"/>
+            <p:nvPr/>
+          </p:nvSpPr>
+          <p:spPr>
+            <a:xfrm>
+              <a:off x="7996238" y="2876550"/>
+              <a:ext cx="2830148" cy="176212"/>
+            </a:xfrm>
+            <a:prstGeom prst="rect">
+              <a:avLst/>
+            </a:prstGeom>
+            <a:noFill/>
+            <a:ln>
+              <a:noFill/>
+            </a:ln>
+          </p:spPr>
+          <p:txBody>
+            <a:bodyPr wrap="none" lIns="0" tIns="0" rIns="0" bIns="0" anchor="t" anchorCtr="0">
+              <a:spAutoFit/>
+            </a:bodyPr>
+            <a:lstStyle/>
+            <a:p>
+              <a:pPr algn="l"/>
+              <a:r>
+                <a:rPr lang="en-US" sz="900" b="1" dirty="0">
+                  <a:solidFill>
+                    <a:srgbClr val="1D1C19"/>
+                  </a:solidFill>
+                  <a:latin typeface="+mn-lt"/>
+                  <a:ea typeface="+mn-ea"/>
+                  <a:cs typeface="+mn-cs"/>
+                </a:rPr>
+                <a:t>Be My Eyes Workplace</a:t>
+              </a:r>
+              <a:r>
+                <a:rPr lang="zh-CN" sz="900" dirty="0">
+                  <a:solidFill>
+                    <a:srgbClr val="3F3B35"/>
+                  </a:solidFill>
+                  <a:latin typeface="+mn-lt"/>
+                  <a:ea typeface="+mn-ea"/>
+                  <a:cs typeface="+mn-cs"/>
+                </a:rPr>
+                <a:t>：AI 协助，必要时人工接手</a:t>
+              </a:r>
+            </a:p>
+          </p:txBody>
+        </p:sp>
+        <p:sp>
+          <p:nvSpPr>
+            <p:cNvPr id="35" name="TextBox 35"/>
+            <p:cNvSpPr txBox="1"/>
+            <p:nvPr/>
+          </p:nvSpPr>
+          <p:spPr>
+            <a:xfrm>
+              <a:off x="7996238" y="3162300"/>
+              <a:ext cx="1826895" cy="176212"/>
+            </a:xfrm>
+            <a:prstGeom prst="rect">
+              <a:avLst/>
+            </a:prstGeom>
+            <a:noFill/>
+            <a:ln>
+              <a:noFill/>
+            </a:ln>
+          </p:spPr>
+          <p:txBody>
+            <a:bodyPr wrap="none" lIns="0" tIns="0" rIns="0" bIns="0" anchor="t" anchorCtr="0">
+              <a:spAutoFit/>
+            </a:bodyPr>
+            <a:lstStyle/>
+            <a:p>
+              <a:pPr algn="l"/>
+              <a:r>
+                <a:rPr lang="zh-CN" sz="900" b="1" dirty="0">
+                  <a:solidFill>
+                    <a:srgbClr val="1D1C19"/>
+                  </a:solidFill>
+                  <a:latin typeface="+mn-lt"/>
+                  <a:ea typeface="+mn-ea"/>
+                  <a:cs typeface="+mn-cs"/>
+                </a:rPr>
+                <a:t>拍立淘</a:t>
+              </a:r>
+              <a:r>
+                <a:rPr lang="zh-CN" sz="900" dirty="0">
+                  <a:solidFill>
+                    <a:srgbClr val="3F3B35"/>
+                  </a:solidFill>
+                  <a:latin typeface="+mn-lt"/>
+                  <a:ea typeface="+mn-ea"/>
+                  <a:cs typeface="+mn-cs"/>
+                </a:rPr>
+                <a:t>：拍图找同款、比价、溯源</a:t>
+              </a:r>
+            </a:p>
+          </p:txBody>
+        </p:sp>
+        <p:sp>
+          <p:nvSpPr>
+            <p:cNvPr id="36" name="TextBox 36"/>
+            <p:cNvSpPr txBox="1"/>
+            <p:nvPr/>
+          </p:nvSpPr>
+          <p:spPr>
+            <a:xfrm>
+              <a:off x="7996238" y="3448050"/>
+              <a:ext cx="2406913" cy="176212"/>
+            </a:xfrm>
+            <a:prstGeom prst="rect">
+              <a:avLst/>
+            </a:prstGeom>
+            <a:noFill/>
+            <a:ln>
+              <a:noFill/>
+            </a:ln>
+          </p:spPr>
+          <p:txBody>
+            <a:bodyPr wrap="none" lIns="0" tIns="0" rIns="0" bIns="0" anchor="t" anchorCtr="0">
+              <a:spAutoFit/>
+            </a:bodyPr>
+            <a:lstStyle/>
+            <a:p>
+              <a:pPr algn="l"/>
+              <a:r>
+                <a:rPr lang="en-US" sz="900" b="1" dirty="0">
+                  <a:solidFill>
+                    <a:srgbClr val="1D1C19"/>
+                  </a:solidFill>
+                  <a:latin typeface="+mn-lt"/>
+                  <a:ea typeface="+mn-ea"/>
+                  <a:cs typeface="+mn-cs"/>
+                </a:rPr>
+                <a:t>TwelveLabs</a:t>
+              </a:r>
+              <a:r>
+                <a:rPr lang="zh-CN" sz="900" dirty="0">
+                  <a:solidFill>
+                    <a:srgbClr val="3F3B35"/>
+                  </a:solidFill>
+                  <a:latin typeface="+mn-lt"/>
+                  <a:ea typeface="+mn-ea"/>
+                  <a:cs typeface="+mn-cs"/>
+                </a:rPr>
+                <a:t>：上传视频后搜索、分析和标注</a:t>
+              </a:r>
+            </a:p>
+          </p:txBody>
+        </p:sp>
+        <p:sp>
+          <p:nvSpPr>
+            <p:cNvPr id="37" name="TextBox 37"/>
+            <p:cNvSpPr txBox="1"/>
+            <p:nvPr/>
+          </p:nvSpPr>
+          <p:spPr>
+            <a:xfrm>
+              <a:off x="7996238" y="3733800"/>
+              <a:ext cx="2569945" cy="176212"/>
+            </a:xfrm>
+            <a:prstGeom prst="rect">
+              <a:avLst/>
+            </a:prstGeom>
+            <a:noFill/>
+            <a:ln>
+              <a:noFill/>
+            </a:ln>
+          </p:spPr>
+          <p:txBody>
+            <a:bodyPr wrap="none" lIns="0" tIns="0" rIns="0" bIns="0" anchor="t" anchorCtr="0">
+              <a:spAutoFit/>
+            </a:bodyPr>
+            <a:lstStyle/>
+            <a:p>
+              <a:pPr algn="l"/>
+              <a:r>
+                <a:rPr lang="en-US" sz="900" b="1" dirty="0">
+                  <a:solidFill>
+                    <a:srgbClr val="1D1C19"/>
+                  </a:solidFill>
+                  <a:latin typeface="+mn-lt"/>
+                  <a:ea typeface="+mn-ea"/>
+                  <a:cs typeface="+mn-cs"/>
+                </a:rPr>
+                <a:t>Vision-Agents</a:t>
+              </a:r>
+              <a:r>
+                <a:rPr lang="zh-CN" sz="900" dirty="0">
+                  <a:solidFill>
+                    <a:srgbClr val="3F3B35"/>
+                  </a:solidFill>
+                  <a:latin typeface="+mn-lt"/>
+                  <a:ea typeface="+mn-ea"/>
+                  <a:cs typeface="+mn-cs"/>
+                </a:rPr>
+                <a:t>：让开发者搭会看会听的 Agent</a:t>
+              </a:r>
+            </a:p>
+          </p:txBody>
+        </p:sp>
+        <p:sp>
+          <p:nvSpPr>
+            <p:cNvPr id="38" name="TextBox 38"/>
+            <p:cNvSpPr txBox="1"/>
+            <p:nvPr/>
+          </p:nvSpPr>
+          <p:spPr>
+            <a:xfrm>
+              <a:off x="7996238" y="4019550"/>
+              <a:ext cx="3038001" cy="176212"/>
+            </a:xfrm>
+            <a:prstGeom prst="rect">
+              <a:avLst/>
+            </a:prstGeom>
+            <a:noFill/>
+            <a:ln>
+              <a:noFill/>
+            </a:ln>
+          </p:spPr>
+          <p:txBody>
+            <a:bodyPr wrap="none" lIns="0" tIns="0" rIns="0" bIns="0" anchor="t" anchorCtr="0">
+              <a:spAutoFit/>
+            </a:bodyPr>
+            <a:lstStyle/>
+            <a:p>
+              <a:pPr algn="l"/>
+              <a:r>
+                <a:rPr lang="en-US" sz="900" b="1" dirty="0">
+                  <a:solidFill>
+                    <a:srgbClr val="1D1C19"/>
+                  </a:solidFill>
+                  <a:latin typeface="+mn-lt"/>
+                  <a:ea typeface="+mn-ea"/>
+                  <a:cs typeface="+mn-cs"/>
+                </a:rPr>
+                <a:t>LiveKit / Pipecat</a:t>
+              </a:r>
+              <a:r>
+                <a:rPr lang="zh-CN" sz="900" dirty="0">
+                  <a:solidFill>
+                    <a:srgbClr val="3F3B35"/>
+                  </a:solidFill>
+                  <a:latin typeface="+mn-lt"/>
+                  <a:ea typeface="+mn-ea"/>
+                  <a:cs typeface="+mn-cs"/>
+                </a:rPr>
+                <a:t>：实时音视频、打断、多 Agent 接力</a:t>
+              </a:r>
+            </a:p>
+          </p:txBody>
+        </p:sp>
+        <p:sp>
+          <p:nvSpPr>
+            <p:cNvPr id="39" name="TextBox 39"/>
+            <p:cNvSpPr txBox="1"/>
+            <p:nvPr/>
+          </p:nvSpPr>
+          <p:spPr>
+            <a:xfrm>
+              <a:off x="7996238" y="4305300"/>
+              <a:ext cx="2849609" cy="176212"/>
+            </a:xfrm>
+            <a:prstGeom prst="rect">
+              <a:avLst/>
+            </a:prstGeom>
+            <a:noFill/>
+            <a:ln>
+              <a:noFill/>
+            </a:ln>
+          </p:spPr>
+          <p:txBody>
+            <a:bodyPr wrap="none" lIns="0" tIns="0" rIns="0" bIns="0" anchor="t" anchorCtr="0">
+              <a:spAutoFit/>
+            </a:bodyPr>
+            <a:lstStyle/>
+            <a:p>
+              <a:pPr algn="l"/>
+              <a:r>
+                <a:rPr lang="en-US" sz="900" b="1" dirty="0">
+                  <a:solidFill>
+                    <a:srgbClr val="1D1C19"/>
+                  </a:solidFill>
+                  <a:latin typeface="+mn-lt"/>
+                  <a:ea typeface="+mn-ea"/>
+                  <a:cs typeface="+mn-cs"/>
+                </a:rPr>
+                <a:t>Dograh / VLX-Flow</a:t>
+              </a:r>
+              <a:r>
+                <a:rPr lang="zh-CN" sz="900" dirty="0">
+                  <a:solidFill>
+                    <a:srgbClr val="3F3B35"/>
+                  </a:solidFill>
+                  <a:latin typeface="+mn-lt"/>
+                  <a:ea typeface="+mn-ea"/>
+                  <a:cs typeface="+mn-cs"/>
+                </a:rPr>
+                <a:t>：自托管工作流与流式视觉理解</a:t>
+              </a:r>
+            </a:p>
+          </p:txBody>
+        </p:sp>
+        <p:sp>
+          <p:nvSpPr>
+            <p:cNvPr id="40" name="TextBox 40"/>
+            <p:cNvSpPr txBox="1"/>
+            <p:nvPr/>
+          </p:nvSpPr>
+          <p:spPr>
+            <a:xfrm>
+              <a:off x="7996238" y="4686300"/>
+              <a:ext cx="3656381" cy="176212"/>
+            </a:xfrm>
+            <a:prstGeom prst="rect">
+              <a:avLst/>
+            </a:prstGeom>
+            <a:noFill/>
+            <a:ln>
+              <a:noFill/>
+            </a:ln>
+          </p:spPr>
+          <p:txBody>
+            <a:bodyPr wrap="none" lIns="0" tIns="0" rIns="0" bIns="0" anchor="t" anchorCtr="0">
+              <a:spAutoFit/>
+            </a:bodyPr>
+            <a:lstStyle/>
+            <a:p>
+              <a:pPr algn="l"/>
+              <a:r>
+                <a:rPr lang="zh-CN" sz="900" dirty="0">
+                  <a:solidFill>
+                    <a:srgbClr val="6B6760"/>
+                  </a:solidFill>
+                  <a:latin typeface="+mn-lt"/>
+                  <a:ea typeface="+mn-ea"/>
+                  <a:cs typeface="+mn-cs"/>
+                </a:rPr>
+                <a:t>这些不是终端助手，而是别人产品背后的“耳朵、眼睛和行动管线”。</a:t>
+              </a:r>
+            </a:p>
+          </p:txBody>
+        </p:sp>
+        <p:sp>
+          <p:nvSpPr>
+            <p:cNvPr id="41" name="Line 41"/>
+            <p:cNvSpPr/>
+            <p:nvPr/>
+          </p:nvSpPr>
+          <p:spPr>
+            <a:xfrm>
+              <a:off x="571500" y="5200650"/>
+              <a:ext cx="11049000" cy="9525"/>
+            </a:xfrm>
+            <a:custGeom>
+              <a:avLst/>
+              <a:gdLst/>
+              <a:ahLst/>
+              <a:cxnLst/>
+              <a:rect l="l" t="t" r="r" b="b"/>
+              <a:pathLst>
+                <a:path w="11049000" h="9525">
+                  <a:moveTo>
+                    <a:pt x="0" y="0"/>
+                  </a:moveTo>
+                  <a:lnTo>
+                    <a:pt x="11049000" y="0"/>
+                  </a:lnTo>
+                </a:path>
+              </a:pathLst>
+            </a:custGeom>
+            <a:noFill/>
+            <a:ln w="9525">
+              <a:solidFill>
+                <a:srgbClr val="C9C1B4"/>
+              </a:solidFill>
+            </a:ln>
+          </p:spPr>
+        </p:sp>
+        <p:sp>
+          <p:nvSpPr>
+            <p:cNvPr id="42" name="TextBox 42"/>
+            <p:cNvSpPr txBox="1"/>
+            <p:nvPr/>
+          </p:nvSpPr>
+          <p:spPr>
+            <a:xfrm>
+              <a:off x="566166" y="5378450"/>
+              <a:ext cx="576072" cy="205359"/>
+            </a:xfrm>
+            <a:prstGeom prst="rect">
+              <a:avLst/>
+            </a:prstGeom>
+            <a:noFill/>
+            <a:ln>
+              <a:noFill/>
+            </a:ln>
+          </p:spPr>
+          <p:txBody>
+            <a:bodyPr wrap="none" lIns="0" tIns="0" rIns="0" bIns="0" anchor="t" anchorCtr="0">
+              <a:spAutoFit/>
+            </a:bodyPr>
+            <a:lstStyle/>
+            <a:p>
+              <a:pPr algn="l"/>
+              <a:r>
+                <a:rPr lang="zh-CN" sz="1050" b="1" dirty="0">
+                  <a:solidFill>
+                    <a:srgbClr val="A33B27"/>
+                  </a:solidFill>
+                  <a:latin typeface="+mn-lt"/>
+                  <a:ea typeface="+mn-ea"/>
+                  <a:cs typeface="+mn-cs"/>
+                </a:rPr>
+                <a:t>用词原则</a:t>
+              </a:r>
+            </a:p>
+          </p:txBody>
+        </p:sp>
+        <p:sp>
+          <p:nvSpPr>
+            <p:cNvPr id="43" name="TextBox 43"/>
+            <p:cNvSpPr txBox="1"/>
+            <p:nvPr/>
+          </p:nvSpPr>
+          <p:spPr>
+            <a:xfrm>
+              <a:off x="1518666" y="5378450"/>
+              <a:ext cx="5254790" cy="205359"/>
+            </a:xfrm>
+            <a:prstGeom prst="rect">
+              <a:avLst/>
+            </a:prstGeom>
+            <a:noFill/>
+            <a:ln>
+              <a:noFill/>
+            </a:ln>
+          </p:spPr>
+          <p:txBody>
+            <a:bodyPr wrap="none" lIns="0" tIns="0" rIns="0" bIns="0" anchor="t" anchorCtr="0">
+              <a:spAutoFit/>
+            </a:bodyPr>
+            <a:lstStyle/>
+            <a:p>
+              <a:pPr algn="l"/>
+              <a:r>
+                <a:rPr lang="zh-CN" sz="1050" dirty="0">
+                  <a:solidFill>
+                    <a:srgbClr val="3F3B35"/>
+                  </a:solidFill>
+                  <a:latin typeface="+mn-lt"/>
+                  <a:ea typeface="+mn-ea"/>
+                  <a:cs typeface="+mn-cs"/>
+                </a:rPr>
+                <a:t>先说用户要完成什么，再说产品怎么帮；不要用“学习、办公、赋能”代替具体动作。</a:t>
+              </a:r>
+            </a:p>
+          </p:txBody>
+        </p:sp>
+        <p:sp>
+          <p:nvSpPr>
+            <p:cNvPr id="44" name="TextBox 44"/>
+            <p:cNvSpPr txBox="1"/>
+            <p:nvPr/>
+          </p:nvSpPr>
+          <p:spPr>
+            <a:xfrm>
+              <a:off x="563499" y="5645150"/>
+              <a:ext cx="7242491" cy="308991"/>
+            </a:xfrm>
+            <a:prstGeom prst="rect">
+              <a:avLst/>
+            </a:prstGeom>
+            <a:noFill/>
+            <a:ln>
+              <a:noFill/>
+            </a:ln>
+          </p:spPr>
+          <p:txBody>
+            <a:bodyPr wrap="none" lIns="0" tIns="0" rIns="0" bIns="0" anchor="t" anchorCtr="0">
+              <a:spAutoFit/>
+            </a:bodyPr>
+            <a:lstStyle/>
+            <a:p>
+              <a:pPr algn="l"/>
+              <a:r>
+                <a:rPr lang="zh-CN" sz="1580" b="1" dirty="0">
+                  <a:solidFill>
+                    <a:srgbClr val="1D1C19"/>
+                  </a:solidFill>
+                  <a:latin typeface="+mj-lt"/>
+                  <a:ea typeface="+mj-ea"/>
+                  <a:cs typeface="+mj-cs"/>
+                </a:rPr>
+                <a:t>分：同一个“多模态”，有人帮我查，有人陪我做，也有人替我把事办完。</a:t>
+              </a:r>
+            </a:p>
+          </p:txBody>
+        </p:sp>
+      </p:grpSp>
+      <p:grpSp>
+        <p:nvGrpSpPr>
+          <p:cNvPr id="48" name="page-footer"/>
+          <p:cNvGrpSpPr/>
+          <p:nvPr/>
+        </p:nvGrpSpPr>
+        <p:grpSpPr>
+          <a:xfrm>
+            <a:off x="566738" y="6286500"/>
+            <a:ext cx="11058525" cy="176212"/>
+            <a:chOff x="566738" y="6286500"/>
+            <a:chExt cx="11058525" cy="176212"/>
+          </a:xfrm>
+        </p:grpSpPr>
+        <p:sp>
+          <p:nvSpPr>
+            <p:cNvPr id="46" name="TextBox 46"/>
+            <p:cNvSpPr txBox="1"/>
+            <p:nvPr/>
+          </p:nvSpPr>
+          <p:spPr>
+            <a:xfrm>
+              <a:off x="566738" y="6286500"/>
+              <a:ext cx="3620033" cy="176212"/>
+            </a:xfrm>
+            <a:prstGeom prst="rect">
+              <a:avLst/>
+            </a:prstGeom>
+            <a:noFill/>
+            <a:ln>
+              <a:noFill/>
+            </a:ln>
+          </p:spPr>
+          <p:txBody>
+            <a:bodyPr wrap="none" lIns="0" tIns="0" rIns="0" bIns="0" anchor="t" anchorCtr="0">
+              <a:spAutoFit/>
+            </a:bodyPr>
+            <a:lstStyle/>
+            <a:p>
+              <a:pPr algn="l"/>
+              <a:r>
+                <a:rPr lang="zh-CN" sz="900" dirty="0">
+                  <a:solidFill>
+                    <a:srgbClr val="7A756D"/>
+                  </a:solidFill>
+                  <a:latin typeface="+mn-lt"/>
+                  <a:ea typeface="+mn-ea"/>
+                  <a:cs typeface="+mn-cs"/>
+                </a:rPr>
+                <a:t>补页 02 / 05 · 产品能力按公开材料整理；具体体验仍需同任务实测</a:t>
+              </a:r>
+            </a:p>
+          </p:txBody>
+        </p:sp>
+        <p:sp>
+          <p:nvSpPr>
+            <p:cNvPr id="47" name="TextBox 47"/>
+            <p:cNvSpPr txBox="1"/>
+            <p:nvPr/>
+          </p:nvSpPr>
+          <p:spPr>
+            <a:xfrm>
+              <a:off x="11225289" y="6286500"/>
+              <a:ext cx="399974" cy="176212"/>
+            </a:xfrm>
+            <a:prstGeom prst="rect">
+              <a:avLst/>
+            </a:prstGeom>
+            <a:noFill/>
+            <a:ln>
+              <a:noFill/>
+            </a:ln>
+          </p:spPr>
+          <p:txBody>
+            <a:bodyPr wrap="none" lIns="0" tIns="0" rIns="0" bIns="0" anchor="t" anchorCtr="0">
+              <a:spAutoFit/>
+            </a:bodyPr>
+            <a:lstStyle/>
+            <a:p>
+              <a:pPr algn="r"/>
+              <a:r>
+                <a:rPr lang="en-US" sz="900" dirty="0">
+                  <a:solidFill>
+                    <a:srgbClr val="7A756D"/>
+                  </a:solidFill>
+                  <a:latin typeface="+mn-lt"/>
+                  <a:ea typeface="+mn-ea"/>
+                  <a:cs typeface="+mn-cs"/>
+                </a:rPr>
+                <a:t>EXT 02</a:t>
+              </a:r>
+            </a:p>
+          </p:txBody>
+        </p:sp>
+      </p:grpSp>
+    </p:spTree>
+  </p:cSld>
+  <p:clrMapOvr>
+    <a:masterClrMapping/>
+  </p:clrMapOvr>
+  <p:transition xmlns:p14="http://schemas.microsoft.com/office/powerpoint/2010/main" p14:dur="400">
+    <p:fade/>
+  </p:transition>
+</p:sld>
+</file>
+
+<file path=ppt/slides/slide24.xml><?xml version="1.0" encoding="utf-8"?>
+<p:sld xmlns:a="http://schemas.openxmlformats.org/drawingml/2006/main" xmlns:r="http://schemas.openxmlformats.org/officeDocument/2006/relationships" xmlns:p="http://schemas.openxmlformats.org/presentationml/2006/main">
+  <p:cSld>
+    <p:bg>
+      <p:bgPr>
+        <a:solidFill>
+          <a:srgbClr val="F4F0E7"/>
+        </a:solidFill>
+        <a:effectLst/>
+      </p:bgPr>
+    </p:bg>
+    <p:spTree>
+      <p:nvGrpSpPr>
+        <p:cNvPr id="1" name=""/>
+        <p:cNvGrpSpPr/>
+        <p:nvPr/>
+      </p:nvGrpSpPr>
+      <p:grpSpPr>
+        <a:xfrm>
+          <a:off x="0" y="0"/>
+          <a:ext cx="0" cy="0"/>
+          <a:chOff x="0" y="0"/>
+          <a:chExt cx="0" cy="0"/>
+        </a:xfrm>
+      </p:grpSpPr>
+      <p:grpSp>
+        <p:nvGrpSpPr>
+          <p:cNvPr id="4" name="page-title"/>
+          <p:cNvGrpSpPr/>
+          <p:nvPr/>
+        </p:nvGrpSpPr>
+        <p:grpSpPr>
+          <a:xfrm>
+            <a:off x="559308" y="273050"/>
+            <a:ext cx="6957731" cy="659892"/>
+            <a:chOff x="559308" y="273050"/>
+            <a:chExt cx="6957731" cy="659892"/>
+          </a:xfrm>
+        </p:grpSpPr>
+        <p:sp>
+          <p:nvSpPr>
+            <p:cNvPr id="2" name="TextBox 2"/>
+            <p:cNvSpPr txBox="1"/>
+            <p:nvPr/>
+          </p:nvSpPr>
+          <p:spPr>
+            <a:xfrm>
+              <a:off x="566166" y="273050"/>
+              <a:ext cx="1457078" cy="205359"/>
+            </a:xfrm>
+            <a:prstGeom prst="rect">
+              <a:avLst/>
+            </a:prstGeom>
+            <a:noFill/>
+            <a:ln>
+              <a:noFill/>
+            </a:ln>
+          </p:spPr>
+          <p:txBody>
+            <a:bodyPr wrap="none" lIns="0" tIns="0" rIns="0" bIns="0" anchor="t" anchorCtr="0">
+              <a:spAutoFit/>
+            </a:bodyPr>
+            <a:lstStyle/>
+            <a:p>
+              <a:pPr algn="l"/>
+              <a:r>
+                <a:rPr lang="zh-CN" sz="1050" b="1" spc="150" dirty="0">
+                  <a:solidFill>
+                    <a:srgbClr val="C14E2C"/>
+                  </a:solidFill>
+                  <a:latin typeface="+mn-lt"/>
+                  <a:ea typeface="+mn-ea"/>
+                  <a:cs typeface="+mn-cs"/>
+                </a:rPr>
+                <a:t>补页 03 · 横向布局</a:t>
+              </a:r>
+            </a:p>
+          </p:txBody>
+        </p:sp>
+        <p:sp>
+          <p:nvSpPr>
+            <p:cNvPr id="3" name="TextBox 3"/>
+            <p:cNvSpPr txBox="1"/>
+            <p:nvPr/>
+          </p:nvSpPr>
+          <p:spPr>
+            <a:xfrm>
+              <a:off x="559308" y="463550"/>
+              <a:ext cx="6957731" cy="469392"/>
+            </a:xfrm>
+            <a:prstGeom prst="rect">
+              <a:avLst/>
+            </a:prstGeom>
+            <a:noFill/>
+            <a:ln>
+              <a:noFill/>
+            </a:ln>
+          </p:spPr>
+          <p:txBody>
+            <a:bodyPr wrap="none" lIns="0" tIns="0" rIns="0" bIns="0" anchor="t" anchorCtr="0">
+              <a:spAutoFit/>
+            </a:bodyPr>
+            <a:lstStyle/>
+            <a:p>
+              <a:pPr algn="l"/>
+              <a:r>
+                <a:rPr lang="zh-CN" sz="2400" b="1" dirty="0">
+                  <a:solidFill>
+                    <a:srgbClr val="1D1C19"/>
+                  </a:solidFill>
+                  <a:latin typeface="+mj-lt"/>
+                  <a:ea typeface="+mj-ea"/>
+                  <a:cs typeface="+mj-cs"/>
+                </a:rPr>
+                <a:t>大家不在同一层竞争：从“答一下”到“替我做”</a:t>
+              </a:r>
+            </a:p>
+          </p:txBody>
+        </p:sp>
+      </p:grpSp>
+      <p:grpSp>
+        <p:nvGrpSpPr>
+          <p:cNvPr id="45" name="landscape-map"/>
+          <p:cNvGrpSpPr/>
+          <p:nvPr/>
+        </p:nvGrpSpPr>
+        <p:grpSpPr>
+          <a:xfrm>
+            <a:off x="417269" y="1270000"/>
+            <a:ext cx="11203231" cy="4636643"/>
+            <a:chOff x="417269" y="1270000"/>
+            <a:chExt cx="11203231" cy="4636643"/>
+          </a:xfrm>
+        </p:grpSpPr>
+        <p:sp>
+          <p:nvSpPr>
+            <p:cNvPr id="5" name="TextBox 5"/>
+            <p:cNvSpPr txBox="1"/>
+            <p:nvPr/>
+          </p:nvSpPr>
+          <p:spPr>
+            <a:xfrm>
+              <a:off x="565785" y="1270000"/>
+              <a:ext cx="5137760" cy="220028"/>
+            </a:xfrm>
+            <a:prstGeom prst="rect">
+              <a:avLst/>
+            </a:prstGeom>
+            <a:noFill/>
+            <a:ln>
+              <a:noFill/>
+            </a:ln>
+          </p:spPr>
+          <p:txBody>
+            <a:bodyPr wrap="none" lIns="0" tIns="0" rIns="0" bIns="0" anchor="t" anchorCtr="0">
+              <a:spAutoFit/>
+            </a:bodyPr>
+            <a:lstStyle/>
+            <a:p>
+              <a:pPr algn="l"/>
+              <a:r>
+                <a:rPr lang="zh-CN" sz="1120" dirty="0">
+                  <a:solidFill>
+                    <a:srgbClr val="4D4942"/>
+                  </a:solidFill>
+                  <a:latin typeface="+mn-lt"/>
+                  <a:ea typeface="+mn-ea"/>
+                  <a:cs typeface="+mn-cs"/>
+                </a:rPr>
+                <a:t>横轴看行动深度，纵轴看上下文范围；位置是产品能力对比，不是市场份额。</a:t>
+              </a:r>
+            </a:p>
+          </p:txBody>
+        </p:sp>
+        <p:sp>
+          <p:nvSpPr>
+            <p:cNvPr id="6" name="Line 6"/>
+            <p:cNvSpPr/>
+            <p:nvPr/>
+          </p:nvSpPr>
+          <p:spPr>
+            <a:xfrm>
+              <a:off x="1619250" y="4953000"/>
+              <a:ext cx="9906000" cy="9525"/>
+            </a:xfrm>
+            <a:custGeom>
+              <a:avLst/>
+              <a:gdLst/>
+              <a:ahLst/>
+              <a:cxnLst/>
+              <a:rect l="l" t="t" r="r" b="b"/>
+              <a:pathLst>
+                <a:path w="9906000" h="9525">
+                  <a:moveTo>
+                    <a:pt x="0" y="0"/>
+                  </a:moveTo>
+                  <a:lnTo>
+                    <a:pt x="9906000" y="0"/>
+                  </a:lnTo>
+                </a:path>
+              </a:pathLst>
+            </a:custGeom>
+            <a:noFill/>
+            <a:ln w="19050">
+              <a:solidFill>
+                <a:srgbClr val="B6AEA1"/>
+              </a:solidFill>
+            </a:ln>
+          </p:spPr>
+        </p:sp>
+        <p:sp>
+          <p:nvSpPr>
+            <p:cNvPr id="7" name="Line 7"/>
+            <p:cNvSpPr/>
+            <p:nvPr/>
+          </p:nvSpPr>
+          <p:spPr>
+            <a:xfrm>
+              <a:off x="1619250" y="1752600"/>
+              <a:ext cx="9525" cy="3200400"/>
+            </a:xfrm>
+            <a:custGeom>
+              <a:avLst/>
+              <a:gdLst/>
+              <a:ahLst/>
+              <a:cxnLst/>
+              <a:rect l="l" t="t" r="r" b="b"/>
+              <a:pathLst>
+                <a:path w="9525" h="3200400">
+                  <a:moveTo>
+                    <a:pt x="0" y="3200400"/>
+                  </a:moveTo>
+                  <a:lnTo>
+                    <a:pt x="0" y="0"/>
+                  </a:lnTo>
+                </a:path>
+              </a:pathLst>
+            </a:custGeom>
+            <a:noFill/>
+            <a:ln w="19050">
+              <a:solidFill>
+                <a:srgbClr val="B6AEA1"/>
+              </a:solidFill>
+            </a:ln>
+          </p:spPr>
+        </p:sp>
+        <p:sp>
+          <p:nvSpPr>
+            <p:cNvPr id="8" name="TextBox 8"/>
+            <p:cNvSpPr txBox="1"/>
+            <p:nvPr/>
+          </p:nvSpPr>
+          <p:spPr>
+            <a:xfrm>
+              <a:off x="4826709" y="5130800"/>
+              <a:ext cx="3491083" cy="205359"/>
+            </a:xfrm>
+            <a:prstGeom prst="rect">
+              <a:avLst/>
+            </a:prstGeom>
+            <a:noFill/>
+            <a:ln>
+              <a:noFill/>
+            </a:ln>
+          </p:spPr>
+          <p:txBody>
+            <a:bodyPr wrap="none" lIns="0" tIns="0" rIns="0" bIns="0" anchor="t" anchorCtr="0">
+              <a:spAutoFit/>
+            </a:bodyPr>
+            <a:lstStyle/>
+            <a:p>
+              <a:pPr algn="ctr"/>
+              <a:r>
+                <a:rPr lang="zh-CN" sz="1050" b="1" dirty="0">
+                  <a:solidFill>
+                    <a:srgbClr val="6B6760"/>
+                  </a:solidFill>
+                  <a:latin typeface="+mn-lt"/>
+                  <a:ea typeface="+mn-ea"/>
+                  <a:cs typeface="+mn-cs"/>
+                </a:rPr>
+                <a:t>回答一个问题 → 指引下一步 → 执行操作 → 承担任务结果</a:t>
+              </a:r>
+            </a:p>
+          </p:txBody>
+        </p:sp>
+        <p:sp>
+          <p:nvSpPr>
+            <p:cNvPr id="9" name="TextBox 9"/>
+            <p:cNvSpPr txBox="1"/>
+            <p:nvPr/>
+          </p:nvSpPr>
+          <p:spPr>
+            <a:xfrm rot="-5400000">
+              <a:off x="417269" y="3326321"/>
+              <a:ext cx="1936222" cy="205359"/>
+            </a:xfrm>
+            <a:prstGeom prst="rect">
+              <a:avLst/>
+            </a:prstGeom>
+            <a:noFill/>
+            <a:ln>
+              <a:noFill/>
+            </a:ln>
+          </p:spPr>
+          <p:txBody>
+            <a:bodyPr wrap="none" lIns="0" tIns="0" rIns="0" bIns="0" anchor="t" anchorCtr="0">
+              <a:spAutoFit/>
+            </a:bodyPr>
+            <a:lstStyle/>
+            <a:p>
+              <a:pPr algn="ctr"/>
+              <a:r>
+                <a:rPr lang="zh-CN" sz="1050" b="1" dirty="0">
+                  <a:solidFill>
+                    <a:srgbClr val="6B6760"/>
+                  </a:solidFill>
+                  <a:latin typeface="+mn-lt"/>
+                  <a:ea typeface="+mn-ea"/>
+                  <a:cs typeface="+mn-cs"/>
+                </a:rPr>
+                <a:t>单次 / 单设备 → 持续 / 跨设备</a:t>
+              </a:r>
+            </a:p>
+          </p:txBody>
+        </p:sp>
+        <p:sp>
+          <p:nvSpPr>
+            <p:cNvPr id="10" name="Line 10"/>
+            <p:cNvSpPr/>
+            <p:nvPr/>
+          </p:nvSpPr>
+          <p:spPr>
+            <a:xfrm>
+              <a:off x="6572250" y="1752600"/>
+              <a:ext cx="9525" cy="3200400"/>
+            </a:xfrm>
+            <a:custGeom>
+              <a:avLst/>
+              <a:gdLst/>
+              <a:ahLst/>
+              <a:cxnLst/>
+              <a:rect l="l" t="t" r="r" b="b"/>
+              <a:pathLst>
+                <a:path w="9525" h="3200400">
+                  <a:moveTo>
+                    <a:pt x="0" y="0"/>
+                  </a:moveTo>
+                  <a:lnTo>
+                    <a:pt x="0" y="3200400"/>
+                  </a:lnTo>
+                </a:path>
+              </a:pathLst>
+            </a:custGeom>
+            <a:noFill/>
+            <a:ln w="9525">
+              <a:solidFill>
+                <a:srgbClr val="D6CFC3"/>
+              </a:solidFill>
+              <a:custDash>
+                <a:ds d="600000" sp="600000"/>
+              </a:custDash>
+            </a:ln>
+          </p:spPr>
+        </p:sp>
+        <p:sp>
+          <p:nvSpPr>
+            <p:cNvPr id="11" name="Line 11"/>
+            <p:cNvSpPr/>
+            <p:nvPr/>
+          </p:nvSpPr>
+          <p:spPr>
+            <a:xfrm>
+              <a:off x="1619250" y="3352800"/>
+              <a:ext cx="9906000" cy="9525"/>
+            </a:xfrm>
+            <a:custGeom>
+              <a:avLst/>
+              <a:gdLst/>
+              <a:ahLst/>
+              <a:cxnLst/>
+              <a:rect l="l" t="t" r="r" b="b"/>
+              <a:pathLst>
+                <a:path w="9906000" h="9525">
+                  <a:moveTo>
+                    <a:pt x="0" y="0"/>
+                  </a:moveTo>
+                  <a:lnTo>
+                    <a:pt x="9906000" y="0"/>
+                  </a:lnTo>
+                </a:path>
+              </a:pathLst>
+            </a:custGeom>
+            <a:noFill/>
+            <a:ln w="9525">
+              <a:solidFill>
+                <a:srgbClr val="D6CFC3"/>
+              </a:solidFill>
+              <a:custDash>
+                <a:ds d="600000" sp="600000"/>
+              </a:custDash>
+            </a:ln>
+          </p:spPr>
+        </p:sp>
+        <p:sp>
+          <p:nvSpPr>
+            <p:cNvPr id="12" name="TextBox 12"/>
+            <p:cNvSpPr txBox="1"/>
+            <p:nvPr/>
+          </p:nvSpPr>
+          <p:spPr>
+            <a:xfrm>
+              <a:off x="1937766" y="4425950"/>
+              <a:ext cx="1312157" cy="205359"/>
+            </a:xfrm>
+            <a:prstGeom prst="rect">
+              <a:avLst/>
+            </a:prstGeom>
+            <a:noFill/>
+            <a:ln>
+              <a:noFill/>
+            </a:ln>
+          </p:spPr>
+          <p:txBody>
+            <a:bodyPr wrap="none" lIns="0" tIns="0" rIns="0" bIns="0" anchor="t" anchorCtr="0">
+              <a:spAutoFit/>
+            </a:bodyPr>
+            <a:lstStyle/>
+            <a:p>
+              <a:pPr algn="l"/>
+              <a:r>
+                <a:rPr lang="zh-CN" sz="1050" b="1" dirty="0">
+                  <a:solidFill>
+                    <a:srgbClr val="6B6760"/>
+                  </a:solidFill>
+                  <a:latin typeface="+mn-lt"/>
+                  <a:ea typeface="+mn-ea"/>
+                  <a:cs typeface="+mn-cs"/>
+                </a:rPr>
+                <a:t>视觉搜索 / 内容识别</a:t>
+              </a:r>
+            </a:p>
+          </p:txBody>
+        </p:sp>
+        <p:sp>
+          <p:nvSpPr>
+            <p:cNvPr id="13" name="TextBox 13"/>
+            <p:cNvSpPr txBox="1"/>
+            <p:nvPr/>
+          </p:nvSpPr>
+          <p:spPr>
+            <a:xfrm>
+              <a:off x="1938147" y="4667250"/>
+              <a:ext cx="2525803" cy="191643"/>
+            </a:xfrm>
+            <a:prstGeom prst="rect">
+              <a:avLst/>
+            </a:prstGeom>
+            <a:noFill/>
+            <a:ln>
+              <a:noFill/>
+            </a:ln>
+          </p:spPr>
+          <p:txBody>
+            <a:bodyPr wrap="none" lIns="0" tIns="0" rIns="0" bIns="0" anchor="t" anchorCtr="0">
+              <a:spAutoFit/>
+            </a:bodyPr>
+            <a:lstStyle/>
+            <a:p>
+              <a:pPr algn="l"/>
+              <a:r>
+                <a:rPr lang="zh-CN" sz="980" dirty="0">
+                  <a:solidFill>
+                    <a:srgbClr val="3F3B35"/>
+                  </a:solidFill>
+                  <a:latin typeface="+mn-lt"/>
+                  <a:ea typeface="+mn-ea"/>
+                  <a:cs typeface="+mn-cs"/>
+                </a:rPr>
+                <a:t>Lens：看到就搜/译；Seeing AI：看图朗读</a:t>
+              </a:r>
+            </a:p>
+          </p:txBody>
+        </p:sp>
+        <p:sp>
+          <p:nvSpPr>
+            <p:cNvPr id="14" name="TextBox 14"/>
+            <p:cNvSpPr txBox="1"/>
+            <p:nvPr/>
+          </p:nvSpPr>
+          <p:spPr>
+            <a:xfrm>
+              <a:off x="1937766" y="2692400"/>
+              <a:ext cx="1000125" cy="205359"/>
+            </a:xfrm>
+            <a:prstGeom prst="rect">
+              <a:avLst/>
+            </a:prstGeom>
+            <a:noFill/>
+            <a:ln>
+              <a:noFill/>
+            </a:ln>
+          </p:spPr>
+          <p:txBody>
+            <a:bodyPr wrap="none" lIns="0" tIns="0" rIns="0" bIns="0" anchor="t" anchorCtr="0">
+              <a:spAutoFit/>
+            </a:bodyPr>
+            <a:lstStyle/>
+            <a:p>
+              <a:pPr algn="l"/>
+              <a:r>
+                <a:rPr lang="zh-CN" sz="1050" b="1" dirty="0">
+                  <a:solidFill>
+                    <a:srgbClr val="1F5A49"/>
+                  </a:solidFill>
+                  <a:latin typeface="+mn-lt"/>
+                  <a:ea typeface="+mn-ea"/>
+                  <a:cs typeface="+mn-cs"/>
+                </a:rPr>
+                <a:t>实时感知与对话</a:t>
+              </a:r>
+            </a:p>
+          </p:txBody>
+        </p:sp>
+        <p:sp>
+          <p:nvSpPr>
+            <p:cNvPr id="15" name="TextBox 15"/>
+            <p:cNvSpPr txBox="1"/>
+            <p:nvPr/>
+          </p:nvSpPr>
+          <p:spPr>
+            <a:xfrm>
+              <a:off x="1938147" y="2933700"/>
+              <a:ext cx="3132483" cy="191643"/>
+            </a:xfrm>
+            <a:prstGeom prst="rect">
+              <a:avLst/>
+            </a:prstGeom>
+            <a:noFill/>
+            <a:ln>
+              <a:noFill/>
+            </a:ln>
+          </p:spPr>
+          <p:txBody>
+            <a:bodyPr wrap="none" lIns="0" tIns="0" rIns="0" bIns="0" anchor="t" anchorCtr="0">
+              <a:spAutoFit/>
+            </a:bodyPr>
+            <a:lstStyle/>
+            <a:p>
+              <a:pPr algn="l"/>
+              <a:r>
+                <a:rPr lang="zh-CN" sz="980" dirty="0">
+                  <a:solidFill>
+                    <a:srgbClr val="3F3B35"/>
+                  </a:solidFill>
+                  <a:latin typeface="+mn-lt"/>
+                  <a:ea typeface="+mn-ea"/>
+                  <a:cs typeface="+mn-cs"/>
+                </a:rPr>
+                <a:t>Gemini Live：边看边聊；SeedRealtime：连续看听说</a:t>
+              </a:r>
+            </a:p>
+          </p:txBody>
+        </p:sp>
+        <p:sp>
+          <p:nvSpPr>
+            <p:cNvPr id="16" name="TextBox 16"/>
+            <p:cNvSpPr txBox="1"/>
+            <p:nvPr/>
+          </p:nvSpPr>
+          <p:spPr>
+            <a:xfrm>
+              <a:off x="1938147" y="3143250"/>
+              <a:ext cx="2148191" cy="191643"/>
+            </a:xfrm>
+            <a:prstGeom prst="rect">
+              <a:avLst/>
+            </a:prstGeom>
+            <a:noFill/>
+            <a:ln>
+              <a:noFill/>
+            </a:ln>
+          </p:spPr>
+          <p:txBody>
+            <a:bodyPr wrap="none" lIns="0" tIns="0" rIns="0" bIns="0" anchor="t" anchorCtr="0">
+              <a:spAutoFit/>
+            </a:bodyPr>
+            <a:lstStyle/>
+            <a:p>
+              <a:pPr algn="l"/>
+              <a:r>
+                <a:rPr lang="zh-CN" sz="980" dirty="0">
+                  <a:solidFill>
+                    <a:srgbClr val="3F3B35"/>
+                  </a:solidFill>
+                  <a:latin typeface="+mn-lt"/>
+                  <a:ea typeface="+mn-ea"/>
+                  <a:cs typeface="+mn-cs"/>
+                </a:rPr>
+                <a:t>Guided Vision：镜头不对就教你调整</a:t>
+              </a:r>
+            </a:p>
+          </p:txBody>
+        </p:sp>
+        <p:sp>
+          <p:nvSpPr>
+            <p:cNvPr id="17" name="TextBox 17"/>
+            <p:cNvSpPr txBox="1"/>
+            <p:nvPr/>
+          </p:nvSpPr>
+          <p:spPr>
+            <a:xfrm>
+              <a:off x="7233666" y="4425950"/>
+              <a:ext cx="1029455" cy="205359"/>
+            </a:xfrm>
+            <a:prstGeom prst="rect">
+              <a:avLst/>
+            </a:prstGeom>
+            <a:noFill/>
+            <a:ln>
+              <a:noFill/>
+            </a:ln>
+          </p:spPr>
+          <p:txBody>
+            <a:bodyPr wrap="none" lIns="0" tIns="0" rIns="0" bIns="0" anchor="t" anchorCtr="0">
+              <a:spAutoFit/>
+            </a:bodyPr>
+            <a:lstStyle/>
+            <a:p>
+              <a:pPr algn="l"/>
+              <a:r>
+                <a:rPr lang="zh-CN" sz="1050" b="1" dirty="0">
+                  <a:solidFill>
+                    <a:srgbClr val="C14E2C"/>
+                  </a:solidFill>
+                  <a:latin typeface="+mn-lt"/>
+                  <a:ea typeface="+mn-ea"/>
+                  <a:cs typeface="+mn-cs"/>
+                </a:rPr>
+                <a:t>工作 / 设备执行</a:t>
+              </a:r>
+            </a:p>
+          </p:txBody>
+        </p:sp>
+        <p:sp>
+          <p:nvSpPr>
+            <p:cNvPr id="18" name="TextBox 18"/>
+            <p:cNvSpPr txBox="1"/>
+            <p:nvPr/>
+          </p:nvSpPr>
+          <p:spPr>
+            <a:xfrm>
+              <a:off x="7234047" y="4667250"/>
+              <a:ext cx="3031759" cy="191643"/>
+            </a:xfrm>
+            <a:prstGeom prst="rect">
+              <a:avLst/>
+            </a:prstGeom>
+            <a:noFill/>
+            <a:ln>
+              <a:noFill/>
+            </a:ln>
+          </p:spPr>
+          <p:txBody>
+            <a:bodyPr wrap="none" lIns="0" tIns="0" rIns="0" bIns="0" anchor="t" anchorCtr="0">
+              <a:spAutoFit/>
+            </a:bodyPr>
+            <a:lstStyle/>
+            <a:p>
+              <a:pPr algn="l"/>
+              <a:r>
+                <a:rPr lang="zh-CN" sz="980" dirty="0">
+                  <a:solidFill>
+                    <a:srgbClr val="3F3B35"/>
+                  </a:solidFill>
+                  <a:latin typeface="+mn-lt"/>
+                  <a:ea typeface="+mn-ea"/>
+                  <a:cs typeface="+mn-cs"/>
+                </a:rPr>
+                <a:t>Copilot：看工作画面并高亮；Bixby：调用系统功能</a:t>
+              </a:r>
+            </a:p>
+          </p:txBody>
+        </p:sp>
+        <p:sp>
+          <p:nvSpPr>
+            <p:cNvPr id="19" name="TextBox 19"/>
+            <p:cNvSpPr txBox="1"/>
+            <p:nvPr/>
+          </p:nvSpPr>
+          <p:spPr>
+            <a:xfrm>
+              <a:off x="7233666" y="2673350"/>
+              <a:ext cx="892522" cy="205359"/>
+            </a:xfrm>
+            <a:prstGeom prst="rect">
+              <a:avLst/>
+            </a:prstGeom>
+            <a:noFill/>
+            <a:ln>
+              <a:noFill/>
+            </a:ln>
+          </p:spPr>
+          <p:txBody>
+            <a:bodyPr wrap="none" lIns="0" tIns="0" rIns="0" bIns="0" anchor="t" anchorCtr="0">
+              <a:spAutoFit/>
+            </a:bodyPr>
+            <a:lstStyle/>
+            <a:p>
+              <a:pPr algn="l"/>
+              <a:r>
+                <a:rPr lang="zh-CN" sz="1050" b="1" dirty="0">
+                  <a:solidFill>
+                    <a:srgbClr val="C14E2C"/>
+                  </a:solidFill>
+                  <a:latin typeface="+mn-lt"/>
+                  <a:ea typeface="+mn-ea"/>
+                  <a:cs typeface="+mn-cs"/>
+                </a:rPr>
+                <a:t>全情境 Agent</a:t>
+              </a:r>
+            </a:p>
+          </p:txBody>
+        </p:sp>
+        <p:sp>
+          <p:nvSpPr>
+            <p:cNvPr id="20" name="TextBox 20"/>
+            <p:cNvSpPr txBox="1"/>
+            <p:nvPr/>
+          </p:nvSpPr>
+          <p:spPr>
+            <a:xfrm>
+              <a:off x="7234047" y="2914650"/>
+              <a:ext cx="2573782" cy="191643"/>
+            </a:xfrm>
+            <a:prstGeom prst="rect">
+              <a:avLst/>
+            </a:prstGeom>
+            <a:noFill/>
+            <a:ln>
+              <a:noFill/>
+            </a:ln>
+          </p:spPr>
+          <p:txBody>
+            <a:bodyPr wrap="none" lIns="0" tIns="0" rIns="0" bIns="0" anchor="t" anchorCtr="0">
+              <a:spAutoFit/>
+            </a:bodyPr>
+            <a:lstStyle/>
+            <a:p>
+              <a:pPr algn="l"/>
+              <a:r>
+                <a:rPr lang="zh-CN" sz="980" dirty="0">
+                  <a:solidFill>
+                    <a:srgbClr val="3F3B35"/>
+                  </a:solidFill>
+                  <a:latin typeface="+mn-lt"/>
+                  <a:ea typeface="+mn-ea"/>
+                  <a:cs typeface="+mn-cs"/>
+                </a:rPr>
+                <a:t>Muse：记住目标、后台跑任务、付款前确认</a:t>
+              </a:r>
+            </a:p>
+          </p:txBody>
+        </p:sp>
+        <p:sp>
+          <p:nvSpPr>
+            <p:cNvPr id="21" name="TextBox 21"/>
+            <p:cNvSpPr txBox="1"/>
+            <p:nvPr/>
+          </p:nvSpPr>
+          <p:spPr>
+            <a:xfrm>
+              <a:off x="7234047" y="3124200"/>
+              <a:ext cx="2321999" cy="191643"/>
+            </a:xfrm>
+            <a:prstGeom prst="rect">
+              <a:avLst/>
+            </a:prstGeom>
+            <a:noFill/>
+            <a:ln>
+              <a:noFill/>
+            </a:ln>
+          </p:spPr>
+          <p:txBody>
+            <a:bodyPr wrap="none" lIns="0" tIns="0" rIns="0" bIns="0" anchor="t" anchorCtr="0">
+              <a:spAutoFit/>
+            </a:bodyPr>
+            <a:lstStyle/>
+            <a:p>
+              <a:pPr algn="l"/>
+              <a:r>
+                <a:rPr lang="zh-CN" sz="980" dirty="0">
+                  <a:solidFill>
+                    <a:srgbClr val="3F3B35"/>
+                  </a:solidFill>
+                  <a:latin typeface="+mn-lt"/>
+                  <a:ea typeface="+mn-ea"/>
+                  <a:cs typeface="+mn-cs"/>
+                </a:rPr>
+                <a:t>Be My Eyes：AI 协助，必要时人工接管</a:t>
+              </a:r>
+            </a:p>
+          </p:txBody>
+        </p:sp>
+        <p:sp>
+          <p:nvSpPr>
+            <p:cNvPr id="22" name="Rectangle 22"/>
+            <p:cNvSpPr/>
+            <p:nvPr/>
+          </p:nvSpPr>
+          <p:spPr>
+            <a:xfrm>
+              <a:off x="1866900" y="1866900"/>
+              <a:ext cx="2381250" cy="514350"/>
+            </a:xfrm>
+            <a:prstGeom prst="rect">
+              <a:avLst/>
+            </a:prstGeom>
+            <a:solidFill>
+              <a:srgbClr val="1F5A49">
+                <a:alpha val="8000"/>
+              </a:srgbClr>
+            </a:solidFill>
+            <a:ln>
+              <a:noFill/>
+            </a:ln>
+          </p:spPr>
+        </p:sp>
+        <p:sp>
+          <p:nvSpPr>
+            <p:cNvPr id="23" name="TextBox 23"/>
+            <p:cNvSpPr txBox="1"/>
+            <p:nvPr/>
+          </p:nvSpPr>
+          <p:spPr>
+            <a:xfrm>
+              <a:off x="1976247" y="1962150"/>
+              <a:ext cx="933399" cy="191643"/>
+            </a:xfrm>
+            <a:prstGeom prst="rect">
+              <a:avLst/>
+            </a:prstGeom>
+            <a:noFill/>
+            <a:ln>
+              <a:noFill/>
+            </a:ln>
+          </p:spPr>
+          <p:txBody>
+            <a:bodyPr wrap="none" lIns="0" tIns="0" rIns="0" bIns="0" anchor="t" anchorCtr="0">
+              <a:spAutoFit/>
+            </a:bodyPr>
+            <a:lstStyle/>
+            <a:p>
+              <a:pPr algn="l"/>
+              <a:r>
+                <a:rPr lang="zh-CN" sz="980" b="1" dirty="0">
+                  <a:solidFill>
+                    <a:srgbClr val="1F5A49"/>
+                  </a:solidFill>
+                  <a:latin typeface="+mn-lt"/>
+                  <a:ea typeface="+mn-ea"/>
+                  <a:cs typeface="+mn-cs"/>
+                </a:rPr>
+                <a:t>多模态系统助手</a:t>
+              </a:r>
+            </a:p>
+          </p:txBody>
+        </p:sp>
+        <p:sp>
+          <p:nvSpPr>
+            <p:cNvPr id="24" name="TextBox 24"/>
+            <p:cNvSpPr txBox="1"/>
+            <p:nvPr/>
+          </p:nvSpPr>
+          <p:spPr>
+            <a:xfrm>
+              <a:off x="1976438" y="2171700"/>
+              <a:ext cx="1948539" cy="176212"/>
+            </a:xfrm>
+            <a:prstGeom prst="rect">
+              <a:avLst/>
+            </a:prstGeom>
+            <a:noFill/>
+            <a:ln>
+              <a:noFill/>
+            </a:ln>
+          </p:spPr>
+          <p:txBody>
+            <a:bodyPr wrap="none" lIns="0" tIns="0" rIns="0" bIns="0" anchor="t" anchorCtr="0">
+              <a:spAutoFit/>
+            </a:bodyPr>
+            <a:lstStyle/>
+            <a:p>
+              <a:pPr algn="l"/>
+              <a:r>
+                <a:rPr lang="zh-CN" sz="900" dirty="0">
+                  <a:solidFill>
+                    <a:srgbClr val="3F3B35"/>
+                  </a:solidFill>
+                  <a:latin typeface="+mn-lt"/>
+                  <a:ea typeface="+mn-ea"/>
+                  <a:cs typeface="+mn-cs"/>
+                </a:rPr>
+                <a:t>小艺 / 超级小爱 / ChatGPT / Apple</a:t>
+              </a:r>
+            </a:p>
+          </p:txBody>
+        </p:sp>
+        <p:sp>
+          <p:nvSpPr>
+            <p:cNvPr id="25" name="Rectangle 25"/>
+            <p:cNvSpPr/>
+            <p:nvPr/>
+          </p:nvSpPr>
+          <p:spPr>
+            <a:xfrm>
+              <a:off x="6515100" y="1866900"/>
+              <a:ext cx="2381250" cy="514350"/>
+            </a:xfrm>
+            <a:prstGeom prst="rect">
+              <a:avLst/>
+            </a:prstGeom>
+            <a:solidFill>
+              <a:srgbClr val="C14E2C">
+                <a:alpha val="8000"/>
+              </a:srgbClr>
+            </a:solidFill>
+            <a:ln>
+              <a:noFill/>
+            </a:ln>
+          </p:spPr>
+        </p:sp>
+        <p:sp>
+          <p:nvSpPr>
+            <p:cNvPr id="26" name="TextBox 26"/>
+            <p:cNvSpPr txBox="1"/>
+            <p:nvPr/>
+          </p:nvSpPr>
+          <p:spPr>
+            <a:xfrm>
+              <a:off x="6624447" y="1962150"/>
+              <a:ext cx="933399" cy="191643"/>
+            </a:xfrm>
+            <a:prstGeom prst="rect">
+              <a:avLst/>
+            </a:prstGeom>
+            <a:noFill/>
+            <a:ln>
+              <a:noFill/>
+            </a:ln>
+          </p:spPr>
+          <p:txBody>
+            <a:bodyPr wrap="none" lIns="0" tIns="0" rIns="0" bIns="0" anchor="t" anchorCtr="0">
+              <a:spAutoFit/>
+            </a:bodyPr>
+            <a:lstStyle/>
+            <a:p>
+              <a:pPr algn="l"/>
+              <a:r>
+                <a:rPr lang="zh-CN" sz="980" b="1" dirty="0">
+                  <a:solidFill>
+                    <a:srgbClr val="C14E2C"/>
+                  </a:solidFill>
+                  <a:latin typeface="+mn-lt"/>
+                  <a:ea typeface="+mn-ea"/>
+                  <a:cs typeface="+mn-cs"/>
+                </a:rPr>
+                <a:t>可执行个人代理</a:t>
+              </a:r>
+            </a:p>
+          </p:txBody>
+        </p:sp>
+        <p:sp>
+          <p:nvSpPr>
+            <p:cNvPr id="27" name="TextBox 27"/>
+            <p:cNvSpPr txBox="1"/>
+            <p:nvPr/>
+          </p:nvSpPr>
+          <p:spPr>
+            <a:xfrm>
+              <a:off x="6624638" y="2171700"/>
+              <a:ext cx="1301308" cy="176212"/>
+            </a:xfrm>
+            <a:prstGeom prst="rect">
+              <a:avLst/>
+            </a:prstGeom>
+            <a:noFill/>
+            <a:ln>
+              <a:noFill/>
+            </a:ln>
+          </p:spPr>
+          <p:txBody>
+            <a:bodyPr wrap="none" lIns="0" tIns="0" rIns="0" bIns="0" anchor="t" anchorCtr="0">
+              <a:spAutoFit/>
+            </a:bodyPr>
+            <a:lstStyle/>
+            <a:p>
+              <a:pPr algn="l"/>
+              <a:r>
+                <a:rPr lang="en-US" sz="900" dirty="0">
+                  <a:solidFill>
+                    <a:srgbClr val="3F3B35"/>
+                  </a:solidFill>
+                  <a:latin typeface="+mn-lt"/>
+                  <a:ea typeface="+mn-ea"/>
+                  <a:cs typeface="+mn-cs"/>
+                </a:rPr>
+                <a:t>Muse / Copilot / Bixby</a:t>
+              </a:r>
+            </a:p>
+          </p:txBody>
+        </p:sp>
+        <p:sp>
+          <p:nvSpPr>
+            <p:cNvPr id="28" name="Rectangle 28"/>
+            <p:cNvSpPr/>
+            <p:nvPr/>
+          </p:nvSpPr>
+          <p:spPr>
+            <a:xfrm>
+              <a:off x="4686300" y="4362450"/>
+              <a:ext cx="1676400" cy="400050"/>
+            </a:xfrm>
+            <a:prstGeom prst="rect">
+              <a:avLst/>
+            </a:prstGeom>
+            <a:solidFill>
+              <a:srgbClr val="1F5A49">
+                <a:alpha val="6000"/>
+              </a:srgbClr>
+            </a:solidFill>
+            <a:ln>
+              <a:noFill/>
+            </a:ln>
+          </p:spPr>
+        </p:sp>
+        <p:sp>
+          <p:nvSpPr>
+            <p:cNvPr id="29" name="TextBox 29"/>
+            <p:cNvSpPr txBox="1"/>
+            <p:nvPr/>
+          </p:nvSpPr>
+          <p:spPr>
+            <a:xfrm>
+              <a:off x="4795838" y="4495800"/>
+              <a:ext cx="836920" cy="176212"/>
+            </a:xfrm>
+            <a:prstGeom prst="rect">
+              <a:avLst/>
+            </a:prstGeom>
+            <a:noFill/>
+            <a:ln>
+              <a:noFill/>
+            </a:ln>
+          </p:spPr>
+          <p:txBody>
+            <a:bodyPr wrap="none" lIns="0" tIns="0" rIns="0" bIns="0" anchor="t" anchorCtr="0">
+              <a:spAutoFit/>
+            </a:bodyPr>
+            <a:lstStyle/>
+            <a:p>
+              <a:pPr algn="l"/>
+              <a:r>
+                <a:rPr lang="zh-CN" sz="900" b="1" dirty="0">
+                  <a:solidFill>
+                    <a:srgbClr val="1F5A49"/>
+                  </a:solidFill>
+                  <a:latin typeface="+mn-lt"/>
+                  <a:ea typeface="+mn-ea"/>
+                  <a:cs typeface="+mn-cs"/>
+                </a:rPr>
+                <a:t>视觉交易 / API</a:t>
+              </a:r>
+            </a:p>
+          </p:txBody>
+        </p:sp>
+        <p:sp>
+          <p:nvSpPr>
+            <p:cNvPr id="30" name="TextBox 30"/>
+            <p:cNvSpPr txBox="1"/>
+            <p:nvPr/>
+          </p:nvSpPr>
+          <p:spPr>
+            <a:xfrm>
+              <a:off x="5900738" y="4508500"/>
+              <a:ext cx="1077502" cy="161925"/>
+            </a:xfrm>
+            <a:prstGeom prst="rect">
+              <a:avLst/>
+            </a:prstGeom>
+            <a:noFill/>
+            <a:ln>
+              <a:noFill/>
+            </a:ln>
+          </p:spPr>
+          <p:txBody>
+            <a:bodyPr wrap="none" lIns="0" tIns="0" rIns="0" bIns="0" anchor="t" anchorCtr="0">
+              <a:spAutoFit/>
+            </a:bodyPr>
+            <a:lstStyle/>
+            <a:p>
+              <a:pPr algn="l"/>
+              <a:r>
+                <a:rPr lang="zh-CN" sz="820" dirty="0">
+                  <a:solidFill>
+                    <a:srgbClr val="6B6760"/>
+                  </a:solidFill>
+                  <a:latin typeface="+mn-lt"/>
+                  <a:ea typeface="+mn-ea"/>
+                  <a:cs typeface="+mn-cs"/>
+                </a:rPr>
+                <a:t>拍立淘 · TwelveLabs</a:t>
+              </a:r>
+            </a:p>
+          </p:txBody>
+        </p:sp>
+        <p:sp>
+          <p:nvSpPr>
+            <p:cNvPr id="31" name="Rectangle 31"/>
+            <p:cNvSpPr/>
+            <p:nvPr/>
+          </p:nvSpPr>
+          <p:spPr>
+            <a:xfrm>
+              <a:off x="4686300" y="3695700"/>
+              <a:ext cx="1676400" cy="400050"/>
+            </a:xfrm>
+            <a:prstGeom prst="rect">
+              <a:avLst/>
+            </a:prstGeom>
+            <a:solidFill>
+              <a:srgbClr val="A33B27">
+                <a:alpha val="6000"/>
+              </a:srgbClr>
+            </a:solidFill>
+            <a:ln>
+              <a:noFill/>
+            </a:ln>
+          </p:spPr>
+        </p:sp>
+        <p:sp>
+          <p:nvSpPr>
+            <p:cNvPr id="32" name="TextBox 32"/>
+            <p:cNvSpPr txBox="1"/>
+            <p:nvPr/>
+          </p:nvSpPr>
+          <p:spPr>
+            <a:xfrm>
+              <a:off x="4795838" y="3829050"/>
+              <a:ext cx="736473" cy="176212"/>
+            </a:xfrm>
+            <a:prstGeom prst="rect">
+              <a:avLst/>
+            </a:prstGeom>
+            <a:noFill/>
+            <a:ln>
+              <a:noFill/>
+            </a:ln>
+          </p:spPr>
+          <p:txBody>
+            <a:bodyPr wrap="none" lIns="0" tIns="0" rIns="0" bIns="0" anchor="t" anchorCtr="0">
+              <a:spAutoFit/>
+            </a:bodyPr>
+            <a:lstStyle/>
+            <a:p>
+              <a:pPr algn="l"/>
+              <a:r>
+                <a:rPr lang="zh-CN" sz="900" b="1" dirty="0">
+                  <a:solidFill>
+                    <a:srgbClr val="A33B27"/>
+                  </a:solidFill>
+                  <a:latin typeface="+mn-lt"/>
+                  <a:ea typeface="+mn-ea"/>
+                  <a:cs typeface="+mn-cs"/>
+                </a:rPr>
+                <a:t>无障碍可视化</a:t>
+              </a:r>
+            </a:p>
+          </p:txBody>
+        </p:sp>
+        <p:sp>
+          <p:nvSpPr>
+            <p:cNvPr id="33" name="TextBox 33"/>
+            <p:cNvSpPr txBox="1"/>
+            <p:nvPr/>
+          </p:nvSpPr>
+          <p:spPr>
+            <a:xfrm>
+              <a:off x="5614988" y="3841750"/>
+              <a:ext cx="794095" cy="161925"/>
+            </a:xfrm>
+            <a:prstGeom prst="rect">
+              <a:avLst/>
+            </a:prstGeom>
+            <a:noFill/>
+            <a:ln>
+              <a:noFill/>
+            </a:ln>
+          </p:spPr>
+          <p:txBody>
+            <a:bodyPr wrap="none" lIns="0" tIns="0" rIns="0" bIns="0" anchor="t" anchorCtr="0">
+              <a:spAutoFit/>
+            </a:bodyPr>
+            <a:lstStyle/>
+            <a:p>
+              <a:pPr algn="l"/>
+              <a:r>
+                <a:rPr lang="en-US" sz="820" dirty="0">
+                  <a:solidFill>
+                    <a:srgbClr val="6B6760"/>
+                  </a:solidFill>
+                  <a:latin typeface="+mn-lt"/>
+                  <a:ea typeface="+mn-ea"/>
+                  <a:cs typeface="+mn-cs"/>
+                </a:rPr>
+                <a:t>vivo · Be My AI</a:t>
+              </a:r>
+            </a:p>
+          </p:txBody>
+        </p:sp>
+        <p:sp>
+          <p:nvSpPr>
+            <p:cNvPr id="34" name="Rectangle 34"/>
+            <p:cNvSpPr/>
+            <p:nvPr/>
+          </p:nvSpPr>
+          <p:spPr>
+            <a:xfrm>
+              <a:off x="9829800" y="1790700"/>
+              <a:ext cx="1676400" cy="1485900"/>
+            </a:xfrm>
+            <a:prstGeom prst="rect">
+              <a:avLst/>
+            </a:prstGeom>
+            <a:solidFill>
+              <a:srgbClr val="F4F0E7"/>
+            </a:solidFill>
+            <a:ln w="19050">
+              <a:solidFill>
+                <a:srgbClr val="C14E2C"/>
+              </a:solidFill>
+            </a:ln>
+          </p:spPr>
+        </p:sp>
+        <p:sp>
+          <p:nvSpPr>
+            <p:cNvPr id="35" name="TextBox 35"/>
+            <p:cNvSpPr txBox="1"/>
+            <p:nvPr/>
+          </p:nvSpPr>
+          <p:spPr>
+            <a:xfrm>
+              <a:off x="9977438" y="1943100"/>
+              <a:ext cx="892397" cy="176212"/>
+            </a:xfrm>
+            <a:prstGeom prst="rect">
+              <a:avLst/>
+            </a:prstGeom>
+            <a:noFill/>
+            <a:ln>
+              <a:noFill/>
+            </a:ln>
+          </p:spPr>
+          <p:txBody>
+            <a:bodyPr wrap="none" lIns="0" tIns="0" rIns="0" bIns="0" anchor="t" anchorCtr="0">
+              <a:spAutoFit/>
+            </a:bodyPr>
+            <a:lstStyle/>
+            <a:p>
+              <a:pPr algn="l"/>
+              <a:r>
+                <a:rPr lang="zh-CN" sz="900" b="1" spc="75" dirty="0">
+                  <a:solidFill>
+                    <a:srgbClr val="C14E2C"/>
+                  </a:solidFill>
+                  <a:latin typeface="+mn-lt"/>
+                  <a:ea typeface="+mn-ea"/>
+                  <a:cs typeface="+mn-cs"/>
+                </a:rPr>
+                <a:t>2026 最新边界</a:t>
+              </a:r>
+            </a:p>
+          </p:txBody>
+        </p:sp>
+        <p:sp>
+          <p:nvSpPr>
+            <p:cNvPr id="36" name="TextBox 36"/>
+            <p:cNvSpPr txBox="1"/>
+            <p:nvPr/>
+          </p:nvSpPr>
+          <p:spPr>
+            <a:xfrm>
+              <a:off x="9977247" y="2190750"/>
+              <a:ext cx="347068" cy="191643"/>
+            </a:xfrm>
+            <a:prstGeom prst="rect">
+              <a:avLst/>
+            </a:prstGeom>
+            <a:noFill/>
+            <a:ln>
+              <a:noFill/>
+            </a:ln>
+          </p:spPr>
+          <p:txBody>
+            <a:bodyPr wrap="none" lIns="0" tIns="0" rIns="0" bIns="0" anchor="t" anchorCtr="0">
+              <a:spAutoFit/>
+            </a:bodyPr>
+            <a:lstStyle/>
+            <a:p>
+              <a:pPr algn="l"/>
+              <a:r>
+                <a:rPr lang="en-US" sz="980" b="1" dirty="0">
+                  <a:solidFill>
+                    <a:srgbClr val="1D1C19"/>
+                  </a:solidFill>
+                  <a:latin typeface="+mn-lt"/>
+                  <a:ea typeface="+mn-ea"/>
+                  <a:cs typeface="+mn-cs"/>
+                </a:rPr>
+                <a:t>Muse</a:t>
+              </a:r>
+            </a:p>
+          </p:txBody>
+        </p:sp>
+        <p:sp>
+          <p:nvSpPr>
+            <p:cNvPr id="37" name="TextBox 37"/>
+            <p:cNvSpPr txBox="1"/>
+            <p:nvPr/>
+          </p:nvSpPr>
+          <p:spPr>
+            <a:xfrm>
+              <a:off x="9977438" y="2413000"/>
+              <a:ext cx="909190" cy="161925"/>
+            </a:xfrm>
+            <a:prstGeom prst="rect">
+              <a:avLst/>
+            </a:prstGeom>
+            <a:noFill/>
+            <a:ln>
+              <a:noFill/>
+            </a:ln>
+          </p:spPr>
+          <p:txBody>
+            <a:bodyPr wrap="none" lIns="0" tIns="0" rIns="0" bIns="0" anchor="t" anchorCtr="0">
+              <a:spAutoFit/>
+            </a:bodyPr>
+            <a:lstStyle/>
+            <a:p>
+              <a:pPr algn="l"/>
+              <a:r>
+                <a:rPr lang="zh-CN" sz="820" dirty="0">
+                  <a:solidFill>
+                    <a:srgbClr val="6B6760"/>
+                  </a:solidFill>
+                  <a:latin typeface="+mn-lt"/>
+                  <a:ea typeface="+mn-ea"/>
+                  <a:cs typeface="+mn-cs"/>
+                </a:rPr>
+                <a:t>全情境 / 后台执行</a:t>
+              </a:r>
+            </a:p>
+          </p:txBody>
+        </p:sp>
+        <p:sp>
+          <p:nvSpPr>
+            <p:cNvPr id="38" name="TextBox 38"/>
+            <p:cNvSpPr txBox="1"/>
+            <p:nvPr/>
+          </p:nvSpPr>
+          <p:spPr>
+            <a:xfrm>
+              <a:off x="9977247" y="2609850"/>
+              <a:ext cx="890840" cy="191643"/>
+            </a:xfrm>
+            <a:prstGeom prst="rect">
+              <a:avLst/>
+            </a:prstGeom>
+            <a:noFill/>
+            <a:ln>
+              <a:noFill/>
+            </a:ln>
+          </p:spPr>
+          <p:txBody>
+            <a:bodyPr wrap="none" lIns="0" tIns="0" rIns="0" bIns="0" anchor="t" anchorCtr="0">
+              <a:spAutoFit/>
+            </a:bodyPr>
+            <a:lstStyle/>
+            <a:p>
+              <a:pPr algn="l"/>
+              <a:r>
+                <a:rPr lang="en-US" sz="980" b="1" dirty="0">
+                  <a:solidFill>
+                    <a:srgbClr val="1D1C19"/>
+                  </a:solidFill>
+                  <a:latin typeface="+mn-lt"/>
+                  <a:ea typeface="+mn-ea"/>
+                  <a:cs typeface="+mn-cs"/>
+                </a:rPr>
+                <a:t>SeedRealtime</a:t>
+              </a:r>
+            </a:p>
+          </p:txBody>
+        </p:sp>
+        <p:sp>
+          <p:nvSpPr>
+            <p:cNvPr id="39" name="TextBox 39"/>
+            <p:cNvSpPr txBox="1"/>
+            <p:nvPr/>
+          </p:nvSpPr>
+          <p:spPr>
+            <a:xfrm>
+              <a:off x="9977438" y="2832100"/>
+              <a:ext cx="892632" cy="161925"/>
+            </a:xfrm>
+            <a:prstGeom prst="rect">
+              <a:avLst/>
+            </a:prstGeom>
+            <a:noFill/>
+            <a:ln>
+              <a:noFill/>
+            </a:ln>
+          </p:spPr>
+          <p:txBody>
+            <a:bodyPr wrap="none" lIns="0" tIns="0" rIns="0" bIns="0" anchor="t" anchorCtr="0">
+              <a:spAutoFit/>
+            </a:bodyPr>
+            <a:lstStyle/>
+            <a:p>
+              <a:pPr algn="l"/>
+              <a:r>
+                <a:rPr lang="zh-CN" sz="820" dirty="0">
+                  <a:solidFill>
+                    <a:srgbClr val="6B6760"/>
+                  </a:solidFill>
+                  <a:latin typeface="+mn-lt"/>
+                  <a:ea typeface="+mn-ea"/>
+                  <a:cs typeface="+mn-cs"/>
+                </a:rPr>
+                <a:t>连续音视频全双工</a:t>
+              </a:r>
+            </a:p>
+          </p:txBody>
+        </p:sp>
+        <p:sp>
+          <p:nvSpPr>
+            <p:cNvPr id="40" name="TextBox 40"/>
+            <p:cNvSpPr txBox="1"/>
+            <p:nvPr/>
+          </p:nvSpPr>
+          <p:spPr>
+            <a:xfrm>
+              <a:off x="9977247" y="3028950"/>
+              <a:ext cx="869865" cy="191643"/>
+            </a:xfrm>
+            <a:prstGeom prst="rect">
+              <a:avLst/>
+            </a:prstGeom>
+            <a:noFill/>
+            <a:ln>
+              <a:noFill/>
+            </a:ln>
+          </p:spPr>
+          <p:txBody>
+            <a:bodyPr wrap="none" lIns="0" tIns="0" rIns="0" bIns="0" anchor="t" anchorCtr="0">
+              <a:spAutoFit/>
+            </a:bodyPr>
+            <a:lstStyle/>
+            <a:p>
+              <a:pPr algn="l"/>
+              <a:r>
+                <a:rPr lang="en-US" sz="980" b="1" dirty="0">
+                  <a:solidFill>
+                    <a:srgbClr val="1D1C19"/>
+                  </a:solidFill>
+                  <a:latin typeface="+mn-lt"/>
+                  <a:ea typeface="+mn-ea"/>
+                  <a:cs typeface="+mn-cs"/>
+                </a:rPr>
+                <a:t>Guided Vision</a:t>
+              </a:r>
+            </a:p>
+          </p:txBody>
+        </p:sp>
+        <p:sp>
+          <p:nvSpPr>
+            <p:cNvPr id="41" name="TextBox 41"/>
+            <p:cNvSpPr txBox="1"/>
+            <p:nvPr/>
+          </p:nvSpPr>
+          <p:spPr>
+            <a:xfrm>
+              <a:off x="9977438" y="3251200"/>
+              <a:ext cx="671855" cy="161925"/>
+            </a:xfrm>
+            <a:prstGeom prst="rect">
+              <a:avLst/>
+            </a:prstGeom>
+            <a:noFill/>
+            <a:ln>
+              <a:noFill/>
+            </a:ln>
+          </p:spPr>
+          <p:txBody>
+            <a:bodyPr wrap="none" lIns="0" tIns="0" rIns="0" bIns="0" anchor="t" anchorCtr="0">
+              <a:spAutoFit/>
+            </a:bodyPr>
+            <a:lstStyle/>
+            <a:p>
+              <a:pPr algn="l"/>
+              <a:r>
+                <a:rPr lang="zh-CN" sz="820" dirty="0">
+                  <a:solidFill>
+                    <a:srgbClr val="6B6760"/>
+                  </a:solidFill>
+                  <a:latin typeface="+mn-lt"/>
+                  <a:ea typeface="+mn-ea"/>
+                  <a:cs typeface="+mn-cs"/>
+                </a:rPr>
+                <a:t>主动纠错镜头</a:t>
+              </a:r>
+            </a:p>
+          </p:txBody>
+        </p:sp>
+        <p:sp>
+          <p:nvSpPr>
+            <p:cNvPr id="42" name="Line 42"/>
+            <p:cNvSpPr/>
+            <p:nvPr/>
+          </p:nvSpPr>
+          <p:spPr>
+            <a:xfrm>
+              <a:off x="571500" y="5562600"/>
+              <a:ext cx="11049000" cy="9525"/>
+            </a:xfrm>
+            <a:custGeom>
+              <a:avLst/>
+              <a:gdLst/>
+              <a:ahLst/>
+              <a:cxnLst/>
+              <a:rect l="l" t="t" r="r" b="b"/>
+              <a:pathLst>
+                <a:path w="11049000" h="9525">
+                  <a:moveTo>
+                    <a:pt x="0" y="0"/>
+                  </a:moveTo>
+                  <a:lnTo>
+                    <a:pt x="11049000" y="0"/>
+                  </a:lnTo>
+                </a:path>
+              </a:pathLst>
+            </a:custGeom>
+            <a:noFill/>
+            <a:ln w="9525">
+              <a:solidFill>
+                <a:srgbClr val="C9C1B4"/>
+              </a:solidFill>
+            </a:ln>
+          </p:spPr>
+        </p:sp>
+        <p:sp>
+          <p:nvSpPr>
+            <p:cNvPr id="43" name="TextBox 43"/>
+            <p:cNvSpPr txBox="1"/>
+            <p:nvPr/>
+          </p:nvSpPr>
+          <p:spPr>
+            <a:xfrm>
+              <a:off x="566547" y="5715000"/>
+              <a:ext cx="801472" cy="191643"/>
+            </a:xfrm>
+            <a:prstGeom prst="rect">
+              <a:avLst/>
+            </a:prstGeom>
+            <a:noFill/>
+            <a:ln>
+              <a:noFill/>
+            </a:ln>
+          </p:spPr>
+          <p:txBody>
+            <a:bodyPr wrap="none" lIns="0" tIns="0" rIns="0" bIns="0" anchor="t" anchorCtr="0">
+              <a:spAutoFit/>
+            </a:bodyPr>
+            <a:lstStyle/>
+            <a:p>
+              <a:pPr algn="l"/>
+              <a:r>
+                <a:rPr lang="zh-CN" sz="980" b="1" dirty="0">
+                  <a:solidFill>
+                    <a:srgbClr val="6B6760"/>
+                  </a:solidFill>
+                  <a:latin typeface="+mn-lt"/>
+                  <a:ea typeface="+mn-ea"/>
+                  <a:cs typeface="+mn-cs"/>
+                </a:rPr>
+                <a:t>六个判断维度</a:t>
+              </a:r>
+            </a:p>
+          </p:txBody>
+        </p:sp>
+        <p:sp>
+          <p:nvSpPr>
+            <p:cNvPr id="44" name="TextBox 44"/>
+            <p:cNvSpPr txBox="1"/>
+            <p:nvPr/>
+          </p:nvSpPr>
+          <p:spPr>
+            <a:xfrm>
+              <a:off x="1804797" y="5715000"/>
+              <a:ext cx="4535023" cy="191643"/>
+            </a:xfrm>
+            <a:prstGeom prst="rect">
+              <a:avLst/>
+            </a:prstGeom>
+            <a:noFill/>
+            <a:ln>
+              <a:noFill/>
+            </a:ln>
+          </p:spPr>
+          <p:txBody>
+            <a:bodyPr wrap="none" lIns="0" tIns="0" rIns="0" bIns="0" anchor="t" anchorCtr="0">
+              <a:spAutoFit/>
+            </a:bodyPr>
+            <a:lstStyle/>
+            <a:p>
+              <a:pPr algn="l"/>
+              <a:r>
+                <a:rPr lang="zh-CN" sz="980" dirty="0">
+                  <a:solidFill>
+                    <a:srgbClr val="3F3B35"/>
+                  </a:solidFill>
+                  <a:latin typeface="+mn-lt"/>
+                  <a:ea typeface="+mn-ea"/>
+                  <a:cs typeface="+mn-cs"/>
+                </a:rPr>
+                <a:t>连续上下文 · 行动深度 · 终端绑定 · 视觉/空间 · 生态权限 · 隐私与信任成本</a:t>
+              </a:r>
+            </a:p>
+          </p:txBody>
+        </p:sp>
+      </p:grpSp>
+      <p:grpSp>
+        <p:nvGrpSpPr>
+          <p:cNvPr id="48" name="page-footer"/>
+          <p:cNvGrpSpPr/>
+          <p:nvPr/>
+        </p:nvGrpSpPr>
+        <p:grpSpPr>
+          <a:xfrm>
+            <a:off x="566738" y="6286500"/>
+            <a:ext cx="11058525" cy="176212"/>
+            <a:chOff x="566738" y="6286500"/>
+            <a:chExt cx="11058525" cy="176212"/>
+          </a:xfrm>
+        </p:grpSpPr>
+        <p:sp>
+          <p:nvSpPr>
+            <p:cNvPr id="46" name="TextBox 46"/>
+            <p:cNvSpPr txBox="1"/>
+            <p:nvPr/>
+          </p:nvSpPr>
+          <p:spPr>
+            <a:xfrm>
+              <a:off x="566738" y="6286500"/>
+              <a:ext cx="3474644" cy="176212"/>
+            </a:xfrm>
+            <a:prstGeom prst="rect">
+              <a:avLst/>
+            </a:prstGeom>
+            <a:noFill/>
+            <a:ln>
+              <a:noFill/>
+            </a:ln>
+          </p:spPr>
+          <p:txBody>
+            <a:bodyPr wrap="none" lIns="0" tIns="0" rIns="0" bIns="0" anchor="t" anchorCtr="0">
+              <a:spAutoFit/>
+            </a:bodyPr>
+            <a:lstStyle/>
+            <a:p>
+              <a:pPr algn="l"/>
+              <a:r>
+                <a:rPr lang="zh-CN" sz="900" dirty="0">
+                  <a:solidFill>
+                    <a:srgbClr val="7A756D"/>
+                  </a:solidFill>
+                  <a:latin typeface="+mn-lt"/>
+                  <a:ea typeface="+mn-ea"/>
+                  <a:cs typeface="+mn-cs"/>
+                </a:rPr>
+                <a:t>补页 03 / 05 · 位置为定性映射；高亮框表示 2026 年新扩展边界</a:t>
+              </a:r>
+            </a:p>
+          </p:txBody>
+        </p:sp>
+        <p:sp>
+          <p:nvSpPr>
+            <p:cNvPr id="47" name="TextBox 47"/>
+            <p:cNvSpPr txBox="1"/>
+            <p:nvPr/>
+          </p:nvSpPr>
+          <p:spPr>
+            <a:xfrm>
+              <a:off x="11225289" y="6286500"/>
+              <a:ext cx="399974" cy="176212"/>
+            </a:xfrm>
+            <a:prstGeom prst="rect">
+              <a:avLst/>
+            </a:prstGeom>
+            <a:noFill/>
+            <a:ln>
+              <a:noFill/>
+            </a:ln>
+          </p:spPr>
+          <p:txBody>
+            <a:bodyPr wrap="none" lIns="0" tIns="0" rIns="0" bIns="0" anchor="t" anchorCtr="0">
+              <a:spAutoFit/>
+            </a:bodyPr>
+            <a:lstStyle/>
+            <a:p>
+              <a:pPr algn="r"/>
+              <a:r>
+                <a:rPr lang="en-US" sz="900" dirty="0">
+                  <a:solidFill>
+                    <a:srgbClr val="7A756D"/>
+                  </a:solidFill>
+                  <a:latin typeface="+mn-lt"/>
+                  <a:ea typeface="+mn-ea"/>
+                  <a:cs typeface="+mn-cs"/>
+                </a:rPr>
+                <a:t>EXT 03</a:t>
+              </a:r>
+            </a:p>
+          </p:txBody>
+        </p:sp>
+      </p:grpSp>
+    </p:spTree>
+  </p:cSld>
+  <p:clrMapOvr>
+    <a:masterClrMapping/>
+  </p:clrMapOvr>
+  <p:transition xmlns:p14="http://schemas.microsoft.com/office/powerpoint/2010/main" p14:dur="400">
+    <p:fade/>
+  </p:transition>
+</p:sld>
+</file>
+
+<file path=ppt/slides/slide25.xml><?xml version="1.0" encoding="utf-8"?>
+<p:sld xmlns:a="http://schemas.openxmlformats.org/drawingml/2006/main" xmlns:r="http://schemas.openxmlformats.org/officeDocument/2006/relationships" xmlns:p="http://schemas.openxmlformats.org/presentationml/2006/main">
+  <p:cSld>
+    <p:bg>
+      <p:bgPr>
+        <a:solidFill>
+          <a:srgbClr val="F4F0E7"/>
+        </a:solidFill>
+        <a:effectLst/>
+      </p:bgPr>
+    </p:bg>
+    <p:spTree>
+      <p:nvGrpSpPr>
+        <p:cNvPr id="1" name=""/>
+        <p:cNvGrpSpPr/>
+        <p:nvPr/>
+      </p:nvGrpSpPr>
+      <p:grpSpPr>
+        <a:xfrm>
+          <a:off x="0" y="0"/>
+          <a:ext cx="0" cy="0"/>
+          <a:chOff x="0" y="0"/>
+          <a:chExt cx="0" cy="0"/>
+        </a:xfrm>
+      </p:grpSpPr>
+      <p:grpSp>
+        <p:nvGrpSpPr>
+          <p:cNvPr id="4" name="page-title"/>
+          <p:cNvGrpSpPr/>
+          <p:nvPr/>
+        </p:nvGrpSpPr>
+        <p:grpSpPr>
+          <a:xfrm>
+            <a:off x="559308" y="273050"/>
+            <a:ext cx="7193280" cy="659892"/>
+            <a:chOff x="559308" y="273050"/>
+            <a:chExt cx="7193280" cy="659892"/>
+          </a:xfrm>
+        </p:grpSpPr>
+        <p:sp>
+          <p:nvSpPr>
+            <p:cNvPr id="2" name="TextBox 2"/>
+            <p:cNvSpPr txBox="1"/>
+            <p:nvPr/>
+          </p:nvSpPr>
+          <p:spPr>
+            <a:xfrm>
+              <a:off x="566166" y="273050"/>
+              <a:ext cx="1457078" cy="205359"/>
+            </a:xfrm>
+            <a:prstGeom prst="rect">
+              <a:avLst/>
+            </a:prstGeom>
+            <a:noFill/>
+            <a:ln>
+              <a:noFill/>
+            </a:ln>
+          </p:spPr>
+          <p:txBody>
+            <a:bodyPr wrap="none" lIns="0" tIns="0" rIns="0" bIns="0" anchor="t" anchorCtr="0">
+              <a:spAutoFit/>
+            </a:bodyPr>
+            <a:lstStyle/>
+            <a:p>
+              <a:pPr algn="l"/>
+              <a:r>
+                <a:rPr lang="zh-CN" sz="1050" b="1" spc="150" dirty="0">
+                  <a:solidFill>
+                    <a:srgbClr val="C14E2C"/>
+                  </a:solidFill>
+                  <a:latin typeface="+mn-lt"/>
+                  <a:ea typeface="+mn-ea"/>
+                  <a:cs typeface="+mn-cs"/>
+                </a:rPr>
+                <a:t>补页 04 · 经验教训</a:t>
+              </a:r>
+            </a:p>
+          </p:txBody>
+        </p:sp>
+        <p:sp>
+          <p:nvSpPr>
+            <p:cNvPr id="3" name="TextBox 3"/>
+            <p:cNvSpPr txBox="1"/>
+            <p:nvPr/>
+          </p:nvSpPr>
+          <p:spPr>
+            <a:xfrm>
+              <a:off x="559308" y="463550"/>
+              <a:ext cx="7193280" cy="469392"/>
+            </a:xfrm>
+            <a:prstGeom prst="rect">
+              <a:avLst/>
+            </a:prstGeom>
+            <a:noFill/>
+            <a:ln>
+              <a:noFill/>
+            </a:ln>
+          </p:spPr>
+          <p:txBody>
+            <a:bodyPr wrap="none" lIns="0" tIns="0" rIns="0" bIns="0" anchor="t" anchorCtr="0">
+              <a:spAutoFit/>
+            </a:bodyPr>
+            <a:lstStyle/>
+            <a:p>
+              <a:pPr algn="l"/>
+              <a:r>
+                <a:rPr lang="zh-CN" sz="2400" b="1" dirty="0">
+                  <a:solidFill>
+                    <a:srgbClr val="1D1C19"/>
+                  </a:solidFill>
+                  <a:latin typeface="+mj-lt"/>
+                  <a:ea typeface="+mj-ea"/>
+                  <a:cs typeface="+mj-cs"/>
+                </a:rPr>
+                <a:t>行业不是没有技术，而是很多产品没把任务做完</a:t>
+              </a:r>
+            </a:p>
+          </p:txBody>
+        </p:sp>
+      </p:grpSp>
+      <p:grpSp>
+        <p:nvGrpSpPr>
+          <p:cNvPr id="42" name="lessons"/>
+          <p:cNvGrpSpPr/>
+          <p:nvPr/>
+        </p:nvGrpSpPr>
+        <p:grpSpPr>
+          <a:xfrm>
+            <a:off x="563499" y="1270000"/>
+            <a:ext cx="11057001" cy="4741291"/>
+            <a:chOff x="563499" y="1270000"/>
+            <a:chExt cx="11057001" cy="4741291"/>
+          </a:xfrm>
+        </p:grpSpPr>
+        <p:sp>
+          <p:nvSpPr>
+            <p:cNvPr id="5" name="TextBox 5"/>
+            <p:cNvSpPr txBox="1"/>
+            <p:nvPr/>
+          </p:nvSpPr>
+          <p:spPr>
+            <a:xfrm>
+              <a:off x="565785" y="1270000"/>
+              <a:ext cx="3780790" cy="220028"/>
+            </a:xfrm>
+            <a:prstGeom prst="rect">
+              <a:avLst/>
+            </a:prstGeom>
+            <a:noFill/>
+            <a:ln>
+              <a:noFill/>
+            </a:ln>
+          </p:spPr>
+          <p:txBody>
+            <a:bodyPr wrap="none" lIns="0" tIns="0" rIns="0" bIns="0" anchor="t" anchorCtr="0">
+              <a:spAutoFit/>
+            </a:bodyPr>
+            <a:lstStyle/>
+            <a:p>
+              <a:pPr algn="l"/>
+              <a:r>
+                <a:rPr lang="zh-CN" sz="1120" dirty="0">
+                  <a:solidFill>
+                    <a:srgbClr val="4D4942"/>
+                  </a:solidFill>
+                  <a:latin typeface="+mn-lt"/>
+                  <a:ea typeface="+mn-ea"/>
+                  <a:cs typeface="+mn-cs"/>
+                </a:rPr>
+                <a:t>把每代产品放在同一张因果链里，会发现成败并不神秘。</a:t>
+              </a:r>
+            </a:p>
+          </p:txBody>
+        </p:sp>
+        <p:sp>
+          <p:nvSpPr>
+            <p:cNvPr id="6" name="TextBox 6"/>
+            <p:cNvSpPr txBox="1"/>
+            <p:nvPr/>
+          </p:nvSpPr>
+          <p:spPr>
+            <a:xfrm>
+              <a:off x="850773" y="1657350"/>
+              <a:ext cx="357581" cy="250317"/>
+            </a:xfrm>
+            <a:prstGeom prst="rect">
+              <a:avLst/>
+            </a:prstGeom>
+            <a:noFill/>
+            <a:ln>
+              <a:noFill/>
+            </a:ln>
+          </p:spPr>
+          <p:txBody>
+            <a:bodyPr wrap="none" lIns="0" tIns="0" rIns="0" bIns="0" anchor="t" anchorCtr="0">
+              <a:spAutoFit/>
+            </a:bodyPr>
+            <a:lstStyle/>
+            <a:p>
+              <a:pPr algn="l"/>
+              <a:r>
+                <a:rPr lang="zh-CN" sz="1280" b="1" dirty="0">
+                  <a:solidFill>
+                    <a:srgbClr val="1D1C19"/>
+                  </a:solidFill>
+                  <a:latin typeface="+mn-lt"/>
+                  <a:ea typeface="+mn-ea"/>
+                  <a:cs typeface="+mn-cs"/>
+                </a:rPr>
+                <a:t>看懂</a:t>
+              </a:r>
+            </a:p>
+          </p:txBody>
+        </p:sp>
+        <p:sp>
+          <p:nvSpPr>
+            <p:cNvPr id="7" name="TextBox 7"/>
+            <p:cNvSpPr txBox="1"/>
+            <p:nvPr/>
+          </p:nvSpPr>
+          <p:spPr>
+            <a:xfrm>
+              <a:off x="2851023" y="1657350"/>
+              <a:ext cx="357581" cy="250317"/>
+            </a:xfrm>
+            <a:prstGeom prst="rect">
+              <a:avLst/>
+            </a:prstGeom>
+            <a:noFill/>
+            <a:ln>
+              <a:noFill/>
+            </a:ln>
+          </p:spPr>
+          <p:txBody>
+            <a:bodyPr wrap="none" lIns="0" tIns="0" rIns="0" bIns="0" anchor="t" anchorCtr="0">
+              <a:spAutoFit/>
+            </a:bodyPr>
+            <a:lstStyle/>
+            <a:p>
+              <a:pPr algn="l"/>
+              <a:r>
+                <a:rPr lang="zh-CN" sz="1280" b="1" dirty="0">
+                  <a:solidFill>
+                    <a:srgbClr val="1D1C19"/>
+                  </a:solidFill>
+                  <a:latin typeface="+mn-lt"/>
+                  <a:ea typeface="+mn-ea"/>
+                  <a:cs typeface="+mn-cs"/>
+                </a:rPr>
+                <a:t>会说</a:t>
+              </a:r>
+            </a:p>
+          </p:txBody>
+        </p:sp>
+        <p:sp>
+          <p:nvSpPr>
+            <p:cNvPr id="8" name="TextBox 8"/>
+            <p:cNvSpPr txBox="1"/>
+            <p:nvPr/>
+          </p:nvSpPr>
+          <p:spPr>
+            <a:xfrm>
+              <a:off x="4946523" y="1657350"/>
+              <a:ext cx="529895" cy="250317"/>
+            </a:xfrm>
+            <a:prstGeom prst="rect">
+              <a:avLst/>
+            </a:prstGeom>
+            <a:noFill/>
+            <a:ln>
+              <a:noFill/>
+            </a:ln>
+          </p:spPr>
+          <p:txBody>
+            <a:bodyPr wrap="none" lIns="0" tIns="0" rIns="0" bIns="0" anchor="t" anchorCtr="0">
+              <a:spAutoFit/>
+            </a:bodyPr>
+            <a:lstStyle/>
+            <a:p>
+              <a:pPr algn="l"/>
+              <a:r>
+                <a:rPr lang="zh-CN" sz="1280" b="1" dirty="0">
+                  <a:solidFill>
+                    <a:srgbClr val="1D1C19"/>
+                  </a:solidFill>
+                  <a:latin typeface="+mn-lt"/>
+                  <a:ea typeface="+mn-ea"/>
+                  <a:cs typeface="+mn-cs"/>
+                </a:rPr>
+                <a:t>会判断</a:t>
+              </a:r>
+            </a:p>
+          </p:txBody>
+        </p:sp>
+        <p:sp>
+          <p:nvSpPr>
+            <p:cNvPr id="9" name="TextBox 9"/>
+            <p:cNvSpPr txBox="1"/>
+            <p:nvPr/>
+          </p:nvSpPr>
+          <p:spPr>
+            <a:xfrm>
+              <a:off x="7042023" y="1657350"/>
+              <a:ext cx="529895" cy="250317"/>
+            </a:xfrm>
+            <a:prstGeom prst="rect">
+              <a:avLst/>
+            </a:prstGeom>
+            <a:noFill/>
+            <a:ln>
+              <a:noFill/>
+            </a:ln>
+          </p:spPr>
+          <p:txBody>
+            <a:bodyPr wrap="none" lIns="0" tIns="0" rIns="0" bIns="0" anchor="t" anchorCtr="0">
+              <a:spAutoFit/>
+            </a:bodyPr>
+            <a:lstStyle/>
+            <a:p>
+              <a:pPr algn="l"/>
+              <a:r>
+                <a:rPr lang="zh-CN" sz="1280" b="1" dirty="0">
+                  <a:solidFill>
+                    <a:srgbClr val="1D1C19"/>
+                  </a:solidFill>
+                  <a:latin typeface="+mn-lt"/>
+                  <a:ea typeface="+mn-ea"/>
+                  <a:cs typeface="+mn-cs"/>
+                </a:rPr>
+                <a:t>会执行</a:t>
+              </a:r>
+            </a:p>
+          </p:txBody>
+        </p:sp>
+        <p:sp>
+          <p:nvSpPr>
+            <p:cNvPr id="10" name="TextBox 10"/>
+            <p:cNvSpPr txBox="1"/>
+            <p:nvPr/>
+          </p:nvSpPr>
+          <p:spPr>
+            <a:xfrm>
+              <a:off x="9137523" y="1657350"/>
+              <a:ext cx="529895" cy="250317"/>
+            </a:xfrm>
+            <a:prstGeom prst="rect">
+              <a:avLst/>
+            </a:prstGeom>
+            <a:noFill/>
+            <a:ln>
+              <a:noFill/>
+            </a:ln>
+          </p:spPr>
+          <p:txBody>
+            <a:bodyPr wrap="none" lIns="0" tIns="0" rIns="0" bIns="0" anchor="t" anchorCtr="0">
+              <a:spAutoFit/>
+            </a:bodyPr>
+            <a:lstStyle/>
+            <a:p>
+              <a:pPr algn="l"/>
+              <a:r>
+                <a:rPr lang="zh-CN" sz="1280" b="1" dirty="0">
+                  <a:solidFill>
+                    <a:srgbClr val="C14E2C"/>
+                  </a:solidFill>
+                  <a:latin typeface="+mn-lt"/>
+                  <a:ea typeface="+mn-ea"/>
+                  <a:cs typeface="+mn-cs"/>
+                </a:rPr>
+                <a:t>会负责</a:t>
+              </a:r>
+            </a:p>
+          </p:txBody>
+        </p:sp>
+        <p:sp>
+          <p:nvSpPr>
+            <p:cNvPr id="11" name="Line 11"/>
+            <p:cNvSpPr/>
+            <p:nvPr/>
+          </p:nvSpPr>
+          <p:spPr>
+            <a:xfrm>
+              <a:off x="857250" y="2019300"/>
+              <a:ext cx="9906000" cy="9525"/>
+            </a:xfrm>
+            <a:custGeom>
+              <a:avLst/>
+              <a:gdLst/>
+              <a:ahLst/>
+              <a:cxnLst/>
+              <a:rect l="l" t="t" r="r" b="b"/>
+              <a:pathLst>
+                <a:path w="9906000" h="9525">
+                  <a:moveTo>
+                    <a:pt x="0" y="0"/>
+                  </a:moveTo>
+                  <a:lnTo>
+                    <a:pt x="9906000" y="0"/>
+                  </a:lnTo>
+                </a:path>
+              </a:pathLst>
+            </a:custGeom>
+            <a:noFill/>
+            <a:ln w="28575">
+              <a:solidFill>
+                <a:srgbClr val="B6AEA1"/>
+              </a:solidFill>
+            </a:ln>
+          </p:spPr>
+        </p:sp>
+        <p:sp>
+          <p:nvSpPr>
+            <p:cNvPr id="12" name="Ellipse 12"/>
+            <p:cNvSpPr/>
+            <p:nvPr/>
+          </p:nvSpPr>
+          <p:spPr>
+            <a:xfrm>
+              <a:off x="1247775" y="1933575"/>
+              <a:ext cx="171450" cy="171450"/>
+            </a:xfrm>
+            <a:prstGeom prst="ellipse">
+              <a:avLst/>
+            </a:prstGeom>
+            <a:solidFill>
+              <a:srgbClr val="1D1C19"/>
+            </a:solidFill>
+            <a:ln>
+              <a:noFill/>
+            </a:ln>
+          </p:spPr>
+        </p:sp>
+        <p:sp>
+          <p:nvSpPr>
+            <p:cNvPr id="13" name="Ellipse 13"/>
+            <p:cNvSpPr/>
+            <p:nvPr/>
+          </p:nvSpPr>
+          <p:spPr>
+            <a:xfrm>
+              <a:off x="3343275" y="1933575"/>
+              <a:ext cx="171450" cy="171450"/>
+            </a:xfrm>
+            <a:prstGeom prst="ellipse">
+              <a:avLst/>
+            </a:prstGeom>
+            <a:solidFill>
+              <a:srgbClr val="1D1C19"/>
+            </a:solidFill>
+            <a:ln>
+              <a:noFill/>
+            </a:ln>
+          </p:spPr>
+        </p:sp>
+        <p:sp>
+          <p:nvSpPr>
+            <p:cNvPr id="14" name="Ellipse 14"/>
+            <p:cNvSpPr/>
+            <p:nvPr/>
+          </p:nvSpPr>
+          <p:spPr>
+            <a:xfrm>
+              <a:off x="5438775" y="1933575"/>
+              <a:ext cx="171450" cy="171450"/>
+            </a:xfrm>
+            <a:prstGeom prst="ellipse">
+              <a:avLst/>
+            </a:prstGeom>
+            <a:solidFill>
+              <a:srgbClr val="1D1C19"/>
+            </a:solidFill>
+            <a:ln>
+              <a:noFill/>
+            </a:ln>
+          </p:spPr>
+        </p:sp>
+        <p:sp>
+          <p:nvSpPr>
+            <p:cNvPr id="15" name="Ellipse 15"/>
+            <p:cNvSpPr/>
+            <p:nvPr/>
+          </p:nvSpPr>
+          <p:spPr>
+            <a:xfrm>
+              <a:off x="7534275" y="1933575"/>
+              <a:ext cx="171450" cy="171450"/>
+            </a:xfrm>
+            <a:prstGeom prst="ellipse">
+              <a:avLst/>
+            </a:prstGeom>
+            <a:solidFill>
+              <a:srgbClr val="1D1C19"/>
+            </a:solidFill>
+            <a:ln>
+              <a:noFill/>
+            </a:ln>
+          </p:spPr>
+        </p:sp>
+        <p:sp>
+          <p:nvSpPr>
+            <p:cNvPr id="16" name="Ellipse 16"/>
+            <p:cNvSpPr/>
+            <p:nvPr/>
+          </p:nvSpPr>
+          <p:spPr>
+            <a:xfrm>
+              <a:off x="9610725" y="1914525"/>
+              <a:ext cx="209550" cy="209550"/>
+            </a:xfrm>
+            <a:prstGeom prst="ellipse">
+              <a:avLst/>
+            </a:prstGeom>
+            <a:solidFill>
+              <a:srgbClr val="C14E2C"/>
+            </a:solidFill>
+            <a:ln>
+              <a:noFill/>
+            </a:ln>
+          </p:spPr>
+        </p:sp>
+        <p:sp>
+          <p:nvSpPr>
+            <p:cNvPr id="17" name="TextBox 17"/>
+            <p:cNvSpPr txBox="1"/>
+            <p:nvPr/>
+          </p:nvSpPr>
+          <p:spPr>
+            <a:xfrm>
+              <a:off x="1086422" y="2190750"/>
+              <a:ext cx="494157" cy="176212"/>
+            </a:xfrm>
+            <a:prstGeom prst="rect">
+              <a:avLst/>
+            </a:prstGeom>
+            <a:noFill/>
+            <a:ln>
+              <a:noFill/>
+            </a:ln>
+          </p:spPr>
+          <p:txBody>
+            <a:bodyPr wrap="none" lIns="0" tIns="0" rIns="0" bIns="0" anchor="t" anchorCtr="0">
+              <a:spAutoFit/>
+            </a:bodyPr>
+            <a:lstStyle/>
+            <a:p>
+              <a:pPr algn="ctr"/>
+              <a:r>
+                <a:rPr lang="zh-CN" sz="900" dirty="0">
+                  <a:solidFill>
+                    <a:srgbClr val="6B6760"/>
+                  </a:solidFill>
+                  <a:latin typeface="+mn-lt"/>
+                  <a:ea typeface="+mn-ea"/>
+                  <a:cs typeface="+mn-cs"/>
+                </a:rPr>
+                <a:t>识别画面</a:t>
+              </a:r>
+            </a:p>
+          </p:txBody>
+        </p:sp>
+        <p:sp>
+          <p:nvSpPr>
+            <p:cNvPr id="18" name="TextBox 18"/>
+            <p:cNvSpPr txBox="1"/>
+            <p:nvPr/>
+          </p:nvSpPr>
+          <p:spPr>
+            <a:xfrm>
+              <a:off x="3181922" y="2190750"/>
+              <a:ext cx="494157" cy="176212"/>
+            </a:xfrm>
+            <a:prstGeom prst="rect">
+              <a:avLst/>
+            </a:prstGeom>
+            <a:noFill/>
+            <a:ln>
+              <a:noFill/>
+            </a:ln>
+          </p:spPr>
+          <p:txBody>
+            <a:bodyPr wrap="none" lIns="0" tIns="0" rIns="0" bIns="0" anchor="t" anchorCtr="0">
+              <a:spAutoFit/>
+            </a:bodyPr>
+            <a:lstStyle/>
+            <a:p>
+              <a:pPr algn="ctr"/>
+              <a:r>
+                <a:rPr lang="zh-CN" sz="900" dirty="0">
+                  <a:solidFill>
+                    <a:srgbClr val="6B6760"/>
+                  </a:solidFill>
+                  <a:latin typeface="+mn-lt"/>
+                  <a:ea typeface="+mn-ea"/>
+                  <a:cs typeface="+mn-cs"/>
+                </a:rPr>
+                <a:t>连续解释</a:t>
+              </a:r>
+            </a:p>
+          </p:txBody>
+        </p:sp>
+        <p:sp>
+          <p:nvSpPr>
+            <p:cNvPr id="19" name="TextBox 19"/>
+            <p:cNvSpPr txBox="1"/>
+            <p:nvPr/>
+          </p:nvSpPr>
+          <p:spPr>
+            <a:xfrm>
+              <a:off x="5216842" y="2190750"/>
+              <a:ext cx="615315" cy="176212"/>
+            </a:xfrm>
+            <a:prstGeom prst="rect">
+              <a:avLst/>
+            </a:prstGeom>
+            <a:noFill/>
+            <a:ln>
+              <a:noFill/>
+            </a:ln>
+          </p:spPr>
+          <p:txBody>
+            <a:bodyPr wrap="none" lIns="0" tIns="0" rIns="0" bIns="0" anchor="t" anchorCtr="0">
+              <a:spAutoFit/>
+            </a:bodyPr>
+            <a:lstStyle/>
+            <a:p>
+              <a:pPr algn="ctr"/>
+              <a:r>
+                <a:rPr lang="zh-CN" sz="900" dirty="0">
+                  <a:solidFill>
+                    <a:srgbClr val="6B6760"/>
+                  </a:solidFill>
+                  <a:latin typeface="+mn-lt"/>
+                  <a:ea typeface="+mn-ea"/>
+                  <a:cs typeface="+mn-cs"/>
+                </a:rPr>
+                <a:t>决定下一步</a:t>
+              </a:r>
+            </a:p>
+          </p:txBody>
+        </p:sp>
+        <p:sp>
+          <p:nvSpPr>
+            <p:cNvPr id="20" name="TextBox 20"/>
+            <p:cNvSpPr txBox="1"/>
+            <p:nvPr/>
+          </p:nvSpPr>
+          <p:spPr>
+            <a:xfrm>
+              <a:off x="7218445" y="2190750"/>
+              <a:ext cx="803110" cy="176212"/>
+            </a:xfrm>
+            <a:prstGeom prst="rect">
+              <a:avLst/>
+            </a:prstGeom>
+            <a:noFill/>
+            <a:ln>
+              <a:noFill/>
+            </a:ln>
+          </p:spPr>
+          <p:txBody>
+            <a:bodyPr wrap="none" lIns="0" tIns="0" rIns="0" bIns="0" anchor="t" anchorCtr="0">
+              <a:spAutoFit/>
+            </a:bodyPr>
+            <a:lstStyle/>
+            <a:p>
+              <a:pPr algn="ctr"/>
+              <a:r>
+                <a:rPr lang="zh-CN" sz="900" dirty="0">
+                  <a:solidFill>
+                    <a:srgbClr val="6B6760"/>
+                  </a:solidFill>
+                  <a:latin typeface="+mn-lt"/>
+                  <a:ea typeface="+mn-ea"/>
+                  <a:cs typeface="+mn-cs"/>
+                </a:rPr>
+                <a:t>调用工具/系统</a:t>
+              </a:r>
+            </a:p>
+          </p:txBody>
+        </p:sp>
+        <p:sp>
+          <p:nvSpPr>
+            <p:cNvPr id="21" name="TextBox 21"/>
+            <p:cNvSpPr txBox="1"/>
+            <p:nvPr/>
+          </p:nvSpPr>
+          <p:spPr>
+            <a:xfrm>
+              <a:off x="9280627" y="2190750"/>
+              <a:ext cx="869747" cy="176212"/>
+            </a:xfrm>
+            <a:prstGeom prst="rect">
+              <a:avLst/>
+            </a:prstGeom>
+            <a:noFill/>
+            <a:ln>
+              <a:noFill/>
+            </a:ln>
+          </p:spPr>
+          <p:txBody>
+            <a:bodyPr wrap="none" lIns="0" tIns="0" rIns="0" bIns="0" anchor="t" anchorCtr="0">
+              <a:spAutoFit/>
+            </a:bodyPr>
+            <a:lstStyle/>
+            <a:p>
+              <a:pPr algn="ctr"/>
+              <a:r>
+                <a:rPr lang="zh-CN" sz="900" dirty="0">
+                  <a:solidFill>
+                    <a:srgbClr val="C14E2C"/>
+                  </a:solidFill>
+                  <a:latin typeface="+mn-lt"/>
+                  <a:ea typeface="+mn-ea"/>
+                  <a:cs typeface="+mn-cs"/>
+                </a:rPr>
+                <a:t>确认/接管/审计</a:t>
+              </a:r>
+            </a:p>
+          </p:txBody>
+        </p:sp>
+        <p:sp>
+          <p:nvSpPr>
+            <p:cNvPr id="22" name="Line 22"/>
+            <p:cNvSpPr/>
+            <p:nvPr/>
+          </p:nvSpPr>
+          <p:spPr>
+            <a:xfrm>
+              <a:off x="571500" y="2647950"/>
+              <a:ext cx="11049000" cy="9525"/>
+            </a:xfrm>
+            <a:custGeom>
+              <a:avLst/>
+              <a:gdLst/>
+              <a:ahLst/>
+              <a:cxnLst/>
+              <a:rect l="l" t="t" r="r" b="b"/>
+              <a:pathLst>
+                <a:path w="11049000" h="9525">
+                  <a:moveTo>
+                    <a:pt x="0" y="0"/>
+                  </a:moveTo>
+                  <a:lnTo>
+                    <a:pt x="11049000" y="0"/>
+                  </a:lnTo>
+                </a:path>
+              </a:pathLst>
+            </a:custGeom>
+            <a:noFill/>
+            <a:ln w="9525">
+              <a:solidFill>
+                <a:srgbClr val="C9C1B4"/>
+              </a:solidFill>
+            </a:ln>
+          </p:spPr>
+        </p:sp>
+        <p:sp>
+          <p:nvSpPr>
+            <p:cNvPr id="23" name="TextBox 23"/>
+            <p:cNvSpPr txBox="1"/>
+            <p:nvPr/>
+          </p:nvSpPr>
+          <p:spPr>
+            <a:xfrm>
+              <a:off x="566166" y="2825750"/>
+              <a:ext cx="1735504" cy="205359"/>
+            </a:xfrm>
+            <a:prstGeom prst="rect">
+              <a:avLst/>
+            </a:prstGeom>
+            <a:noFill/>
+            <a:ln>
+              <a:noFill/>
+            </a:ln>
+          </p:spPr>
+          <p:txBody>
+            <a:bodyPr wrap="none" lIns="0" tIns="0" rIns="0" bIns="0" anchor="t" anchorCtr="0">
+              <a:spAutoFit/>
+            </a:bodyPr>
+            <a:lstStyle/>
+            <a:p>
+              <a:pPr algn="l"/>
+              <a:r>
+                <a:rPr lang="zh-CN" sz="1050" b="1" dirty="0">
+                  <a:solidFill>
+                    <a:srgbClr val="A33B27"/>
+                  </a:solidFill>
+                  <a:latin typeface="+mn-lt"/>
+                  <a:ea typeface="+mn-ea"/>
+                  <a:cs typeface="+mn-cs"/>
+                </a:rPr>
+                <a:t>坑 1：把“看懂”当成“完成”</a:t>
+              </a:r>
+            </a:p>
+          </p:txBody>
+        </p:sp>
+        <p:sp>
+          <p:nvSpPr>
+            <p:cNvPr id="24" name="TextBox 24"/>
+            <p:cNvSpPr txBox="1"/>
+            <p:nvPr/>
+          </p:nvSpPr>
+          <p:spPr>
+            <a:xfrm>
+              <a:off x="566166" y="3073400"/>
+              <a:ext cx="4109847" cy="205359"/>
+            </a:xfrm>
+            <a:prstGeom prst="rect">
+              <a:avLst/>
+            </a:prstGeom>
+            <a:noFill/>
+            <a:ln>
+              <a:noFill/>
+            </a:ln>
+          </p:spPr>
+          <p:txBody>
+            <a:bodyPr wrap="none" lIns="0" tIns="0" rIns="0" bIns="0" anchor="t" anchorCtr="0">
+              <a:spAutoFit/>
+            </a:bodyPr>
+            <a:lstStyle/>
+            <a:p>
+              <a:pPr algn="l"/>
+              <a:r>
+                <a:rPr lang="zh-CN" sz="1050" dirty="0">
+                  <a:solidFill>
+                    <a:srgbClr val="3F3B35"/>
+                  </a:solidFill>
+                  <a:latin typeface="+mn-lt"/>
+                  <a:ea typeface="+mn-ea"/>
+                  <a:cs typeface="+mn-cs"/>
+                </a:rPr>
+                <a:t>看图回答很酷，但用户真正想要的是订成功、装正确、问题解决。</a:t>
+              </a:r>
+            </a:p>
+          </p:txBody>
+        </p:sp>
+        <p:sp>
+          <p:nvSpPr>
+            <p:cNvPr id="25" name="TextBox 25"/>
+            <p:cNvSpPr txBox="1"/>
+            <p:nvPr/>
+          </p:nvSpPr>
+          <p:spPr>
+            <a:xfrm>
+              <a:off x="566547" y="3314700"/>
+              <a:ext cx="4001445" cy="191643"/>
+            </a:xfrm>
+            <a:prstGeom prst="rect">
+              <a:avLst/>
+            </a:prstGeom>
+            <a:noFill/>
+            <a:ln>
+              <a:noFill/>
+            </a:ln>
+          </p:spPr>
+          <p:txBody>
+            <a:bodyPr wrap="none" lIns="0" tIns="0" rIns="0" bIns="0" anchor="t" anchorCtr="0">
+              <a:spAutoFit/>
+            </a:bodyPr>
+            <a:lstStyle/>
+            <a:p>
+              <a:pPr algn="l"/>
+              <a:r>
+                <a:rPr lang="zh-CN" sz="980" dirty="0">
+                  <a:solidFill>
+                    <a:srgbClr val="6B6760"/>
+                  </a:solidFill>
+                  <a:latin typeface="+mn-lt"/>
+                  <a:ea typeface="+mn-ea"/>
+                  <a:cs typeface="+mn-cs"/>
+                </a:rPr>
+                <a:t>Lens 单次搜索成立；Muse 和 Copilot 的差别在于是否进入行动链。</a:t>
+              </a:r>
+            </a:p>
+          </p:txBody>
+        </p:sp>
+        <p:sp>
+          <p:nvSpPr>
+            <p:cNvPr id="26" name="TextBox 26"/>
+            <p:cNvSpPr txBox="1"/>
+            <p:nvPr/>
+          </p:nvSpPr>
+          <p:spPr>
+            <a:xfrm>
+              <a:off x="6471666" y="2825750"/>
+              <a:ext cx="2696337" cy="205359"/>
+            </a:xfrm>
+            <a:prstGeom prst="rect">
+              <a:avLst/>
+            </a:prstGeom>
+            <a:noFill/>
+            <a:ln>
+              <a:noFill/>
+            </a:ln>
+          </p:spPr>
+          <p:txBody>
+            <a:bodyPr wrap="none" lIns="0" tIns="0" rIns="0" bIns="0" anchor="t" anchorCtr="0">
+              <a:spAutoFit/>
+            </a:bodyPr>
+            <a:lstStyle/>
+            <a:p>
+              <a:pPr algn="l"/>
+              <a:r>
+                <a:rPr lang="zh-CN" sz="1050" b="1" dirty="0">
+                  <a:solidFill>
+                    <a:srgbClr val="1F5A49"/>
+                  </a:solidFill>
+                  <a:latin typeface="+mn-lt"/>
+                  <a:ea typeface="+mn-ea"/>
+                  <a:cs typeface="+mn-cs"/>
+                </a:rPr>
+                <a:t>启示：先定义任务终点，再选模态和模型。</a:t>
+              </a:r>
+            </a:p>
+          </p:txBody>
+        </p:sp>
+        <p:sp>
+          <p:nvSpPr>
+            <p:cNvPr id="27" name="TextBox 27"/>
+            <p:cNvSpPr txBox="1"/>
+            <p:nvPr/>
+          </p:nvSpPr>
+          <p:spPr>
+            <a:xfrm>
+              <a:off x="6471666" y="3073400"/>
+              <a:ext cx="3544443" cy="205359"/>
+            </a:xfrm>
+            <a:prstGeom prst="rect">
+              <a:avLst/>
+            </a:prstGeom>
+            <a:noFill/>
+            <a:ln>
+              <a:noFill/>
+            </a:ln>
+          </p:spPr>
+          <p:txBody>
+            <a:bodyPr wrap="none" lIns="0" tIns="0" rIns="0" bIns="0" anchor="t" anchorCtr="0">
+              <a:spAutoFit/>
+            </a:bodyPr>
+            <a:lstStyle/>
+            <a:p>
+              <a:pPr algn="l"/>
+              <a:r>
+                <a:rPr lang="zh-CN" sz="1050" dirty="0">
+                  <a:solidFill>
+                    <a:srgbClr val="3F3B35"/>
+                  </a:solidFill>
+                  <a:latin typeface="+mn-lt"/>
+                  <a:ea typeface="+mn-ea"/>
+                  <a:cs typeface="+mn-cs"/>
+                </a:rPr>
+                <a:t>交付标准是结果可验证、失败可恢复，而不是答得像人。</a:t>
+              </a:r>
+            </a:p>
+          </p:txBody>
+        </p:sp>
+        <p:sp>
+          <p:nvSpPr>
+            <p:cNvPr id="28" name="Line 28"/>
+            <p:cNvSpPr/>
+            <p:nvPr/>
+          </p:nvSpPr>
+          <p:spPr>
+            <a:xfrm>
+              <a:off x="571500" y="3638550"/>
+              <a:ext cx="11049000" cy="9525"/>
+            </a:xfrm>
+            <a:custGeom>
+              <a:avLst/>
+              <a:gdLst/>
+              <a:ahLst/>
+              <a:cxnLst/>
+              <a:rect l="l" t="t" r="r" b="b"/>
+              <a:pathLst>
+                <a:path w="11049000" h="9525">
+                  <a:moveTo>
+                    <a:pt x="0" y="0"/>
+                  </a:moveTo>
+                  <a:lnTo>
+                    <a:pt x="11049000" y="0"/>
+                  </a:lnTo>
+                </a:path>
+              </a:pathLst>
+            </a:custGeom>
+            <a:noFill/>
+            <a:ln w="9525">
+              <a:solidFill>
+                <a:srgbClr val="D6CFC3"/>
+              </a:solidFill>
+            </a:ln>
+          </p:spPr>
+        </p:sp>
+        <p:sp>
+          <p:nvSpPr>
+            <p:cNvPr id="29" name="TextBox 29"/>
+            <p:cNvSpPr txBox="1"/>
+            <p:nvPr/>
+          </p:nvSpPr>
+          <p:spPr>
+            <a:xfrm>
+              <a:off x="566166" y="3816350"/>
+              <a:ext cx="2681142" cy="205359"/>
+            </a:xfrm>
+            <a:prstGeom prst="rect">
+              <a:avLst/>
+            </a:prstGeom>
+            <a:noFill/>
+            <a:ln>
+              <a:noFill/>
+            </a:ln>
+          </p:spPr>
+          <p:txBody>
+            <a:bodyPr wrap="none" lIns="0" tIns="0" rIns="0" bIns="0" anchor="t" anchorCtr="0">
+              <a:spAutoFit/>
+            </a:bodyPr>
+            <a:lstStyle/>
+            <a:p>
+              <a:pPr algn="l"/>
+              <a:r>
+                <a:rPr lang="zh-CN" sz="1050" b="1" dirty="0">
+                  <a:solidFill>
+                    <a:srgbClr val="A33B27"/>
+                  </a:solidFill>
+                  <a:latin typeface="+mn-lt"/>
+                  <a:ea typeface="+mn-ea"/>
+                  <a:cs typeface="+mn-cs"/>
+                </a:rPr>
+                <a:t>坑 2：要求用户换设备，却没带来十倍省事</a:t>
+              </a:r>
+            </a:p>
+          </p:txBody>
+        </p:sp>
+        <p:sp>
+          <p:nvSpPr>
+            <p:cNvPr id="30" name="TextBox 30"/>
+            <p:cNvSpPr txBox="1"/>
+            <p:nvPr/>
+          </p:nvSpPr>
+          <p:spPr>
+            <a:xfrm>
+              <a:off x="566166" y="4064000"/>
+              <a:ext cx="4120029" cy="205359"/>
+            </a:xfrm>
+            <a:prstGeom prst="rect">
+              <a:avLst/>
+            </a:prstGeom>
+            <a:noFill/>
+            <a:ln>
+              <a:noFill/>
+            </a:ln>
+          </p:spPr>
+          <p:txBody>
+            <a:bodyPr wrap="none" lIns="0" tIns="0" rIns="0" bIns="0" anchor="t" anchorCtr="0">
+              <a:spAutoFit/>
+            </a:bodyPr>
+            <a:lstStyle/>
+            <a:p>
+              <a:pPr algn="l"/>
+              <a:r>
+                <a:rPr lang="zh-CN" sz="1050" dirty="0">
+                  <a:solidFill>
+                    <a:srgbClr val="3F3B35"/>
+                  </a:solidFill>
+                  <a:latin typeface="+mn-lt"/>
+                  <a:ea typeface="+mn-ea"/>
+                  <a:cs typeface="+mn-cs"/>
+                </a:rPr>
+                <a:t>Glass、Stories、Humane、Rabbit 都在提醒：新入口不是需求。</a:t>
+              </a:r>
+            </a:p>
+          </p:txBody>
+        </p:sp>
+        <p:sp>
+          <p:nvSpPr>
+            <p:cNvPr id="31" name="TextBox 31"/>
+            <p:cNvSpPr txBox="1"/>
+            <p:nvPr/>
+          </p:nvSpPr>
+          <p:spPr>
+            <a:xfrm>
+              <a:off x="566547" y="4305300"/>
+              <a:ext cx="3176168" cy="191643"/>
+            </a:xfrm>
+            <a:prstGeom prst="rect">
+              <a:avLst/>
+            </a:prstGeom>
+            <a:noFill/>
+            <a:ln>
+              <a:noFill/>
+            </a:ln>
+          </p:spPr>
+          <p:txBody>
+            <a:bodyPr wrap="none" lIns="0" tIns="0" rIns="0" bIns="0" anchor="t" anchorCtr="0">
+              <a:spAutoFit/>
+            </a:bodyPr>
+            <a:lstStyle/>
+            <a:p>
+              <a:pPr algn="l"/>
+              <a:r>
+                <a:rPr lang="zh-CN" sz="980" dirty="0">
+                  <a:solidFill>
+                    <a:srgbClr val="6B6760"/>
+                  </a:solidFill>
+                  <a:latin typeface="+mn-lt"/>
+                  <a:ea typeface="+mn-ea"/>
+                  <a:cs typeface="+mn-cs"/>
+                </a:rPr>
+                <a:t>用户不会为了新奇长期忍受充电、配对、隐私和失败。</a:t>
+              </a:r>
+            </a:p>
+          </p:txBody>
+        </p:sp>
+        <p:sp>
+          <p:nvSpPr>
+            <p:cNvPr id="32" name="TextBox 32"/>
+            <p:cNvSpPr txBox="1"/>
+            <p:nvPr/>
+          </p:nvSpPr>
+          <p:spPr>
+            <a:xfrm>
+              <a:off x="6471666" y="3816350"/>
+              <a:ext cx="3261741" cy="205359"/>
+            </a:xfrm>
+            <a:prstGeom prst="rect">
+              <a:avLst/>
+            </a:prstGeom>
+            <a:noFill/>
+            <a:ln>
+              <a:noFill/>
+            </a:ln>
+          </p:spPr>
+          <p:txBody>
+            <a:bodyPr wrap="none" lIns="0" tIns="0" rIns="0" bIns="0" anchor="t" anchorCtr="0">
+              <a:spAutoFit/>
+            </a:bodyPr>
+            <a:lstStyle/>
+            <a:p>
+              <a:pPr algn="l"/>
+              <a:r>
+                <a:rPr lang="zh-CN" sz="1050" b="1" dirty="0">
+                  <a:solidFill>
+                    <a:srgbClr val="1F5A49"/>
+                  </a:solidFill>
+                  <a:latin typeface="+mn-lt"/>
+                  <a:ea typeface="+mn-ea"/>
+                  <a:cs typeface="+mn-cs"/>
+                </a:rPr>
+                <a:t>启示：优先寄生现有手机、眼镜、车机、电视入口。</a:t>
+              </a:r>
+            </a:p>
+          </p:txBody>
+        </p:sp>
+        <p:sp>
+          <p:nvSpPr>
+            <p:cNvPr id="33" name="TextBox 33"/>
+            <p:cNvSpPr txBox="1"/>
+            <p:nvPr/>
+          </p:nvSpPr>
+          <p:spPr>
+            <a:xfrm>
+              <a:off x="6471666" y="4064000"/>
+              <a:ext cx="3558578" cy="205359"/>
+            </a:xfrm>
+            <a:prstGeom prst="rect">
+              <a:avLst/>
+            </a:prstGeom>
+            <a:noFill/>
+            <a:ln>
+              <a:noFill/>
+            </a:ln>
+          </p:spPr>
+          <p:txBody>
+            <a:bodyPr wrap="none" lIns="0" tIns="0" rIns="0" bIns="0" anchor="t" anchorCtr="0">
+              <a:spAutoFit/>
+            </a:bodyPr>
+            <a:lstStyle/>
+            <a:p>
+              <a:pPr algn="l"/>
+              <a:r>
+                <a:rPr lang="zh-CN" sz="1050" dirty="0">
+                  <a:solidFill>
+                    <a:srgbClr val="3F3B35"/>
+                  </a:solidFill>
+                  <a:latin typeface="+mn-lt"/>
+                  <a:ea typeface="+mn-ea"/>
+                  <a:cs typeface="+mn-cs"/>
+                </a:rPr>
+                <a:t>新硬件必须回答“为什么手机做不了、为什么现在要买”。</a:t>
+              </a:r>
+            </a:p>
+          </p:txBody>
+        </p:sp>
+        <p:sp>
+          <p:nvSpPr>
+            <p:cNvPr id="34" name="Line 34"/>
+            <p:cNvSpPr/>
+            <p:nvPr/>
+          </p:nvSpPr>
+          <p:spPr>
+            <a:xfrm>
+              <a:off x="571500" y="4629150"/>
+              <a:ext cx="11049000" cy="9525"/>
+            </a:xfrm>
+            <a:custGeom>
+              <a:avLst/>
+              <a:gdLst/>
+              <a:ahLst/>
+              <a:cxnLst/>
+              <a:rect l="l" t="t" r="r" b="b"/>
+              <a:pathLst>
+                <a:path w="11049000" h="9525">
+                  <a:moveTo>
+                    <a:pt x="0" y="0"/>
+                  </a:moveTo>
+                  <a:lnTo>
+                    <a:pt x="11049000" y="0"/>
+                  </a:lnTo>
+                </a:path>
+              </a:pathLst>
+            </a:custGeom>
+            <a:noFill/>
+            <a:ln w="9525">
+              <a:solidFill>
+                <a:srgbClr val="D6CFC3"/>
+              </a:solidFill>
+            </a:ln>
+          </p:spPr>
+        </p:sp>
+        <p:sp>
+          <p:nvSpPr>
+            <p:cNvPr id="35" name="TextBox 35"/>
+            <p:cNvSpPr txBox="1"/>
+            <p:nvPr/>
+          </p:nvSpPr>
+          <p:spPr>
+            <a:xfrm>
+              <a:off x="566166" y="4806950"/>
+              <a:ext cx="2822493" cy="205359"/>
+            </a:xfrm>
+            <a:prstGeom prst="rect">
+              <a:avLst/>
+            </a:prstGeom>
+            <a:noFill/>
+            <a:ln>
+              <a:noFill/>
+            </a:ln>
+          </p:spPr>
+          <p:txBody>
+            <a:bodyPr wrap="none" lIns="0" tIns="0" rIns="0" bIns="0" anchor="t" anchorCtr="0">
+              <a:spAutoFit/>
+            </a:bodyPr>
+            <a:lstStyle/>
+            <a:p>
+              <a:pPr algn="l"/>
+              <a:r>
+                <a:rPr lang="zh-CN" sz="1050" b="1" dirty="0">
+                  <a:solidFill>
+                    <a:srgbClr val="A33B27"/>
+                  </a:solidFill>
+                  <a:latin typeface="+mn-lt"/>
+                  <a:ea typeface="+mn-ea"/>
+                  <a:cs typeface="+mn-cs"/>
+                </a:rPr>
+                <a:t>坑 3：把演示当稳定体验，把下载当长期采用</a:t>
+              </a:r>
+            </a:p>
+          </p:txBody>
+        </p:sp>
+        <p:sp>
+          <p:nvSpPr>
+            <p:cNvPr id="36" name="TextBox 36"/>
+            <p:cNvSpPr txBox="1"/>
+            <p:nvPr/>
+          </p:nvSpPr>
+          <p:spPr>
+            <a:xfrm>
+              <a:off x="566166" y="5054600"/>
+              <a:ext cx="3827145" cy="205359"/>
+            </a:xfrm>
+            <a:prstGeom prst="rect">
+              <a:avLst/>
+            </a:prstGeom>
+            <a:noFill/>
+            <a:ln>
+              <a:noFill/>
+            </a:ln>
+          </p:spPr>
+          <p:txBody>
+            <a:bodyPr wrap="none" lIns="0" tIns="0" rIns="0" bIns="0" anchor="t" anchorCtr="0">
+              <a:spAutoFit/>
+            </a:bodyPr>
+            <a:lstStyle/>
+            <a:p>
+              <a:pPr algn="l"/>
+              <a:r>
+                <a:rPr lang="zh-CN" sz="1050" dirty="0">
+                  <a:solidFill>
+                    <a:srgbClr val="3F3B35"/>
+                  </a:solidFill>
+                  <a:latin typeface="+mn-lt"/>
+                  <a:ea typeface="+mn-ea"/>
+                  <a:cs typeface="+mn-cs"/>
+                </a:rPr>
+                <a:t>背景噪声、错识别、断网、权限、支付和人工接管都会发生。</a:t>
+              </a:r>
+            </a:p>
+          </p:txBody>
+        </p:sp>
+        <p:sp>
+          <p:nvSpPr>
+            <p:cNvPr id="37" name="TextBox 37"/>
+            <p:cNvSpPr txBox="1"/>
+            <p:nvPr/>
+          </p:nvSpPr>
+          <p:spPr>
+            <a:xfrm>
+              <a:off x="566547" y="5295900"/>
+              <a:ext cx="3642956" cy="191643"/>
+            </a:xfrm>
+            <a:prstGeom prst="rect">
+              <a:avLst/>
+            </a:prstGeom>
+            <a:noFill/>
+            <a:ln>
+              <a:noFill/>
+            </a:ln>
+          </p:spPr>
+          <p:txBody>
+            <a:bodyPr wrap="none" lIns="0" tIns="0" rIns="0" bIns="0" anchor="t" anchorCtr="0">
+              <a:spAutoFit/>
+            </a:bodyPr>
+            <a:lstStyle/>
+            <a:p>
+              <a:pPr algn="l"/>
+              <a:r>
+                <a:rPr lang="zh-CN" sz="980" dirty="0">
+                  <a:solidFill>
+                    <a:srgbClr val="6B6760"/>
+                  </a:solidFill>
+                  <a:latin typeface="+mn-lt"/>
+                  <a:ea typeface="+mn-ea"/>
+                  <a:cs typeface="+mn-cs"/>
+                </a:rPr>
+                <a:t>Muse 有 1000 万设置，但留存、退货、责任和费率仍需验证。</a:t>
+              </a:r>
+            </a:p>
+          </p:txBody>
+        </p:sp>
+        <p:sp>
+          <p:nvSpPr>
+            <p:cNvPr id="38" name="TextBox 38"/>
+            <p:cNvSpPr txBox="1"/>
+            <p:nvPr/>
+          </p:nvSpPr>
+          <p:spPr>
+            <a:xfrm>
+              <a:off x="6471666" y="4806950"/>
+              <a:ext cx="2130933" cy="205359"/>
+            </a:xfrm>
+            <a:prstGeom prst="rect">
+              <a:avLst/>
+            </a:prstGeom>
+            <a:noFill/>
+            <a:ln>
+              <a:noFill/>
+            </a:ln>
+          </p:spPr>
+          <p:txBody>
+            <a:bodyPr wrap="none" lIns="0" tIns="0" rIns="0" bIns="0" anchor="t" anchorCtr="0">
+              <a:spAutoFit/>
+            </a:bodyPr>
+            <a:lstStyle/>
+            <a:p>
+              <a:pPr algn="l"/>
+              <a:r>
+                <a:rPr lang="zh-CN" sz="1050" b="1" dirty="0">
+                  <a:solidFill>
+                    <a:srgbClr val="1F5A49"/>
+                  </a:solidFill>
+                  <a:latin typeface="+mn-lt"/>
+                  <a:ea typeface="+mn-ea"/>
+                  <a:cs typeface="+mn-cs"/>
+                </a:rPr>
+                <a:t>启示：产品能力必须带失败路径。</a:t>
+              </a:r>
+            </a:p>
+          </p:txBody>
+        </p:sp>
+        <p:sp>
+          <p:nvSpPr>
+            <p:cNvPr id="39" name="TextBox 39"/>
+            <p:cNvSpPr txBox="1"/>
+            <p:nvPr/>
+          </p:nvSpPr>
+          <p:spPr>
+            <a:xfrm>
+              <a:off x="6471666" y="5054600"/>
+              <a:ext cx="3685794" cy="205359"/>
+            </a:xfrm>
+            <a:prstGeom prst="rect">
+              <a:avLst/>
+            </a:prstGeom>
+            <a:noFill/>
+            <a:ln>
+              <a:noFill/>
+            </a:ln>
+          </p:spPr>
+          <p:txBody>
+            <a:bodyPr wrap="none" lIns="0" tIns="0" rIns="0" bIns="0" anchor="t" anchorCtr="0">
+              <a:spAutoFit/>
+            </a:bodyPr>
+            <a:lstStyle/>
+            <a:p>
+              <a:pPr algn="l"/>
+              <a:r>
+                <a:rPr lang="zh-CN" sz="1050" dirty="0">
+                  <a:solidFill>
+                    <a:srgbClr val="3F3B35"/>
+                  </a:solidFill>
+                  <a:latin typeface="+mn-lt"/>
+                  <a:ea typeface="+mn-ea"/>
+                  <a:cs typeface="+mn-cs"/>
+                </a:rPr>
+                <a:t>确认、拒答、重来、转人工、撤销、审计，才是完整体验。</a:t>
+              </a:r>
+            </a:p>
+          </p:txBody>
+        </p:sp>
+        <p:sp>
+          <p:nvSpPr>
+            <p:cNvPr id="40" name="Line 40"/>
+            <p:cNvSpPr/>
+            <p:nvPr/>
+          </p:nvSpPr>
+          <p:spPr>
+            <a:xfrm>
+              <a:off x="571500" y="5619750"/>
+              <a:ext cx="11049000" cy="9525"/>
+            </a:xfrm>
+            <a:custGeom>
+              <a:avLst/>
+              <a:gdLst/>
+              <a:ahLst/>
+              <a:cxnLst/>
+              <a:rect l="l" t="t" r="r" b="b"/>
+              <a:pathLst>
+                <a:path w="11049000" h="9525">
+                  <a:moveTo>
+                    <a:pt x="0" y="0"/>
+                  </a:moveTo>
+                  <a:lnTo>
+                    <a:pt x="11049000" y="0"/>
+                  </a:lnTo>
+                </a:path>
+              </a:pathLst>
+            </a:custGeom>
+            <a:noFill/>
+            <a:ln w="9525">
+              <a:solidFill>
+                <a:srgbClr val="C9C1B4"/>
+              </a:solidFill>
+            </a:ln>
+          </p:spPr>
+        </p:sp>
+        <p:sp>
+          <p:nvSpPr>
+            <p:cNvPr id="41" name="TextBox 41"/>
+            <p:cNvSpPr txBox="1"/>
+            <p:nvPr/>
+          </p:nvSpPr>
+          <p:spPr>
+            <a:xfrm>
+              <a:off x="563499" y="5702300"/>
+              <a:ext cx="7691969" cy="308991"/>
+            </a:xfrm>
+            <a:prstGeom prst="rect">
+              <a:avLst/>
+            </a:prstGeom>
+            <a:noFill/>
+            <a:ln>
+              <a:noFill/>
+            </a:ln>
+          </p:spPr>
+          <p:txBody>
+            <a:bodyPr wrap="none" lIns="0" tIns="0" rIns="0" bIns="0" anchor="t" anchorCtr="0">
+              <a:spAutoFit/>
+            </a:bodyPr>
+            <a:lstStyle/>
+            <a:p>
+              <a:pPr algn="l"/>
+              <a:r>
+                <a:rPr lang="zh-CN" sz="1580" b="1" dirty="0">
+                  <a:solidFill>
+                    <a:srgbClr val="1D1C19"/>
+                  </a:solidFill>
+                  <a:latin typeface="+mj-lt"/>
+                  <a:ea typeface="+mj-ea"/>
+                  <a:cs typeface="+mj-cs"/>
+                </a:rPr>
+                <a:t>分：真正留下来的产品，都是把“理解、执行、纠错、信任”一起做成了系统。</a:t>
+              </a:r>
+            </a:p>
+          </p:txBody>
+        </p:sp>
+      </p:grpSp>
+      <p:grpSp>
+        <p:nvGrpSpPr>
+          <p:cNvPr id="45" name="page-footer"/>
+          <p:cNvGrpSpPr/>
+          <p:nvPr/>
+        </p:nvGrpSpPr>
+        <p:grpSpPr>
+          <a:xfrm>
+            <a:off x="566738" y="6286500"/>
+            <a:ext cx="11058525" cy="176212"/>
+            <a:chOff x="566738" y="6286500"/>
+            <a:chExt cx="11058525" cy="176212"/>
+          </a:xfrm>
+        </p:grpSpPr>
+        <p:sp>
+          <p:nvSpPr>
+            <p:cNvPr id="43" name="TextBox 43"/>
+            <p:cNvSpPr txBox="1"/>
+            <p:nvPr/>
+          </p:nvSpPr>
+          <p:spPr>
+            <a:xfrm>
+              <a:off x="566738" y="6286500"/>
+              <a:ext cx="3140545" cy="176212"/>
+            </a:xfrm>
+            <a:prstGeom prst="rect">
+              <a:avLst/>
+            </a:prstGeom>
+            <a:noFill/>
+            <a:ln>
+              <a:noFill/>
+            </a:ln>
+          </p:spPr>
+          <p:txBody>
+            <a:bodyPr wrap="none" lIns="0" tIns="0" rIns="0" bIns="0" anchor="t" anchorCtr="0">
+              <a:spAutoFit/>
+            </a:bodyPr>
+            <a:lstStyle/>
+            <a:p>
+              <a:pPr algn="l"/>
+              <a:r>
+                <a:rPr lang="zh-CN" sz="900" dirty="0">
+                  <a:solidFill>
+                    <a:srgbClr val="7A756D"/>
+                  </a:solidFill>
+                  <a:latin typeface="+mn-lt"/>
+                  <a:ea typeface="+mn-ea"/>
+                  <a:cs typeface="+mn-cs"/>
+                </a:rPr>
+                <a:t>补页 04 / 05 · 综合历史竞品、失败案例与新增 Muse 证据</a:t>
+              </a:r>
+            </a:p>
+          </p:txBody>
+        </p:sp>
+        <p:sp>
+          <p:nvSpPr>
+            <p:cNvPr id="44" name="TextBox 44"/>
+            <p:cNvSpPr txBox="1"/>
+            <p:nvPr/>
+          </p:nvSpPr>
+          <p:spPr>
+            <a:xfrm>
+              <a:off x="11225289" y="6286500"/>
+              <a:ext cx="399974" cy="176212"/>
+            </a:xfrm>
+            <a:prstGeom prst="rect">
+              <a:avLst/>
+            </a:prstGeom>
+            <a:noFill/>
+            <a:ln>
+              <a:noFill/>
+            </a:ln>
+          </p:spPr>
+          <p:txBody>
+            <a:bodyPr wrap="none" lIns="0" tIns="0" rIns="0" bIns="0" anchor="t" anchorCtr="0">
+              <a:spAutoFit/>
+            </a:bodyPr>
+            <a:lstStyle/>
+            <a:p>
+              <a:pPr algn="r"/>
+              <a:r>
+                <a:rPr lang="en-US" sz="900" dirty="0">
+                  <a:solidFill>
+                    <a:srgbClr val="7A756D"/>
+                  </a:solidFill>
+                  <a:latin typeface="+mn-lt"/>
+                  <a:ea typeface="+mn-ea"/>
+                  <a:cs typeface="+mn-cs"/>
+                </a:rPr>
+                <a:t>EXT 04</a:t>
+              </a:r>
+            </a:p>
+          </p:txBody>
+        </p:sp>
+      </p:grpSp>
+    </p:spTree>
+  </p:cSld>
+  <p:clrMapOvr>
+    <a:masterClrMapping/>
+  </p:clrMapOvr>
+  <p:transition xmlns:p14="http://schemas.microsoft.com/office/powerpoint/2010/main" p14:dur="400">
+    <p:fade/>
+  </p:transition>
+</p:sld>
+</file>
+
+<file path=ppt/slides/slide26.xml><?xml version="1.0" encoding="utf-8"?>
+<p:sld xmlns:a="http://schemas.openxmlformats.org/drawingml/2006/main" xmlns:r="http://schemas.openxmlformats.org/officeDocument/2006/relationships" xmlns:p="http://schemas.openxmlformats.org/presentationml/2006/main">
+  <p:cSld>
+    <p:bg>
+      <p:bgPr>
+        <a:solidFill>
+          <a:srgbClr val="F4F0E7"/>
+        </a:solidFill>
+        <a:effectLst/>
+      </p:bgPr>
+    </p:bg>
+    <p:spTree>
+      <p:nvGrpSpPr>
+        <p:cNvPr id="1" name=""/>
+        <p:cNvGrpSpPr/>
+        <p:nvPr/>
+      </p:nvGrpSpPr>
+      <p:grpSpPr>
+        <a:xfrm>
+          <a:off x="0" y="0"/>
+          <a:ext cx="0" cy="0"/>
+          <a:chOff x="0" y="0"/>
+          <a:chExt cx="0" cy="0"/>
+        </a:xfrm>
+      </p:grpSpPr>
+      <p:grpSp>
+        <p:nvGrpSpPr>
+          <p:cNvPr id="4" name="page-title"/>
+          <p:cNvGrpSpPr/>
+          <p:nvPr/>
+        </p:nvGrpSpPr>
+        <p:grpSpPr>
+          <a:xfrm>
+            <a:off x="559308" y="273050"/>
+            <a:ext cx="7259422" cy="659892"/>
+            <a:chOff x="559308" y="273050"/>
+            <a:chExt cx="7259422" cy="659892"/>
+          </a:xfrm>
+        </p:grpSpPr>
+        <p:sp>
+          <p:nvSpPr>
+            <p:cNvPr id="2" name="TextBox 2"/>
+            <p:cNvSpPr txBox="1"/>
+            <p:nvPr/>
+          </p:nvSpPr>
+          <p:spPr>
+            <a:xfrm>
+              <a:off x="566166" y="273050"/>
+              <a:ext cx="1780166" cy="205359"/>
+            </a:xfrm>
+            <a:prstGeom prst="rect">
+              <a:avLst/>
+            </a:prstGeom>
+            <a:noFill/>
+            <a:ln>
+              <a:noFill/>
+            </a:ln>
+          </p:spPr>
+          <p:txBody>
+            <a:bodyPr wrap="none" lIns="0" tIns="0" rIns="0" bIns="0" anchor="t" anchorCtr="0">
+              <a:spAutoFit/>
+            </a:bodyPr>
+            <a:lstStyle/>
+            <a:p>
+              <a:pPr algn="l"/>
+              <a:r>
+                <a:rPr lang="zh-CN" sz="1050" b="1" spc="150" dirty="0">
+                  <a:solidFill>
+                    <a:srgbClr val="C14E2C"/>
+                  </a:solidFill>
+                  <a:latin typeface="+mn-lt"/>
+                  <a:ea typeface="+mn-ea"/>
+                  <a:cs typeface="+mn-cs"/>
+                </a:rPr>
+                <a:t>补页 05 · 云核心网机会</a:t>
+              </a:r>
+            </a:p>
+          </p:txBody>
+        </p:sp>
+        <p:sp>
+          <p:nvSpPr>
+            <p:cNvPr id="3" name="TextBox 3"/>
+            <p:cNvSpPr txBox="1"/>
+            <p:nvPr/>
+          </p:nvSpPr>
+          <p:spPr>
+            <a:xfrm>
+              <a:off x="559308" y="463550"/>
+              <a:ext cx="7259422" cy="469392"/>
+            </a:xfrm>
+            <a:prstGeom prst="rect">
+              <a:avLst/>
+            </a:prstGeom>
+            <a:noFill/>
+            <a:ln>
+              <a:noFill/>
+            </a:ln>
+          </p:spPr>
+          <p:txBody>
+            <a:bodyPr wrap="none" lIns="0" tIns="0" rIns="0" bIns="0" anchor="t" anchorCtr="0">
+              <a:spAutoFit/>
+            </a:bodyPr>
+            <a:lstStyle/>
+            <a:p>
+              <a:pPr algn="l"/>
+              <a:r>
+                <a:rPr lang="zh-CN" sz="2400" b="1" dirty="0">
+                  <a:solidFill>
+                    <a:srgbClr val="1D1C19"/>
+                  </a:solidFill>
+                  <a:latin typeface="+mj-lt"/>
+                  <a:ea typeface="+mj-ea"/>
+                  <a:cs typeface="+mj-cs"/>
+                </a:rPr>
+                <a:t>不要再做多模态 App，做它依赖的实时交互底座</a:t>
+              </a:r>
+            </a:p>
+          </p:txBody>
+        </p:sp>
+      </p:grpSp>
+      <p:grpSp>
+        <p:nvGrpSpPr>
+          <p:cNvPr id="44" name="cloud-core-future"/>
+          <p:cNvGrpSpPr/>
+          <p:nvPr/>
+        </p:nvGrpSpPr>
+        <p:grpSpPr>
+          <a:xfrm>
+            <a:off x="563499" y="1270000"/>
+            <a:ext cx="11057001" cy="4665091"/>
+            <a:chOff x="563499" y="1270000"/>
+            <a:chExt cx="11057001" cy="4665091"/>
+          </a:xfrm>
+        </p:grpSpPr>
+        <p:sp>
+          <p:nvSpPr>
+            <p:cNvPr id="5" name="TextBox 5"/>
+            <p:cNvSpPr txBox="1"/>
+            <p:nvPr/>
+          </p:nvSpPr>
+          <p:spPr>
+            <a:xfrm>
+              <a:off x="565785" y="1270000"/>
+              <a:ext cx="5749961" cy="220028"/>
+            </a:xfrm>
+            <a:prstGeom prst="rect">
+              <a:avLst/>
+            </a:prstGeom>
+            <a:noFill/>
+            <a:ln>
+              <a:noFill/>
+            </a:ln>
+          </p:spPr>
+          <p:txBody>
+            <a:bodyPr wrap="none" lIns="0" tIns="0" rIns="0" bIns="0" anchor="t" anchorCtr="0">
+              <a:spAutoFit/>
+            </a:bodyPr>
+            <a:lstStyle/>
+            <a:p>
+              <a:pPr algn="l"/>
+              <a:r>
+                <a:rPr lang="zh-CN" sz="1120" dirty="0">
+                  <a:solidFill>
+                    <a:srgbClr val="4D4942"/>
+                  </a:solidFill>
+                  <a:latin typeface="+mn-lt"/>
+                  <a:ea typeface="+mn-ea"/>
+                  <a:cs typeface="+mn-cs"/>
+                </a:rPr>
+                <a:t>我们的优势不在再训练一个模型，而在连接、会话、时延、边缘、身份、权限和 SLA。</a:t>
+              </a:r>
+            </a:p>
+          </p:txBody>
+        </p:sp>
+        <p:sp>
+          <p:nvSpPr>
+            <p:cNvPr id="6" name="Rectangle 6"/>
+            <p:cNvSpPr/>
+            <p:nvPr/>
+          </p:nvSpPr>
+          <p:spPr>
+            <a:xfrm>
+              <a:off x="571500" y="1638300"/>
+              <a:ext cx="2476500" cy="1104900"/>
+            </a:xfrm>
+            <a:prstGeom prst="rect">
+              <a:avLst/>
+            </a:prstGeom>
+            <a:solidFill>
+              <a:srgbClr val="1D1C19"/>
+            </a:solidFill>
+            <a:ln>
+              <a:noFill/>
+            </a:ln>
+          </p:spPr>
+        </p:sp>
+        <p:sp>
+          <p:nvSpPr>
+            <p:cNvPr id="7" name="TextBox 7"/>
+            <p:cNvSpPr txBox="1"/>
+            <p:nvPr/>
+          </p:nvSpPr>
+          <p:spPr>
+            <a:xfrm>
+              <a:off x="737235" y="1784350"/>
+              <a:ext cx="765302" cy="220028"/>
+            </a:xfrm>
+            <a:prstGeom prst="rect">
+              <a:avLst/>
+            </a:prstGeom>
+            <a:noFill/>
+            <a:ln>
+              <a:noFill/>
+            </a:ln>
+          </p:spPr>
+          <p:txBody>
+            <a:bodyPr wrap="none" lIns="0" tIns="0" rIns="0" bIns="0" anchor="t" anchorCtr="0">
+              <a:spAutoFit/>
+            </a:bodyPr>
+            <a:lstStyle/>
+            <a:p>
+              <a:pPr algn="l"/>
+              <a:r>
+                <a:rPr lang="zh-CN" sz="1120" b="1" dirty="0">
+                  <a:solidFill>
+                    <a:srgbClr val="F4F0E7"/>
+                  </a:solidFill>
+                  <a:latin typeface="+mn-lt"/>
+                  <a:ea typeface="+mn-ea"/>
+                  <a:cs typeface="+mn-cs"/>
+                </a:rPr>
+                <a:t>实时媒体面</a:t>
+              </a:r>
+            </a:p>
+          </p:txBody>
+        </p:sp>
+        <p:sp>
+          <p:nvSpPr>
+            <p:cNvPr id="8" name="TextBox 8"/>
+            <p:cNvSpPr txBox="1"/>
+            <p:nvPr/>
+          </p:nvSpPr>
+          <p:spPr>
+            <a:xfrm>
+              <a:off x="737997" y="2057400"/>
+              <a:ext cx="1593037" cy="191643"/>
+            </a:xfrm>
+            <a:prstGeom prst="rect">
+              <a:avLst/>
+            </a:prstGeom>
+            <a:noFill/>
+            <a:ln>
+              <a:noFill/>
+            </a:ln>
+          </p:spPr>
+          <p:txBody>
+            <a:bodyPr wrap="none" lIns="0" tIns="0" rIns="0" bIns="0" anchor="t" anchorCtr="0">
+              <a:spAutoFit/>
+            </a:bodyPr>
+            <a:lstStyle/>
+            <a:p>
+              <a:pPr algn="l"/>
+              <a:r>
+                <a:rPr lang="zh-CN" sz="980" dirty="0">
+                  <a:solidFill>
+                    <a:srgbClr val="F4F0E7"/>
+                  </a:solidFill>
+                  <a:latin typeface="+mn-lt"/>
+                  <a:ea typeface="+mn-ea"/>
+                  <a:cs typeface="+mn-cs"/>
+                </a:rPr>
+                <a:t>音视频上行、抖动、丢包、</a:t>
+              </a:r>
+            </a:p>
+          </p:txBody>
+        </p:sp>
+        <p:sp>
+          <p:nvSpPr>
+            <p:cNvPr id="9" name="TextBox 9"/>
+            <p:cNvSpPr txBox="1"/>
+            <p:nvPr/>
+          </p:nvSpPr>
+          <p:spPr>
+            <a:xfrm>
+              <a:off x="737997" y="2266950"/>
+              <a:ext cx="1197254" cy="191643"/>
+            </a:xfrm>
+            <a:prstGeom prst="rect">
+              <a:avLst/>
+            </a:prstGeom>
+            <a:noFill/>
+            <a:ln>
+              <a:noFill/>
+            </a:ln>
+          </p:spPr>
+          <p:txBody>
+            <a:bodyPr wrap="none" lIns="0" tIns="0" rIns="0" bIns="0" anchor="t" anchorCtr="0">
+              <a:spAutoFit/>
+            </a:bodyPr>
+            <a:lstStyle/>
+            <a:p>
+              <a:pPr algn="l"/>
+              <a:r>
+                <a:rPr lang="zh-CN" sz="980" dirty="0">
+                  <a:solidFill>
+                    <a:srgbClr val="F4F0E7"/>
+                  </a:solidFill>
+                  <a:latin typeface="+mn-lt"/>
+                  <a:ea typeface="+mn-ea"/>
+                  <a:cs typeface="+mn-cs"/>
+                </a:rPr>
+                <a:t>多方混流、弱网切换</a:t>
+              </a:r>
+            </a:p>
+          </p:txBody>
+        </p:sp>
+        <p:sp>
+          <p:nvSpPr>
+            <p:cNvPr id="10" name="TextBox 10"/>
+            <p:cNvSpPr txBox="1"/>
+            <p:nvPr/>
+          </p:nvSpPr>
+          <p:spPr>
+            <a:xfrm>
+              <a:off x="738188" y="2495550"/>
+              <a:ext cx="1342263" cy="176212"/>
+            </a:xfrm>
+            <a:prstGeom prst="rect">
+              <a:avLst/>
+            </a:prstGeom>
+            <a:noFill/>
+            <a:ln>
+              <a:noFill/>
+            </a:ln>
+          </p:spPr>
+          <p:txBody>
+            <a:bodyPr wrap="none" lIns="0" tIns="0" rIns="0" bIns="0" anchor="t" anchorCtr="0">
+              <a:spAutoFit/>
+            </a:bodyPr>
+            <a:lstStyle/>
+            <a:p>
+              <a:pPr algn="l"/>
+              <a:r>
+                <a:rPr lang="zh-CN" sz="900" dirty="0">
+                  <a:solidFill>
+                    <a:srgbClr val="C9C1B4"/>
+                  </a:solidFill>
+                  <a:latin typeface="+mn-lt"/>
+                  <a:ea typeface="+mn-ea"/>
+                  <a:cs typeface="+mn-cs"/>
+                </a:rPr>
+                <a:t>卖点：可承诺的体验质量</a:t>
+              </a:r>
+            </a:p>
+          </p:txBody>
+        </p:sp>
+        <p:sp>
+          <p:nvSpPr>
+            <p:cNvPr id="11" name="Rectangle 11"/>
+            <p:cNvSpPr/>
+            <p:nvPr/>
+          </p:nvSpPr>
+          <p:spPr>
+            <a:xfrm>
+              <a:off x="3200400" y="1638300"/>
+              <a:ext cx="2476500" cy="1104900"/>
+            </a:xfrm>
+            <a:prstGeom prst="rect">
+              <a:avLst/>
+            </a:prstGeom>
+            <a:solidFill>
+              <a:srgbClr val="1F5A49"/>
+            </a:solidFill>
+            <a:ln>
+              <a:noFill/>
+            </a:ln>
+          </p:spPr>
+        </p:sp>
+        <p:sp>
+          <p:nvSpPr>
+            <p:cNvPr id="12" name="TextBox 12"/>
+            <p:cNvSpPr txBox="1"/>
+            <p:nvPr/>
+          </p:nvSpPr>
+          <p:spPr>
+            <a:xfrm>
+              <a:off x="3366135" y="1784350"/>
+              <a:ext cx="765302" cy="220028"/>
+            </a:xfrm>
+            <a:prstGeom prst="rect">
+              <a:avLst/>
+            </a:prstGeom>
+            <a:noFill/>
+            <a:ln>
+              <a:noFill/>
+            </a:ln>
+          </p:spPr>
+          <p:txBody>
+            <a:bodyPr wrap="none" lIns="0" tIns="0" rIns="0" bIns="0" anchor="t" anchorCtr="0">
+              <a:spAutoFit/>
+            </a:bodyPr>
+            <a:lstStyle/>
+            <a:p>
+              <a:pPr algn="l"/>
+              <a:r>
+                <a:rPr lang="zh-CN" sz="1120" b="1" dirty="0">
+                  <a:solidFill>
+                    <a:srgbClr val="F4F0E7"/>
+                  </a:solidFill>
+                  <a:latin typeface="+mn-lt"/>
+                  <a:ea typeface="+mn-ea"/>
+                  <a:cs typeface="+mn-cs"/>
+                </a:rPr>
+                <a:t>端边云协同</a:t>
+              </a:r>
+            </a:p>
+          </p:txBody>
+        </p:sp>
+        <p:sp>
+          <p:nvSpPr>
+            <p:cNvPr id="13" name="TextBox 13"/>
+            <p:cNvSpPr txBox="1"/>
+            <p:nvPr/>
+          </p:nvSpPr>
+          <p:spPr>
+            <a:xfrm>
+              <a:off x="3366897" y="2057400"/>
+              <a:ext cx="1342375" cy="191643"/>
+            </a:xfrm>
+            <a:prstGeom prst="rect">
+              <a:avLst/>
+            </a:prstGeom>
+            <a:noFill/>
+            <a:ln>
+              <a:noFill/>
+            </a:ln>
+          </p:spPr>
+          <p:txBody>
+            <a:bodyPr wrap="none" lIns="0" tIns="0" rIns="0" bIns="0" anchor="t" anchorCtr="0">
+              <a:spAutoFit/>
+            </a:bodyPr>
+            <a:lstStyle/>
+            <a:p>
+              <a:pPr algn="l"/>
+              <a:r>
+                <a:rPr lang="zh-CN" sz="980" dirty="0">
+                  <a:solidFill>
+                    <a:srgbClr val="F4F0E7"/>
+                  </a:solidFill>
+                  <a:latin typeface="+mn-lt"/>
+                  <a:ea typeface="+mn-ea"/>
+                  <a:cs typeface="+mn-cs"/>
+                </a:rPr>
+                <a:t>端侧唤醒/脱敏/预筛；</a:t>
+              </a:r>
+            </a:p>
+          </p:txBody>
+        </p:sp>
+        <p:sp>
+          <p:nvSpPr>
+            <p:cNvPr id="14" name="TextBox 14"/>
+            <p:cNvSpPr txBox="1"/>
+            <p:nvPr/>
+          </p:nvSpPr>
+          <p:spPr>
+            <a:xfrm>
+              <a:off x="3366897" y="2266950"/>
+              <a:ext cx="1461110" cy="191643"/>
+            </a:xfrm>
+            <a:prstGeom prst="rect">
+              <a:avLst/>
+            </a:prstGeom>
+            <a:noFill/>
+            <a:ln>
+              <a:noFill/>
+            </a:ln>
+          </p:spPr>
+          <p:txBody>
+            <a:bodyPr wrap="none" lIns="0" tIns="0" rIns="0" bIns="0" anchor="t" anchorCtr="0">
+              <a:spAutoFit/>
+            </a:bodyPr>
+            <a:lstStyle/>
+            <a:p>
+              <a:pPr algn="l"/>
+              <a:r>
+                <a:rPr lang="zh-CN" sz="980" dirty="0">
+                  <a:solidFill>
+                    <a:srgbClr val="F4F0E7"/>
+                  </a:solidFill>
+                  <a:latin typeface="+mn-lt"/>
+                  <a:ea typeface="+mn-ea"/>
+                  <a:cs typeface="+mn-cs"/>
+                </a:rPr>
+                <a:t>边缘低延迟；云端长记忆</a:t>
+              </a:r>
+            </a:p>
+          </p:txBody>
+        </p:sp>
+        <p:sp>
+          <p:nvSpPr>
+            <p:cNvPr id="15" name="TextBox 15"/>
+            <p:cNvSpPr txBox="1"/>
+            <p:nvPr/>
+          </p:nvSpPr>
+          <p:spPr>
+            <a:xfrm>
+              <a:off x="3367088" y="2495550"/>
+              <a:ext cx="1584579" cy="176212"/>
+            </a:xfrm>
+            <a:prstGeom prst="rect">
+              <a:avLst/>
+            </a:prstGeom>
+            <a:noFill/>
+            <a:ln>
+              <a:noFill/>
+            </a:ln>
+          </p:spPr>
+          <p:txBody>
+            <a:bodyPr wrap="none" lIns="0" tIns="0" rIns="0" bIns="0" anchor="t" anchorCtr="0">
+              <a:spAutoFit/>
+            </a:bodyPr>
+            <a:lstStyle/>
+            <a:p>
+              <a:pPr algn="l"/>
+              <a:r>
+                <a:rPr lang="zh-CN" sz="900" dirty="0">
+                  <a:solidFill>
+                    <a:srgbClr val="E6EFEA"/>
+                  </a:solidFill>
+                  <a:latin typeface="+mn-lt"/>
+                  <a:ea typeface="+mn-ea"/>
+                  <a:cs typeface="+mn-cs"/>
+                </a:rPr>
+                <a:t>卖点：成本、隐私与时延平衡</a:t>
+              </a:r>
+            </a:p>
+          </p:txBody>
+        </p:sp>
+        <p:sp>
+          <p:nvSpPr>
+            <p:cNvPr id="16" name="Rectangle 16"/>
+            <p:cNvSpPr/>
+            <p:nvPr/>
+          </p:nvSpPr>
+          <p:spPr>
+            <a:xfrm>
+              <a:off x="5829300" y="1638300"/>
+              <a:ext cx="2476500" cy="1104900"/>
+            </a:xfrm>
+            <a:prstGeom prst="rect">
+              <a:avLst/>
+            </a:prstGeom>
+            <a:solidFill>
+              <a:srgbClr val="C14E2C"/>
+            </a:solidFill>
+            <a:ln>
+              <a:noFill/>
+            </a:ln>
+          </p:spPr>
+        </p:sp>
+        <p:sp>
+          <p:nvSpPr>
+            <p:cNvPr id="17" name="TextBox 17"/>
+            <p:cNvSpPr txBox="1"/>
+            <p:nvPr/>
+          </p:nvSpPr>
+          <p:spPr>
+            <a:xfrm>
+              <a:off x="5995035" y="1784350"/>
+              <a:ext cx="952074" cy="220028"/>
+            </a:xfrm>
+            <a:prstGeom prst="rect">
+              <a:avLst/>
+            </a:prstGeom>
+            <a:noFill/>
+            <a:ln>
+              <a:noFill/>
+            </a:ln>
+          </p:spPr>
+          <p:txBody>
+            <a:bodyPr wrap="none" lIns="0" tIns="0" rIns="0" bIns="0" anchor="t" anchorCtr="0">
+              <a:spAutoFit/>
+            </a:bodyPr>
+            <a:lstStyle/>
+            <a:p>
+              <a:pPr algn="l"/>
+              <a:r>
+                <a:rPr lang="zh-CN" sz="1120" b="1" dirty="0">
+                  <a:solidFill>
+                    <a:srgbClr val="F4F0E7"/>
+                  </a:solidFill>
+                  <a:latin typeface="+mn-lt"/>
+                  <a:ea typeface="+mn-ea"/>
+                  <a:cs typeface="+mn-cs"/>
+                </a:rPr>
+                <a:t>Agent 会话层</a:t>
+              </a:r>
+            </a:p>
+          </p:txBody>
+        </p:sp>
+        <p:sp>
+          <p:nvSpPr>
+            <p:cNvPr id="18" name="TextBox 18"/>
+            <p:cNvSpPr txBox="1"/>
+            <p:nvPr/>
+          </p:nvSpPr>
+          <p:spPr>
+            <a:xfrm>
+              <a:off x="5995797" y="2057400"/>
+              <a:ext cx="1461110" cy="191643"/>
+            </a:xfrm>
+            <a:prstGeom prst="rect">
+              <a:avLst/>
+            </a:prstGeom>
+            <a:noFill/>
+            <a:ln>
+              <a:noFill/>
+            </a:ln>
+          </p:spPr>
+          <p:txBody>
+            <a:bodyPr wrap="none" lIns="0" tIns="0" rIns="0" bIns="0" anchor="t" anchorCtr="0">
+              <a:spAutoFit/>
+            </a:bodyPr>
+            <a:lstStyle/>
+            <a:p>
+              <a:pPr algn="l"/>
+              <a:r>
+                <a:rPr lang="zh-CN" sz="980" dirty="0">
+                  <a:solidFill>
+                    <a:srgbClr val="F4F0E7"/>
+                  </a:solidFill>
+                  <a:latin typeface="+mn-lt"/>
+                  <a:ea typeface="+mn-ea"/>
+                  <a:cs typeface="+mn-cs"/>
+                </a:rPr>
+                <a:t>连续会话、身份、权限、</a:t>
+              </a:r>
+            </a:p>
+          </p:txBody>
+        </p:sp>
+        <p:sp>
+          <p:nvSpPr>
+            <p:cNvPr id="19" name="TextBox 19"/>
+            <p:cNvSpPr txBox="1"/>
+            <p:nvPr/>
+          </p:nvSpPr>
+          <p:spPr>
+            <a:xfrm>
+              <a:off x="5995797" y="2266950"/>
+              <a:ext cx="1461110" cy="191643"/>
+            </a:xfrm>
+            <a:prstGeom prst="rect">
+              <a:avLst/>
+            </a:prstGeom>
+            <a:noFill/>
+            <a:ln>
+              <a:noFill/>
+            </a:ln>
+          </p:spPr>
+          <p:txBody>
+            <a:bodyPr wrap="none" lIns="0" tIns="0" rIns="0" bIns="0" anchor="t" anchorCtr="0">
+              <a:spAutoFit/>
+            </a:bodyPr>
+            <a:lstStyle/>
+            <a:p>
+              <a:pPr algn="l"/>
+              <a:r>
+                <a:rPr lang="zh-CN" sz="980" dirty="0">
+                  <a:solidFill>
+                    <a:srgbClr val="F4F0E7"/>
+                  </a:solidFill>
+                  <a:latin typeface="+mn-lt"/>
+                  <a:ea typeface="+mn-ea"/>
+                  <a:cs typeface="+mn-cs"/>
+                </a:rPr>
+                <a:t>审计、转人工、跨域接管</a:t>
+              </a:r>
+            </a:p>
+          </p:txBody>
+        </p:sp>
+        <p:sp>
+          <p:nvSpPr>
+            <p:cNvPr id="20" name="TextBox 20"/>
+            <p:cNvSpPr txBox="1"/>
+            <p:nvPr/>
+          </p:nvSpPr>
+          <p:spPr>
+            <a:xfrm>
+              <a:off x="5995988" y="2495550"/>
+              <a:ext cx="1099947" cy="176212"/>
+            </a:xfrm>
+            <a:prstGeom prst="rect">
+              <a:avLst/>
+            </a:prstGeom>
+            <a:noFill/>
+            <a:ln>
+              <a:noFill/>
+            </a:ln>
+          </p:spPr>
+          <p:txBody>
+            <a:bodyPr wrap="none" lIns="0" tIns="0" rIns="0" bIns="0" anchor="t" anchorCtr="0">
+              <a:spAutoFit/>
+            </a:bodyPr>
+            <a:lstStyle/>
+            <a:p>
+              <a:pPr algn="l"/>
+              <a:r>
+                <a:rPr lang="zh-CN" sz="900" dirty="0">
+                  <a:solidFill>
+                    <a:srgbClr val="F8E9E2"/>
+                  </a:solidFill>
+                  <a:latin typeface="+mn-lt"/>
+                  <a:ea typeface="+mn-ea"/>
+                  <a:cs typeface="+mn-cs"/>
+                </a:rPr>
+                <a:t>卖点：让任务可治理</a:t>
+              </a:r>
+            </a:p>
+          </p:txBody>
+        </p:sp>
+        <p:sp>
+          <p:nvSpPr>
+            <p:cNvPr id="21" name="Rectangle 21"/>
+            <p:cNvSpPr/>
+            <p:nvPr/>
+          </p:nvSpPr>
+          <p:spPr>
+            <a:xfrm>
+              <a:off x="8458200" y="1638300"/>
+              <a:ext cx="3162300" cy="1104900"/>
+            </a:xfrm>
+            <a:prstGeom prst="rect">
+              <a:avLst/>
+            </a:prstGeom>
+            <a:solidFill>
+              <a:srgbClr val="6B6760"/>
+            </a:solidFill>
+            <a:ln>
+              <a:noFill/>
+            </a:ln>
+          </p:spPr>
+        </p:sp>
+        <p:sp>
+          <p:nvSpPr>
+            <p:cNvPr id="22" name="TextBox 22"/>
+            <p:cNvSpPr txBox="1"/>
+            <p:nvPr/>
+          </p:nvSpPr>
+          <p:spPr>
+            <a:xfrm>
+              <a:off x="8623935" y="1784350"/>
+              <a:ext cx="1102849" cy="220028"/>
+            </a:xfrm>
+            <a:prstGeom prst="rect">
+              <a:avLst/>
+            </a:prstGeom>
+            <a:noFill/>
+            <a:ln>
+              <a:noFill/>
+            </a:ln>
+          </p:spPr>
+          <p:txBody>
+            <a:bodyPr wrap="none" lIns="0" tIns="0" rIns="0" bIns="0" anchor="t" anchorCtr="0">
+              <a:spAutoFit/>
+            </a:bodyPr>
+            <a:lstStyle/>
+            <a:p>
+              <a:pPr algn="l"/>
+              <a:r>
+                <a:rPr lang="zh-CN" sz="1120" b="1" dirty="0">
+                  <a:solidFill>
+                    <a:srgbClr val="F4F0E7"/>
+                  </a:solidFill>
+                  <a:latin typeface="+mn-lt"/>
+                  <a:ea typeface="+mn-ea"/>
+                  <a:cs typeface="+mn-cs"/>
+                </a:rPr>
+                <a:t>Agent 互操作层</a:t>
+              </a:r>
+            </a:p>
+          </p:txBody>
+        </p:sp>
+        <p:sp>
+          <p:nvSpPr>
+            <p:cNvPr id="23" name="TextBox 23"/>
+            <p:cNvSpPr txBox="1"/>
+            <p:nvPr/>
+          </p:nvSpPr>
+          <p:spPr>
+            <a:xfrm>
+              <a:off x="8624697" y="2057400"/>
+              <a:ext cx="2428413" cy="191643"/>
+            </a:xfrm>
+            <a:prstGeom prst="rect">
+              <a:avLst/>
+            </a:prstGeom>
+            <a:noFill/>
+            <a:ln>
+              <a:noFill/>
+            </a:ln>
+          </p:spPr>
+          <p:txBody>
+            <a:bodyPr wrap="none" lIns="0" tIns="0" rIns="0" bIns="0" anchor="t" anchorCtr="0">
+              <a:spAutoFit/>
+            </a:bodyPr>
+            <a:lstStyle/>
+            <a:p>
+              <a:pPr algn="l"/>
+              <a:r>
+                <a:rPr lang="zh-CN" sz="980" dirty="0">
+                  <a:solidFill>
+                    <a:srgbClr val="F4F0E7"/>
+                  </a:solidFill>
+                  <a:latin typeface="+mn-lt"/>
+                  <a:ea typeface="+mn-ea"/>
+                  <a:cs typeface="+mn-cs"/>
+                </a:rPr>
+                <a:t>个人 Agent ↔ 企业 Agent；身份、授权、</a:t>
+              </a:r>
+            </a:p>
+          </p:txBody>
+        </p:sp>
+        <p:sp>
+          <p:nvSpPr>
+            <p:cNvPr id="24" name="TextBox 24"/>
+            <p:cNvSpPr txBox="1"/>
+            <p:nvPr/>
+          </p:nvSpPr>
+          <p:spPr>
+            <a:xfrm>
+              <a:off x="8624697" y="2266950"/>
+              <a:ext cx="1593037" cy="191643"/>
+            </a:xfrm>
+            <a:prstGeom prst="rect">
+              <a:avLst/>
+            </a:prstGeom>
+            <a:noFill/>
+            <a:ln>
+              <a:noFill/>
+            </a:ln>
+          </p:spPr>
+          <p:txBody>
+            <a:bodyPr wrap="none" lIns="0" tIns="0" rIns="0" bIns="0" anchor="t" anchorCtr="0">
+              <a:spAutoFit/>
+            </a:bodyPr>
+            <a:lstStyle/>
+            <a:p>
+              <a:pPr algn="l"/>
+              <a:r>
+                <a:rPr lang="zh-CN" sz="980" dirty="0">
+                  <a:solidFill>
+                    <a:srgbClr val="F4F0E7"/>
+                  </a:solidFill>
+                  <a:latin typeface="+mn-lt"/>
+                  <a:ea typeface="+mn-ea"/>
+                  <a:cs typeface="+mn-cs"/>
+                </a:rPr>
+                <a:t>交易、可信地址与网络路由</a:t>
+              </a:r>
+            </a:p>
+          </p:txBody>
+        </p:sp>
+        <p:sp>
+          <p:nvSpPr>
+            <p:cNvPr id="25" name="TextBox 25"/>
+            <p:cNvSpPr txBox="1"/>
+            <p:nvPr/>
+          </p:nvSpPr>
+          <p:spPr>
+            <a:xfrm>
+              <a:off x="8624888" y="2495550"/>
+              <a:ext cx="1705737" cy="176212"/>
+            </a:xfrm>
+            <a:prstGeom prst="rect">
+              <a:avLst/>
+            </a:prstGeom>
+            <a:noFill/>
+            <a:ln>
+              <a:noFill/>
+            </a:ln>
+          </p:spPr>
+          <p:txBody>
+            <a:bodyPr wrap="none" lIns="0" tIns="0" rIns="0" bIns="0" anchor="t" anchorCtr="0">
+              <a:spAutoFit/>
+            </a:bodyPr>
+            <a:lstStyle/>
+            <a:p>
+              <a:pPr algn="l"/>
+              <a:r>
+                <a:rPr lang="zh-CN" sz="900" dirty="0">
+                  <a:solidFill>
+                    <a:srgbClr val="E8E4DD"/>
+                  </a:solidFill>
+                  <a:latin typeface="+mn-lt"/>
+                  <a:ea typeface="+mn-ea"/>
+                  <a:cs typeface="+mn-cs"/>
+                </a:rPr>
+                <a:t>卖点：从连接人升级为连接任务</a:t>
+              </a:r>
+            </a:p>
+          </p:txBody>
+        </p:sp>
+        <p:sp>
+          <p:nvSpPr>
+            <p:cNvPr id="26" name="TextBox 26"/>
+            <p:cNvSpPr txBox="1"/>
+            <p:nvPr/>
+          </p:nvSpPr>
+          <p:spPr>
+            <a:xfrm>
+              <a:off x="566166" y="3016250"/>
+              <a:ext cx="1605915" cy="205359"/>
+            </a:xfrm>
+            <a:prstGeom prst="rect">
+              <a:avLst/>
+            </a:prstGeom>
+            <a:noFill/>
+            <a:ln>
+              <a:noFill/>
+            </a:ln>
+          </p:spPr>
+          <p:txBody>
+            <a:bodyPr wrap="none" lIns="0" tIns="0" rIns="0" bIns="0" anchor="t" anchorCtr="0">
+              <a:spAutoFit/>
+            </a:bodyPr>
+            <a:lstStyle/>
+            <a:p>
+              <a:pPr algn="l"/>
+              <a:r>
+                <a:rPr lang="zh-CN" sz="1050" b="1" spc="150" dirty="0">
+                  <a:solidFill>
+                    <a:srgbClr val="C14E2C"/>
+                  </a:solidFill>
+                  <a:latin typeface="+mn-lt"/>
+                  <a:ea typeface="+mn-ea"/>
+                  <a:cs typeface="+mn-cs"/>
+                </a:rPr>
+                <a:t>可以做的三个产品方向</a:t>
+              </a:r>
+            </a:p>
+          </p:txBody>
+        </p:sp>
+        <p:sp>
+          <p:nvSpPr>
+            <p:cNvPr id="27" name="TextBox 27"/>
+            <p:cNvSpPr txBox="1"/>
+            <p:nvPr/>
+          </p:nvSpPr>
+          <p:spPr>
+            <a:xfrm>
+              <a:off x="565404" y="3276600"/>
+              <a:ext cx="1435829" cy="234696"/>
+            </a:xfrm>
+            <a:prstGeom prst="rect">
+              <a:avLst/>
+            </a:prstGeom>
+            <a:noFill/>
+            <a:ln>
+              <a:noFill/>
+            </a:ln>
+          </p:spPr>
+          <p:txBody>
+            <a:bodyPr wrap="none" lIns="0" tIns="0" rIns="0" bIns="0" anchor="t" anchorCtr="0">
+              <a:spAutoFit/>
+            </a:bodyPr>
+            <a:lstStyle/>
+            <a:p>
+              <a:pPr algn="l"/>
+              <a:r>
+                <a:rPr lang="zh-CN" sz="1200" b="1" dirty="0">
+                  <a:solidFill>
+                    <a:srgbClr val="1D1C19"/>
+                  </a:solidFill>
+                  <a:latin typeface="+mn-lt"/>
+                  <a:ea typeface="+mn-ea"/>
+                  <a:cs typeface="+mn-cs"/>
+                </a:rPr>
+                <a:t>1. 实时多模态 QoS</a:t>
+              </a:r>
+            </a:p>
+          </p:txBody>
+        </p:sp>
+        <p:sp>
+          <p:nvSpPr>
+            <p:cNvPr id="28" name="TextBox 28"/>
+            <p:cNvSpPr txBox="1"/>
+            <p:nvPr/>
+          </p:nvSpPr>
+          <p:spPr>
+            <a:xfrm>
+              <a:off x="566547" y="3543300"/>
+              <a:ext cx="3703879" cy="191643"/>
+            </a:xfrm>
+            <a:prstGeom prst="rect">
+              <a:avLst/>
+            </a:prstGeom>
+            <a:noFill/>
+            <a:ln>
+              <a:noFill/>
+            </a:ln>
+          </p:spPr>
+          <p:txBody>
+            <a:bodyPr wrap="none" lIns="0" tIns="0" rIns="0" bIns="0" anchor="t" anchorCtr="0">
+              <a:spAutoFit/>
+            </a:bodyPr>
+            <a:lstStyle/>
+            <a:p>
+              <a:pPr algn="l"/>
+              <a:r>
+                <a:rPr lang="zh-CN" sz="980" dirty="0">
+                  <a:solidFill>
+                    <a:srgbClr val="3F3B35"/>
+                  </a:solidFill>
+                  <a:latin typeface="+mn-lt"/>
+                  <a:ea typeface="+mn-ea"/>
+                  <a:cs typeface="+mn-cs"/>
+                </a:rPr>
+                <a:t>按任务保障带宽、时延、优先级；面向眼镜、车机、远程协助。</a:t>
+              </a:r>
+            </a:p>
+          </p:txBody>
+        </p:sp>
+        <p:sp>
+          <p:nvSpPr>
+            <p:cNvPr id="29" name="TextBox 29"/>
+            <p:cNvSpPr txBox="1"/>
+            <p:nvPr/>
+          </p:nvSpPr>
+          <p:spPr>
+            <a:xfrm>
+              <a:off x="4184904" y="3276600"/>
+              <a:ext cx="1964116" cy="234696"/>
+            </a:xfrm>
+            <a:prstGeom prst="rect">
+              <a:avLst/>
+            </a:prstGeom>
+            <a:noFill/>
+            <a:ln>
+              <a:noFill/>
+            </a:ln>
+          </p:spPr>
+          <p:txBody>
+            <a:bodyPr wrap="none" lIns="0" tIns="0" rIns="0" bIns="0" anchor="t" anchorCtr="0">
+              <a:spAutoFit/>
+            </a:bodyPr>
+            <a:lstStyle/>
+            <a:p>
+              <a:pPr algn="l"/>
+              <a:r>
+                <a:rPr lang="en-US" sz="1200" b="1" dirty="0">
+                  <a:solidFill>
+                    <a:srgbClr val="1D1C19"/>
+                  </a:solidFill>
+                  <a:latin typeface="+mn-lt"/>
+                  <a:ea typeface="+mn-ea"/>
+                  <a:cs typeface="+mn-cs"/>
+                </a:rPr>
+                <a:t>2. Agent Session Fabric</a:t>
+              </a:r>
+            </a:p>
+          </p:txBody>
+        </p:sp>
+        <p:sp>
+          <p:nvSpPr>
+            <p:cNvPr id="30" name="TextBox 30"/>
+            <p:cNvSpPr txBox="1"/>
+            <p:nvPr/>
+          </p:nvSpPr>
+          <p:spPr>
+            <a:xfrm>
+              <a:off x="4186047" y="3543300"/>
+              <a:ext cx="2912313" cy="191643"/>
+            </a:xfrm>
+            <a:prstGeom prst="rect">
+              <a:avLst/>
+            </a:prstGeom>
+            <a:noFill/>
+            <a:ln>
+              <a:noFill/>
+            </a:ln>
+          </p:spPr>
+          <p:txBody>
+            <a:bodyPr wrap="none" lIns="0" tIns="0" rIns="0" bIns="0" anchor="t" anchorCtr="0">
+              <a:spAutoFit/>
+            </a:bodyPr>
+            <a:lstStyle/>
+            <a:p>
+              <a:pPr algn="l"/>
+              <a:r>
+                <a:rPr lang="zh-CN" sz="980" dirty="0">
+                  <a:solidFill>
+                    <a:srgbClr val="3F3B35"/>
+                  </a:solidFill>
+                  <a:latin typeface="+mn-lt"/>
+                  <a:ea typeface="+mn-ea"/>
+                  <a:cs typeface="+mn-cs"/>
+                </a:rPr>
+                <a:t>统一连续会话、上下文状态、权限和跨设备切换。</a:t>
+              </a:r>
+            </a:p>
+          </p:txBody>
+        </p:sp>
+        <p:sp>
+          <p:nvSpPr>
+            <p:cNvPr id="31" name="TextBox 31"/>
+            <p:cNvSpPr txBox="1"/>
+            <p:nvPr/>
+          </p:nvSpPr>
+          <p:spPr>
+            <a:xfrm>
+              <a:off x="8090154" y="3276600"/>
+              <a:ext cx="1470502" cy="234696"/>
+            </a:xfrm>
+            <a:prstGeom prst="rect">
+              <a:avLst/>
+            </a:prstGeom>
+            <a:noFill/>
+            <a:ln>
+              <a:noFill/>
+            </a:ln>
+          </p:spPr>
+          <p:txBody>
+            <a:bodyPr wrap="none" lIns="0" tIns="0" rIns="0" bIns="0" anchor="t" anchorCtr="0">
+              <a:spAutoFit/>
+            </a:bodyPr>
+            <a:lstStyle/>
+            <a:p>
+              <a:pPr algn="l"/>
+              <a:r>
+                <a:rPr lang="zh-CN" sz="1200" b="1" dirty="0">
+                  <a:solidFill>
+                    <a:srgbClr val="1D1C19"/>
+                  </a:solidFill>
+                  <a:latin typeface="+mn-lt"/>
+                  <a:ea typeface="+mn-ea"/>
+                  <a:cs typeface="+mn-cs"/>
+                </a:rPr>
+                <a:t>3. 可信 Agent 通道</a:t>
+              </a:r>
+            </a:p>
+          </p:txBody>
+        </p:sp>
+        <p:sp>
+          <p:nvSpPr>
+            <p:cNvPr id="32" name="TextBox 32"/>
+            <p:cNvSpPr txBox="1"/>
+            <p:nvPr/>
+          </p:nvSpPr>
+          <p:spPr>
+            <a:xfrm>
+              <a:off x="8091297" y="3543300"/>
+              <a:ext cx="2920279" cy="191643"/>
+            </a:xfrm>
+            <a:prstGeom prst="rect">
+              <a:avLst/>
+            </a:prstGeom>
+            <a:noFill/>
+            <a:ln>
+              <a:noFill/>
+            </a:ln>
+          </p:spPr>
+          <p:txBody>
+            <a:bodyPr wrap="none" lIns="0" tIns="0" rIns="0" bIns="0" anchor="t" anchorCtr="0">
+              <a:spAutoFit/>
+            </a:bodyPr>
+            <a:lstStyle/>
+            <a:p>
+              <a:pPr algn="l"/>
+              <a:r>
+                <a:rPr lang="zh-CN" sz="980" dirty="0">
+                  <a:solidFill>
+                    <a:srgbClr val="3F3B35"/>
+                  </a:solidFill>
+                  <a:latin typeface="+mn-lt"/>
+                  <a:ea typeface="+mn-ea"/>
+                  <a:cs typeface="+mn-cs"/>
+                </a:rPr>
+                <a:t>身份、授权、审计、数据边界、人工接管和 SLA。</a:t>
+              </a:r>
+            </a:p>
+          </p:txBody>
+        </p:sp>
+        <p:sp>
+          <p:nvSpPr>
+            <p:cNvPr id="33" name="Line 33"/>
+            <p:cNvSpPr/>
+            <p:nvPr/>
+          </p:nvSpPr>
+          <p:spPr>
+            <a:xfrm>
+              <a:off x="571500" y="3943350"/>
+              <a:ext cx="11049000" cy="9525"/>
+            </a:xfrm>
+            <a:custGeom>
+              <a:avLst/>
+              <a:gdLst/>
+              <a:ahLst/>
+              <a:cxnLst/>
+              <a:rect l="l" t="t" r="r" b="b"/>
+              <a:pathLst>
+                <a:path w="11049000" h="9525">
+                  <a:moveTo>
+                    <a:pt x="0" y="0"/>
+                  </a:moveTo>
+                  <a:lnTo>
+                    <a:pt x="11049000" y="0"/>
+                  </a:lnTo>
+                </a:path>
+              </a:pathLst>
+            </a:custGeom>
+            <a:noFill/>
+            <a:ln w="9525">
+              <a:solidFill>
+                <a:srgbClr val="C9C1B4"/>
+              </a:solidFill>
+            </a:ln>
+          </p:spPr>
+        </p:sp>
+        <p:sp>
+          <p:nvSpPr>
+            <p:cNvPr id="34" name="TextBox 34"/>
+            <p:cNvSpPr txBox="1"/>
+            <p:nvPr/>
+          </p:nvSpPr>
+          <p:spPr>
+            <a:xfrm>
+              <a:off x="566166" y="4140200"/>
+              <a:ext cx="636651" cy="205359"/>
+            </a:xfrm>
+            <a:prstGeom prst="rect">
+              <a:avLst/>
+            </a:prstGeom>
+            <a:noFill/>
+            <a:ln>
+              <a:noFill/>
+            </a:ln>
+          </p:spPr>
+          <p:txBody>
+            <a:bodyPr wrap="none" lIns="0" tIns="0" rIns="0" bIns="0" anchor="t" anchorCtr="0">
+              <a:spAutoFit/>
+            </a:bodyPr>
+            <a:lstStyle/>
+            <a:p>
+              <a:pPr algn="l"/>
+              <a:r>
+                <a:rPr lang="zh-CN" sz="1050" b="1" spc="150" dirty="0">
+                  <a:solidFill>
+                    <a:srgbClr val="1F5A49"/>
+                  </a:solidFill>
+                  <a:latin typeface="+mn-lt"/>
+                  <a:ea typeface="+mn-ea"/>
+                  <a:cs typeface="+mn-cs"/>
+                </a:rPr>
+                <a:t>建议路线</a:t>
+              </a:r>
+            </a:p>
+          </p:txBody>
+        </p:sp>
+        <p:sp>
+          <p:nvSpPr>
+            <p:cNvPr id="35" name="TextBox 35"/>
+            <p:cNvSpPr txBox="1"/>
+            <p:nvPr/>
+          </p:nvSpPr>
+          <p:spPr>
+            <a:xfrm>
+              <a:off x="566166" y="4425950"/>
+              <a:ext cx="523065" cy="205359"/>
+            </a:xfrm>
+            <a:prstGeom prst="rect">
+              <a:avLst/>
+            </a:prstGeom>
+            <a:noFill/>
+            <a:ln>
+              <a:noFill/>
+            </a:ln>
+          </p:spPr>
+          <p:txBody>
+            <a:bodyPr wrap="none" lIns="0" tIns="0" rIns="0" bIns="0" anchor="t" anchorCtr="0">
+              <a:spAutoFit/>
+            </a:bodyPr>
+            <a:lstStyle/>
+            <a:p>
+              <a:pPr algn="l"/>
+              <a:r>
+                <a:rPr lang="zh-CN" sz="1050" b="1" dirty="0">
+                  <a:solidFill>
+                    <a:srgbClr val="1D1C19"/>
+                  </a:solidFill>
+                  <a:latin typeface="+mn-lt"/>
+                  <a:ea typeface="+mn-ea"/>
+                  <a:cs typeface="+mn-cs"/>
+                </a:rPr>
+                <a:t>0–30 天</a:t>
+              </a:r>
+            </a:p>
+          </p:txBody>
+        </p:sp>
+        <p:sp>
+          <p:nvSpPr>
+            <p:cNvPr id="36" name="TextBox 36"/>
+            <p:cNvSpPr txBox="1"/>
+            <p:nvPr/>
+          </p:nvSpPr>
+          <p:spPr>
+            <a:xfrm>
+              <a:off x="1423416" y="4425950"/>
+              <a:ext cx="3831869" cy="205359"/>
+            </a:xfrm>
+            <a:prstGeom prst="rect">
+              <a:avLst/>
+            </a:prstGeom>
+            <a:noFill/>
+            <a:ln>
+              <a:noFill/>
+            </a:ln>
+          </p:spPr>
+          <p:txBody>
+            <a:bodyPr wrap="none" lIns="0" tIns="0" rIns="0" bIns="0" anchor="t" anchorCtr="0">
+              <a:spAutoFit/>
+            </a:bodyPr>
+            <a:lstStyle/>
+            <a:p>
+              <a:pPr algn="l"/>
+              <a:r>
+                <a:rPr lang="zh-CN" sz="1050" dirty="0">
+                  <a:solidFill>
+                    <a:srgbClr val="3F3B35"/>
+                  </a:solidFill>
+                  <a:latin typeface="+mn-lt"/>
+                  <a:ea typeface="+mn-ea"/>
+                  <a:cs typeface="+mn-cs"/>
+                </a:rPr>
+                <a:t>拿 Muse / Gemini Live / SeedRealtime 做同一任务网络基线</a:t>
+              </a:r>
+            </a:p>
+          </p:txBody>
+        </p:sp>
+        <p:sp>
+          <p:nvSpPr>
+            <p:cNvPr id="37" name="TextBox 37"/>
+            <p:cNvSpPr txBox="1"/>
+            <p:nvPr/>
+          </p:nvSpPr>
+          <p:spPr>
+            <a:xfrm>
+              <a:off x="566166" y="4711700"/>
+              <a:ext cx="582786" cy="205359"/>
+            </a:xfrm>
+            <a:prstGeom prst="rect">
+              <a:avLst/>
+            </a:prstGeom>
+            <a:noFill/>
+            <a:ln>
+              <a:noFill/>
+            </a:ln>
+          </p:spPr>
+          <p:txBody>
+            <a:bodyPr wrap="none" lIns="0" tIns="0" rIns="0" bIns="0" anchor="t" anchorCtr="0">
+              <a:spAutoFit/>
+            </a:bodyPr>
+            <a:lstStyle/>
+            <a:p>
+              <a:pPr algn="l"/>
+              <a:r>
+                <a:rPr lang="zh-CN" sz="1050" b="1" dirty="0">
+                  <a:solidFill>
+                    <a:srgbClr val="1D1C19"/>
+                  </a:solidFill>
+                  <a:latin typeface="+mn-lt"/>
+                  <a:ea typeface="+mn-ea"/>
+                  <a:cs typeface="+mn-cs"/>
+                </a:rPr>
+                <a:t>1–3 个月</a:t>
+              </a:r>
+            </a:p>
+          </p:txBody>
+        </p:sp>
+        <p:sp>
+          <p:nvSpPr>
+            <p:cNvPr id="38" name="TextBox 38"/>
+            <p:cNvSpPr txBox="1"/>
+            <p:nvPr/>
+          </p:nvSpPr>
+          <p:spPr>
+            <a:xfrm>
+              <a:off x="1613916" y="4711700"/>
+              <a:ext cx="3265075" cy="205359"/>
+            </a:xfrm>
+            <a:prstGeom prst="rect">
+              <a:avLst/>
+            </a:prstGeom>
+            <a:noFill/>
+            <a:ln>
+              <a:noFill/>
+            </a:ln>
+          </p:spPr>
+          <p:txBody>
+            <a:bodyPr wrap="none" lIns="0" tIns="0" rIns="0" bIns="0" anchor="t" anchorCtr="0">
+              <a:spAutoFit/>
+            </a:bodyPr>
+            <a:lstStyle/>
+            <a:p>
+              <a:pPr algn="l"/>
+              <a:r>
+                <a:rPr lang="zh-CN" sz="1050" dirty="0">
+                  <a:solidFill>
+                    <a:srgbClr val="3F3B35"/>
+                  </a:solidFill>
+                  <a:latin typeface="+mn-lt"/>
+                  <a:ea typeface="+mn-ea"/>
+                  <a:cs typeface="+mn-cs"/>
+                </a:rPr>
+                <a:t>做端边云分流、弱网降级、隐私脱敏和人工接管 PoC</a:t>
+              </a:r>
+            </a:p>
+          </p:txBody>
+        </p:sp>
+        <p:sp>
+          <p:nvSpPr>
+            <p:cNvPr id="39" name="TextBox 39"/>
+            <p:cNvSpPr txBox="1"/>
+            <p:nvPr/>
+          </p:nvSpPr>
+          <p:spPr>
+            <a:xfrm>
+              <a:off x="566166" y="4997450"/>
+              <a:ext cx="582786" cy="205359"/>
+            </a:xfrm>
+            <a:prstGeom prst="rect">
+              <a:avLst/>
+            </a:prstGeom>
+            <a:noFill/>
+            <a:ln>
+              <a:noFill/>
+            </a:ln>
+          </p:spPr>
+          <p:txBody>
+            <a:bodyPr wrap="none" lIns="0" tIns="0" rIns="0" bIns="0" anchor="t" anchorCtr="0">
+              <a:spAutoFit/>
+            </a:bodyPr>
+            <a:lstStyle/>
+            <a:p>
+              <a:pPr algn="l"/>
+              <a:r>
+                <a:rPr lang="zh-CN" sz="1050" b="1" dirty="0">
+                  <a:solidFill>
+                    <a:srgbClr val="1D1C19"/>
+                  </a:solidFill>
+                  <a:latin typeface="+mn-lt"/>
+                  <a:ea typeface="+mn-ea"/>
+                  <a:cs typeface="+mn-cs"/>
+                </a:rPr>
+                <a:t>3–6 个月</a:t>
+              </a:r>
+            </a:p>
+          </p:txBody>
+        </p:sp>
+        <p:sp>
+          <p:nvSpPr>
+            <p:cNvPr id="40" name="TextBox 40"/>
+            <p:cNvSpPr txBox="1"/>
+            <p:nvPr/>
+          </p:nvSpPr>
+          <p:spPr>
+            <a:xfrm>
+              <a:off x="1613916" y="4997450"/>
+              <a:ext cx="3544443" cy="205359"/>
+            </a:xfrm>
+            <a:prstGeom prst="rect">
+              <a:avLst/>
+            </a:prstGeom>
+            <a:noFill/>
+            <a:ln>
+              <a:noFill/>
+            </a:ln>
+          </p:spPr>
+          <p:txBody>
+            <a:bodyPr wrap="none" lIns="0" tIns="0" rIns="0" bIns="0" anchor="t" anchorCtr="0">
+              <a:spAutoFit/>
+            </a:bodyPr>
+            <a:lstStyle/>
+            <a:p>
+              <a:pPr algn="l"/>
+              <a:r>
+                <a:rPr lang="zh-CN" sz="1050" dirty="0">
+                  <a:solidFill>
+                    <a:srgbClr val="3F3B35"/>
+                  </a:solidFill>
+                  <a:latin typeface="+mn-lt"/>
+                  <a:ea typeface="+mn-ea"/>
+                  <a:cs typeface="+mn-cs"/>
+                </a:rPr>
+                <a:t>选一个高价值任务做垂直闭环：无障碍、现场维护或车舱</a:t>
+              </a:r>
+            </a:p>
+          </p:txBody>
+        </p:sp>
+        <p:sp>
+          <p:nvSpPr>
+            <p:cNvPr id="41" name="TextBox 41"/>
+            <p:cNvSpPr txBox="1"/>
+            <p:nvPr/>
+          </p:nvSpPr>
+          <p:spPr>
+            <a:xfrm>
+              <a:off x="566166" y="5283200"/>
+              <a:ext cx="664416" cy="205359"/>
+            </a:xfrm>
+            <a:prstGeom prst="rect">
+              <a:avLst/>
+            </a:prstGeom>
+            <a:noFill/>
+            <a:ln>
+              <a:noFill/>
+            </a:ln>
+          </p:spPr>
+          <p:txBody>
+            <a:bodyPr wrap="none" lIns="0" tIns="0" rIns="0" bIns="0" anchor="t" anchorCtr="0">
+              <a:spAutoFit/>
+            </a:bodyPr>
+            <a:lstStyle/>
+            <a:p>
+              <a:pPr algn="l"/>
+              <a:r>
+                <a:rPr lang="zh-CN" sz="1050" b="1" dirty="0">
+                  <a:solidFill>
+                    <a:srgbClr val="1D1C19"/>
+                  </a:solidFill>
+                  <a:latin typeface="+mn-lt"/>
+                  <a:ea typeface="+mn-ea"/>
+                  <a:cs typeface="+mn-cs"/>
+                </a:rPr>
+                <a:t>6–12 个月</a:t>
+              </a:r>
+            </a:p>
+          </p:txBody>
+        </p:sp>
+        <p:sp>
+          <p:nvSpPr>
+            <p:cNvPr id="42" name="TextBox 42"/>
+            <p:cNvSpPr txBox="1"/>
+            <p:nvPr/>
+          </p:nvSpPr>
+          <p:spPr>
+            <a:xfrm>
+              <a:off x="1709166" y="5283200"/>
+              <a:ext cx="3404746" cy="205359"/>
+            </a:xfrm>
+            <a:prstGeom prst="rect">
+              <a:avLst/>
+            </a:prstGeom>
+            <a:noFill/>
+            <a:ln>
+              <a:noFill/>
+            </a:ln>
+          </p:spPr>
+          <p:txBody>
+            <a:bodyPr wrap="none" lIns="0" tIns="0" rIns="0" bIns="0" anchor="t" anchorCtr="0">
+              <a:spAutoFit/>
+            </a:bodyPr>
+            <a:lstStyle/>
+            <a:p>
+              <a:pPr algn="l"/>
+              <a:r>
+                <a:rPr lang="zh-CN" sz="1050" dirty="0">
+                  <a:solidFill>
+                    <a:srgbClr val="3F3B35"/>
+                  </a:solidFill>
+                  <a:latin typeface="+mn-lt"/>
+                  <a:ea typeface="+mn-ea"/>
+                  <a:cs typeface="+mn-cs"/>
+                </a:rPr>
+                <a:t>沉淀 Agent session API、QoS 指标、审计与接管标准</a:t>
+              </a:r>
+            </a:p>
+          </p:txBody>
+        </p:sp>
+        <p:sp>
+          <p:nvSpPr>
+            <p:cNvPr id="43" name="TextBox 43"/>
+            <p:cNvSpPr txBox="1"/>
+            <p:nvPr/>
+          </p:nvSpPr>
+          <p:spPr>
+            <a:xfrm>
+              <a:off x="563499" y="5626100"/>
+              <a:ext cx="8326464" cy="308991"/>
+            </a:xfrm>
+            <a:prstGeom prst="rect">
+              <a:avLst/>
+            </a:prstGeom>
+            <a:noFill/>
+            <a:ln>
+              <a:noFill/>
+            </a:ln>
+          </p:spPr>
+          <p:txBody>
+            <a:bodyPr wrap="none" lIns="0" tIns="0" rIns="0" bIns="0" anchor="t" anchorCtr="0">
+              <a:spAutoFit/>
+            </a:bodyPr>
+            <a:lstStyle/>
+            <a:p>
+              <a:pPr algn="l"/>
+              <a:r>
+                <a:rPr lang="zh-CN" sz="1580" b="1" dirty="0">
+                  <a:solidFill>
+                    <a:srgbClr val="C14E2C"/>
+                  </a:solidFill>
+                  <a:latin typeface="+mj-lt"/>
+                  <a:ea typeface="+mj-ea"/>
+                  <a:cs typeface="+mj-cs"/>
+                </a:rPr>
+                <a:t>分：核心网的机会是把多模态 Agent 从“能用”变成“可承诺、可治理、可规模化”。</a:t>
+              </a:r>
+            </a:p>
+          </p:txBody>
+        </p:sp>
+      </p:grpSp>
+      <p:grpSp>
+        <p:nvGrpSpPr>
+          <p:cNvPr id="47" name="page-footer"/>
+          <p:cNvGrpSpPr/>
+          <p:nvPr/>
+        </p:nvGrpSpPr>
+        <p:grpSpPr>
+          <a:xfrm>
+            <a:off x="566738" y="6286500"/>
+            <a:ext cx="11058525" cy="176212"/>
+            <a:chOff x="566738" y="6286500"/>
+            <a:chExt cx="11058525" cy="176212"/>
+          </a:xfrm>
+        </p:grpSpPr>
+        <p:sp>
+          <p:nvSpPr>
+            <p:cNvPr id="45" name="TextBox 45"/>
+            <p:cNvSpPr txBox="1"/>
+            <p:nvPr/>
+          </p:nvSpPr>
+          <p:spPr>
+            <a:xfrm>
+              <a:off x="566738" y="6286500"/>
+              <a:ext cx="3741191" cy="176212"/>
+            </a:xfrm>
+            <a:prstGeom prst="rect">
+              <a:avLst/>
+            </a:prstGeom>
+            <a:noFill/>
+            <a:ln>
+              <a:noFill/>
+            </a:ln>
+          </p:spPr>
+          <p:txBody>
+            <a:bodyPr wrap="none" lIns="0" tIns="0" rIns="0" bIns="0" anchor="t" anchorCtr="0">
+              <a:spAutoFit/>
+            </a:bodyPr>
+            <a:lstStyle/>
+            <a:p>
+              <a:pPr algn="l"/>
+              <a:r>
+                <a:rPr lang="zh-CN" sz="900" dirty="0">
+                  <a:solidFill>
+                    <a:srgbClr val="7A756D"/>
+                  </a:solidFill>
+                  <a:latin typeface="+mn-lt"/>
+                  <a:ea typeface="+mn-ea"/>
+                  <a:cs typeface="+mn-cs"/>
+                </a:rPr>
+                <a:t>补页 05 / 05 · 基于现有证据的产品方向推断，尚未经过真实客户验证</a:t>
+              </a:r>
+            </a:p>
+          </p:txBody>
+        </p:sp>
+        <p:sp>
+          <p:nvSpPr>
+            <p:cNvPr id="46" name="TextBox 46"/>
+            <p:cNvSpPr txBox="1"/>
+            <p:nvPr/>
+          </p:nvSpPr>
+          <p:spPr>
+            <a:xfrm>
+              <a:off x="11225289" y="6286500"/>
+              <a:ext cx="399974" cy="176212"/>
+            </a:xfrm>
+            <a:prstGeom prst="rect">
+              <a:avLst/>
+            </a:prstGeom>
+            <a:noFill/>
+            <a:ln>
+              <a:noFill/>
+            </a:ln>
+          </p:spPr>
+          <p:txBody>
+            <a:bodyPr wrap="none" lIns="0" tIns="0" rIns="0" bIns="0" anchor="t" anchorCtr="0">
+              <a:spAutoFit/>
+            </a:bodyPr>
+            <a:lstStyle/>
+            <a:p>
+              <a:pPr algn="r"/>
+              <a:r>
+                <a:rPr lang="en-US" sz="900" dirty="0">
+                  <a:solidFill>
+                    <a:srgbClr val="7A756D"/>
+                  </a:solidFill>
+                  <a:latin typeface="+mn-lt"/>
+                  <a:ea typeface="+mn-ea"/>
+                  <a:cs typeface="+mn-cs"/>
+                </a:rPr>
+                <a:t>EXT 05</a:t>
+              </a:r>
+            </a:p>
+          </p:txBody>
+        </p:sp>
+      </p:grpSp>
+    </p:spTree>
+  </p:cSld>
+  <p:clrMapOvr>
+    <a:masterClrMapping/>
+  </p:clrMapOvr>
+  <p:transition xmlns:p14="http://schemas.microsoft.com/office/powerpoint/2010/main" p14:dur="400">
+    <p:fade/>
+  </p:transition>
+</p:sld>
+</file>
+
 <file path=ppt/slides/slide3.xml><?xml version="1.0" encoding="utf-8"?>
 <p:sld xmlns:a="http://schemas.openxmlformats.org/drawingml/2006/main" xmlns:r="http://schemas.openxmlformats.org/officeDocument/2006/relationships" xmlns:p="http://schemas.openxmlformats.org/presentationml/2006/main">
   <p:cSld>
